--- a/RAVI_RAJ_INTERN_PPT.pptx
+++ b/RAVI_RAJ_INTERN_PPT.pptx
@@ -5,29 +5,24 @@
     <p:sldMasterId id="2147483648" r:id="rId1"/>
   </p:sldMasterIdLst>
   <p:notesMasterIdLst>
-    <p:notesMasterId r:id="rId22"/>
+    <p:notesMasterId r:id="rId17"/>
   </p:notesMasterIdLst>
   <p:sldIdLst>
     <p:sldId id="256" r:id="rId2"/>
-    <p:sldId id="271" r:id="rId3"/>
-    <p:sldId id="272" r:id="rId4"/>
-    <p:sldId id="273" r:id="rId5"/>
-    <p:sldId id="274" r:id="rId6"/>
-    <p:sldId id="275" r:id="rId7"/>
-    <p:sldId id="257" r:id="rId8"/>
-    <p:sldId id="258" r:id="rId9"/>
-    <p:sldId id="259" r:id="rId10"/>
-    <p:sldId id="260" r:id="rId11"/>
-    <p:sldId id="261" r:id="rId12"/>
-    <p:sldId id="262" r:id="rId13"/>
-    <p:sldId id="263" r:id="rId14"/>
-    <p:sldId id="264" r:id="rId15"/>
-    <p:sldId id="265" r:id="rId16"/>
-    <p:sldId id="266" r:id="rId17"/>
-    <p:sldId id="267" r:id="rId18"/>
-    <p:sldId id="268" r:id="rId19"/>
-    <p:sldId id="269" r:id="rId20"/>
-    <p:sldId id="270" r:id="rId21"/>
+    <p:sldId id="257" r:id="rId3"/>
+    <p:sldId id="258" r:id="rId4"/>
+    <p:sldId id="259" r:id="rId5"/>
+    <p:sldId id="260" r:id="rId6"/>
+    <p:sldId id="261" r:id="rId7"/>
+    <p:sldId id="262" r:id="rId8"/>
+    <p:sldId id="263" r:id="rId9"/>
+    <p:sldId id="264" r:id="rId10"/>
+    <p:sldId id="265" r:id="rId11"/>
+    <p:sldId id="266" r:id="rId12"/>
+    <p:sldId id="267" r:id="rId13"/>
+    <p:sldId id="268" r:id="rId14"/>
+    <p:sldId id="269" r:id="rId15"/>
+    <p:sldId id="270" r:id="rId16"/>
   </p:sldIdLst>
   <p:sldSz cx="12192000" cy="6858000"/>
   <p:notesSz cx="6858000" cy="9144000"/>
@@ -4310,7 +4305,7 @@
                 </a:solidFill>
                 <a:latin typeface="Aptos Display"/>
               </a:rPr>
-              <a:t>TECHNOLOGIES &amp; TOOLS USED</a:t>
+              <a:t>PERSONAL PORTFOLIO WEBSITE</a:t>
             </a:r>
           </a:p>
         </p:txBody>
@@ -4409,62 +4404,14 @@
       </p:sp>
       <p:sp>
         <p:nvSpPr>
-          <p:cNvPr id="6" name="Rounded Rectangle 5"/>
+          <p:cNvPr id="6" name="Rectangle 5"/>
           <p:cNvSpPr/>
           <p:nvPr/>
         </p:nvSpPr>
         <p:spPr>
           <a:xfrm>
-            <a:off x="685800" y="1417320"/>
-            <a:ext cx="2971800" cy="1143000"/>
-          </a:xfrm>
-          <a:prstGeom prst="roundRect">
-            <a:avLst>
-              <a:gd name="adj" fmla="val 8000"/>
-            </a:avLst>
-          </a:prstGeom>
-          <a:solidFill>
-            <a:srgbClr val="FFFFFF"/>
-          </a:solidFill>
-          <a:ln>
-            <a:solidFill>
-              <a:srgbClr val="D7DDE4"/>
-            </a:solidFill>
-          </a:ln>
-        </p:spPr>
-        <p:style>
-          <a:lnRef idx="1">
-            <a:schemeClr val="accent1"/>
-          </a:lnRef>
-          <a:fillRef idx="3">
-            <a:schemeClr val="accent1"/>
-          </a:fillRef>
-          <a:effectRef idx="2">
-            <a:schemeClr val="accent1"/>
-          </a:effectRef>
-          <a:fontRef idx="minor">
-            <a:schemeClr val="lt1"/>
-          </a:fontRef>
-        </p:style>
-        <p:txBody>
-          <a:bodyPr rtlCol="0" anchor="ctr"/>
-          <a:lstStyle/>
-          <a:p>
-            <a:pPr algn="ctr"/>
-            <a:endParaRPr/>
-          </a:p>
-        </p:txBody>
-      </p:sp>
-      <p:sp>
-        <p:nvSpPr>
-          <p:cNvPr id="7" name="Rectangle 6"/>
-          <p:cNvSpPr/>
-          <p:nvPr/>
-        </p:nvSpPr>
-        <p:spPr>
-          <a:xfrm>
-            <a:off x="685800" y="1417320"/>
-            <a:ext cx="54864" cy="1143000"/>
+            <a:off x="822960" y="1417320"/>
+            <a:ext cx="1965960" cy="411480"/>
           </a:xfrm>
           <a:prstGeom prst="rect">
             <a:avLst/>
@@ -4503,14 +4450,14 @@
       </p:sp>
       <p:sp>
         <p:nvSpPr>
-          <p:cNvPr id="8" name="TextBox 7"/>
+          <p:cNvPr id="7" name="TextBox 6"/>
           <p:cNvSpPr txBox="1"/>
           <p:nvPr/>
         </p:nvSpPr>
         <p:spPr>
           <a:xfrm>
-            <a:off x="914400" y="1618488"/>
-            <a:ext cx="2560320" cy="292608"/>
+            <a:off x="822960" y="1490472"/>
+            <a:ext cx="1965960" cy="201168"/>
           </a:xfrm>
           <a:prstGeom prst="rect">
             <a:avLst/>
@@ -4523,82 +4470,29 @@
           </a:bodyPr>
           <a:lstStyle/>
           <a:p>
-            <a:pPr algn="l"/>
-            <a:r>
-              <a:rPr sz="1450" b="1">
-                <a:solidFill>
-                  <a:srgbClr val="143057"/>
+            <a:pPr algn="ctr"/>
+            <a:r>
+              <a:rPr sz="1000" b="1">
+                <a:solidFill>
+                  <a:srgbClr val="FFFFFF"/>
                 </a:solidFill>
                 <a:latin typeface="Aptos"/>
               </a:rPr>
-              <a:t>HTML5</a:t>
-            </a:r>
-          </a:p>
-        </p:txBody>
-      </p:sp>
-      <p:sp>
-        <p:nvSpPr>
-          <p:cNvPr id="9" name="TextBox 8"/>
-          <p:cNvSpPr txBox="1"/>
-          <p:nvPr/>
-        </p:nvSpPr>
-        <p:spPr>
-          <a:xfrm>
-            <a:off x="914400" y="2011680"/>
-            <a:ext cx="2597186" cy="437043"/>
-          </a:xfrm>
-          <a:prstGeom prst="rect">
-            <a:avLst/>
-          </a:prstGeom>
-          <a:noFill/>
-        </p:spPr>
-        <p:txBody>
-          <a:bodyPr wrap="none" anchor="t">
-            <a:spAutoFit/>
-          </a:bodyPr>
-          <a:lstStyle/>
-          <a:p>
-            <a:pPr algn="l"/>
-            <a:r>
-              <a:rPr sz="1120" b="0" dirty="0">
-                <a:solidFill>
-                  <a:srgbClr val="2D2D2D"/>
-                </a:solidFill>
-                <a:latin typeface="Aptos"/>
-              </a:rPr>
-              <a:t>Structure of web pages and application</a:t>
-            </a:r>
-            <a:endParaRPr lang="en-US" sz="1120" b="0" dirty="0">
-              <a:solidFill>
-                <a:srgbClr val="2D2D2D"/>
-              </a:solidFill>
-              <a:latin typeface="Aptos"/>
-            </a:endParaRPr>
-          </a:p>
-          <a:p>
-            <a:pPr algn="l"/>
-            <a:r>
-              <a:rPr sz="1120" b="0" dirty="0">
-                <a:solidFill>
-                  <a:srgbClr val="2D2D2D"/>
-                </a:solidFill>
-                <a:latin typeface="Aptos"/>
-              </a:rPr>
-              <a:t> elements.</a:t>
-            </a:r>
-          </a:p>
-        </p:txBody>
-      </p:sp>
-      <p:sp>
-        <p:nvSpPr>
-          <p:cNvPr id="10" name="Rounded Rectangle 9"/>
+              <a:t>PROJECT 04</a:t>
+            </a:r>
+          </a:p>
+        </p:txBody>
+      </p:sp>
+      <p:sp>
+        <p:nvSpPr>
+          <p:cNvPr id="8" name="Rounded Rectangle 7"/>
           <p:cNvSpPr/>
           <p:nvPr/>
         </p:nvSpPr>
         <p:spPr>
           <a:xfrm>
-            <a:off x="4160520" y="1417320"/>
-            <a:ext cx="2971800" cy="1143000"/>
+            <a:off x="822960" y="2057400"/>
+            <a:ext cx="10561320" cy="3246120"/>
           </a:xfrm>
           <a:prstGeom prst="roundRect">
             <a:avLst>
@@ -4606,7 +4500,7 @@
             </a:avLst>
           </a:prstGeom>
           <a:solidFill>
-            <a:srgbClr val="FFFFFF"/>
+            <a:srgbClr val="F2F5F8"/>
           </a:solidFill>
           <a:ln>
             <a:solidFill>
@@ -4639,60 +4533,101 @@
       </p:sp>
       <p:sp>
         <p:nvSpPr>
-          <p:cNvPr id="11" name="Rectangle 10"/>
-          <p:cNvSpPr/>
-          <p:nvPr/>
-        </p:nvSpPr>
-        <p:spPr>
-          <a:xfrm>
-            <a:off x="4160520" y="1417320"/>
-            <a:ext cx="54864" cy="1143000"/>
-          </a:xfrm>
-          <a:prstGeom prst="rect">
-            <a:avLst/>
-          </a:prstGeom>
-          <a:solidFill>
-            <a:srgbClr val="A6232D"/>
-          </a:solidFill>
-          <a:ln>
-            <a:solidFill>
-              <a:srgbClr val="A6232D"/>
-            </a:solidFill>
-          </a:ln>
-        </p:spPr>
-        <p:style>
-          <a:lnRef idx="1">
-            <a:schemeClr val="accent1"/>
-          </a:lnRef>
-          <a:fillRef idx="3">
-            <a:schemeClr val="accent1"/>
-          </a:fillRef>
-          <a:effectRef idx="2">
-            <a:schemeClr val="accent1"/>
-          </a:effectRef>
-          <a:fontRef idx="minor">
-            <a:schemeClr val="lt1"/>
-          </a:fontRef>
-        </p:style>
-        <p:txBody>
-          <a:bodyPr rtlCol="0" anchor="ctr"/>
-          <a:lstStyle/>
-          <a:p>
-            <a:pPr algn="ctr"/>
-            <a:endParaRPr/>
-          </a:p>
-        </p:txBody>
-      </p:sp>
-      <p:sp>
-        <p:nvSpPr>
-          <p:cNvPr id="12" name="TextBox 11"/>
+          <p:cNvPr id="9" name="TextBox 8"/>
           <p:cNvSpPr txBox="1"/>
           <p:nvPr/>
         </p:nvSpPr>
         <p:spPr>
           <a:xfrm>
-            <a:off x="4389120" y="1618488"/>
-            <a:ext cx="2560320" cy="292608"/>
+            <a:off x="1234440" y="2514600"/>
+            <a:ext cx="9784080" cy="2468880"/>
+          </a:xfrm>
+          <a:prstGeom prst="rect">
+            <a:avLst/>
+          </a:prstGeom>
+          <a:noFill/>
+        </p:spPr>
+        <p:txBody>
+          <a:bodyPr wrap="square">
+            <a:spAutoFit/>
+          </a:bodyPr>
+          <a:lstStyle/>
+          <a:p>
+            <a:pPr>
+              <a:spcAft>
+                <a:spcPts val="1500"/>
+              </a:spcAft>
+              <a:defRPr sz="1700">
+                <a:solidFill>
+                  <a:srgbClr val="2D2D2D"/>
+                </a:solidFill>
+                <a:latin typeface="Aptos"/>
+              </a:defRPr>
+            </a:pPr>
+            <a:r>
+              <a:t>• Designed a personal portfolio website using HTML, CSS and JavaScript.</a:t>
+            </a:r>
+          </a:p>
+          <a:p>
+            <a:pPr>
+              <a:spcAft>
+                <a:spcPts val="1500"/>
+              </a:spcAft>
+              <a:defRPr sz="1700">
+                <a:solidFill>
+                  <a:srgbClr val="2D2D2D"/>
+                </a:solidFill>
+                <a:latin typeface="Aptos"/>
+              </a:defRPr>
+            </a:pPr>
+            <a:r>
+              <a:t>• Included About, Skills, Projects, Education and Contact sections.</a:t>
+            </a:r>
+          </a:p>
+          <a:p>
+            <a:pPr>
+              <a:spcAft>
+                <a:spcPts val="1500"/>
+              </a:spcAft>
+              <a:defRPr sz="1700">
+                <a:solidFill>
+                  <a:srgbClr val="2D2D2D"/>
+                </a:solidFill>
+                <a:latin typeface="Aptos"/>
+              </a:defRPr>
+            </a:pPr>
+            <a:r>
+              <a:t>• Added responsive navigation and interactive page behaviour.</a:t>
+            </a:r>
+          </a:p>
+          <a:p>
+            <a:pPr>
+              <a:spcAft>
+                <a:spcPts val="1500"/>
+              </a:spcAft>
+              <a:defRPr sz="1700">
+                <a:solidFill>
+                  <a:srgbClr val="2D2D2D"/>
+                </a:solidFill>
+                <a:latin typeface="Aptos"/>
+              </a:defRPr>
+            </a:pPr>
+            <a:r>
+              <a:t>• Created the portfolio to present academic and technical work professionally.</a:t>
+            </a:r>
+          </a:p>
+        </p:txBody>
+      </p:sp>
+      <p:sp>
+        <p:nvSpPr>
+          <p:cNvPr id="11" name="TextBox 10"/>
+          <p:cNvSpPr txBox="1"/>
+          <p:nvPr/>
+        </p:nvSpPr>
+        <p:spPr>
+          <a:xfrm>
+            <a:off x="11064240" y="6620256"/>
+            <a:ext cx="411480" cy="164592"/>
           </a:xfrm>
           <a:prstGeom prst="rect">
             <a:avLst/>
@@ -4705,777 +4640,15 @@
           </a:bodyPr>
           <a:lstStyle/>
           <a:p>
-            <a:pPr algn="l"/>
-            <a:r>
-              <a:rPr sz="1450" b="1">
-                <a:solidFill>
-                  <a:srgbClr val="143057"/>
+            <a:pPr algn="r"/>
+            <a:r>
+              <a:rPr sz="850" b="1">
+                <a:solidFill>
+                  <a:srgbClr val="FFFFFF"/>
                 </a:solidFill>
                 <a:latin typeface="Aptos"/>
               </a:rPr>
-              <a:t>CSS3</a:t>
-            </a:r>
-          </a:p>
-        </p:txBody>
-      </p:sp>
-      <p:sp>
-        <p:nvSpPr>
-          <p:cNvPr id="13" name="TextBox 12"/>
-          <p:cNvSpPr txBox="1"/>
-          <p:nvPr/>
-        </p:nvSpPr>
-        <p:spPr>
-          <a:xfrm>
-            <a:off x="4389120" y="2011680"/>
-            <a:ext cx="2560320" cy="365760"/>
-          </a:xfrm>
-          <a:prstGeom prst="rect">
-            <a:avLst/>
-          </a:prstGeom>
-          <a:noFill/>
-        </p:spPr>
-        <p:txBody>
-          <a:bodyPr wrap="none" anchor="t">
-            <a:spAutoFit/>
-          </a:bodyPr>
-          <a:lstStyle/>
-          <a:p>
-            <a:pPr algn="l"/>
-            <a:r>
-              <a:rPr sz="1120" b="0">
-                <a:solidFill>
-                  <a:srgbClr val="2D2D2D"/>
-                </a:solidFill>
-                <a:latin typeface="Aptos"/>
-              </a:rPr>
-              <a:t>Styling, layout and responsive design.</a:t>
-            </a:r>
-          </a:p>
-        </p:txBody>
-      </p:sp>
-      <p:sp>
-        <p:nvSpPr>
-          <p:cNvPr id="14" name="Rounded Rectangle 13"/>
-          <p:cNvSpPr/>
-          <p:nvPr/>
-        </p:nvSpPr>
-        <p:spPr>
-          <a:xfrm>
-            <a:off x="7635240" y="1417320"/>
-            <a:ext cx="2971800" cy="1143000"/>
-          </a:xfrm>
-          <a:prstGeom prst="roundRect">
-            <a:avLst>
-              <a:gd name="adj" fmla="val 8000"/>
-            </a:avLst>
-          </a:prstGeom>
-          <a:solidFill>
-            <a:srgbClr val="FFFFFF"/>
-          </a:solidFill>
-          <a:ln>
-            <a:solidFill>
-              <a:srgbClr val="D7DDE4"/>
-            </a:solidFill>
-          </a:ln>
-        </p:spPr>
-        <p:style>
-          <a:lnRef idx="1">
-            <a:schemeClr val="accent1"/>
-          </a:lnRef>
-          <a:fillRef idx="3">
-            <a:schemeClr val="accent1"/>
-          </a:fillRef>
-          <a:effectRef idx="2">
-            <a:schemeClr val="accent1"/>
-          </a:effectRef>
-          <a:fontRef idx="minor">
-            <a:schemeClr val="lt1"/>
-          </a:fontRef>
-        </p:style>
-        <p:txBody>
-          <a:bodyPr rtlCol="0" anchor="ctr"/>
-          <a:lstStyle/>
-          <a:p>
-            <a:pPr algn="ctr"/>
-            <a:endParaRPr/>
-          </a:p>
-        </p:txBody>
-      </p:sp>
-      <p:sp>
-        <p:nvSpPr>
-          <p:cNvPr id="15" name="Rectangle 14"/>
-          <p:cNvSpPr/>
-          <p:nvPr/>
-        </p:nvSpPr>
-        <p:spPr>
-          <a:xfrm>
-            <a:off x="7635240" y="1417320"/>
-            <a:ext cx="54864" cy="1143000"/>
-          </a:xfrm>
-          <a:prstGeom prst="rect">
-            <a:avLst/>
-          </a:prstGeom>
-          <a:solidFill>
-            <a:srgbClr val="A6232D"/>
-          </a:solidFill>
-          <a:ln>
-            <a:solidFill>
-              <a:srgbClr val="A6232D"/>
-            </a:solidFill>
-          </a:ln>
-        </p:spPr>
-        <p:style>
-          <a:lnRef idx="1">
-            <a:schemeClr val="accent1"/>
-          </a:lnRef>
-          <a:fillRef idx="3">
-            <a:schemeClr val="accent1"/>
-          </a:fillRef>
-          <a:effectRef idx="2">
-            <a:schemeClr val="accent1"/>
-          </a:effectRef>
-          <a:fontRef idx="minor">
-            <a:schemeClr val="lt1"/>
-          </a:fontRef>
-        </p:style>
-        <p:txBody>
-          <a:bodyPr rtlCol="0" anchor="ctr"/>
-          <a:lstStyle/>
-          <a:p>
-            <a:pPr algn="ctr"/>
-            <a:endParaRPr/>
-          </a:p>
-        </p:txBody>
-      </p:sp>
-      <p:sp>
-        <p:nvSpPr>
-          <p:cNvPr id="16" name="TextBox 15"/>
-          <p:cNvSpPr txBox="1"/>
-          <p:nvPr/>
-        </p:nvSpPr>
-        <p:spPr>
-          <a:xfrm>
-            <a:off x="7863840" y="1618488"/>
-            <a:ext cx="2560320" cy="292608"/>
-          </a:xfrm>
-          <a:prstGeom prst="rect">
-            <a:avLst/>
-          </a:prstGeom>
-          <a:noFill/>
-        </p:spPr>
-        <p:txBody>
-          <a:bodyPr wrap="none" anchor="t">
-            <a:spAutoFit/>
-          </a:bodyPr>
-          <a:lstStyle/>
-          <a:p>
-            <a:pPr algn="l"/>
-            <a:r>
-              <a:rPr sz="1450" b="1">
-                <a:solidFill>
-                  <a:srgbClr val="143057"/>
-                </a:solidFill>
-                <a:latin typeface="Aptos"/>
-              </a:rPr>
-              <a:t>JavaScript</a:t>
-            </a:r>
-          </a:p>
-        </p:txBody>
-      </p:sp>
-      <p:sp>
-        <p:nvSpPr>
-          <p:cNvPr id="17" name="TextBox 16"/>
-          <p:cNvSpPr txBox="1"/>
-          <p:nvPr/>
-        </p:nvSpPr>
-        <p:spPr>
-          <a:xfrm>
-            <a:off x="7863840" y="2011680"/>
-            <a:ext cx="2560320" cy="365760"/>
-          </a:xfrm>
-          <a:prstGeom prst="rect">
-            <a:avLst/>
-          </a:prstGeom>
-          <a:noFill/>
-        </p:spPr>
-        <p:txBody>
-          <a:bodyPr wrap="none" anchor="t">
-            <a:spAutoFit/>
-          </a:bodyPr>
-          <a:lstStyle/>
-          <a:p>
-            <a:pPr algn="l"/>
-            <a:r>
-              <a:rPr sz="1120" b="0">
-                <a:solidFill>
-                  <a:srgbClr val="2D2D2D"/>
-                </a:solidFill>
-                <a:latin typeface="Aptos"/>
-              </a:rPr>
-              <a:t>Interactivity, logic and dynamic behaviour.</a:t>
-            </a:r>
-          </a:p>
-        </p:txBody>
-      </p:sp>
-      <p:sp>
-        <p:nvSpPr>
-          <p:cNvPr id="18" name="Rounded Rectangle 17"/>
-          <p:cNvSpPr/>
-          <p:nvPr/>
-        </p:nvSpPr>
-        <p:spPr>
-          <a:xfrm>
-            <a:off x="685800" y="2880360"/>
-            <a:ext cx="2971800" cy="1143000"/>
-          </a:xfrm>
-          <a:prstGeom prst="roundRect">
-            <a:avLst>
-              <a:gd name="adj" fmla="val 8000"/>
-            </a:avLst>
-          </a:prstGeom>
-          <a:solidFill>
-            <a:srgbClr val="FFFFFF"/>
-          </a:solidFill>
-          <a:ln>
-            <a:solidFill>
-              <a:srgbClr val="D7DDE4"/>
-            </a:solidFill>
-          </a:ln>
-        </p:spPr>
-        <p:style>
-          <a:lnRef idx="1">
-            <a:schemeClr val="accent1"/>
-          </a:lnRef>
-          <a:fillRef idx="3">
-            <a:schemeClr val="accent1"/>
-          </a:fillRef>
-          <a:effectRef idx="2">
-            <a:schemeClr val="accent1"/>
-          </a:effectRef>
-          <a:fontRef idx="minor">
-            <a:schemeClr val="lt1"/>
-          </a:fontRef>
-        </p:style>
-        <p:txBody>
-          <a:bodyPr rtlCol="0" anchor="ctr"/>
-          <a:lstStyle/>
-          <a:p>
-            <a:pPr algn="ctr"/>
-            <a:endParaRPr/>
-          </a:p>
-        </p:txBody>
-      </p:sp>
-      <p:sp>
-        <p:nvSpPr>
-          <p:cNvPr id="19" name="Rectangle 18"/>
-          <p:cNvSpPr/>
-          <p:nvPr/>
-        </p:nvSpPr>
-        <p:spPr>
-          <a:xfrm>
-            <a:off x="685800" y="2880360"/>
-            <a:ext cx="54864" cy="1143000"/>
-          </a:xfrm>
-          <a:prstGeom prst="rect">
-            <a:avLst/>
-          </a:prstGeom>
-          <a:solidFill>
-            <a:srgbClr val="A6232D"/>
-          </a:solidFill>
-          <a:ln>
-            <a:solidFill>
-              <a:srgbClr val="A6232D"/>
-            </a:solidFill>
-          </a:ln>
-        </p:spPr>
-        <p:style>
-          <a:lnRef idx="1">
-            <a:schemeClr val="accent1"/>
-          </a:lnRef>
-          <a:fillRef idx="3">
-            <a:schemeClr val="accent1"/>
-          </a:fillRef>
-          <a:effectRef idx="2">
-            <a:schemeClr val="accent1"/>
-          </a:effectRef>
-          <a:fontRef idx="minor">
-            <a:schemeClr val="lt1"/>
-          </a:fontRef>
-        </p:style>
-        <p:txBody>
-          <a:bodyPr rtlCol="0" anchor="ctr"/>
-          <a:lstStyle/>
-          <a:p>
-            <a:pPr algn="ctr"/>
-            <a:endParaRPr/>
-          </a:p>
-        </p:txBody>
-      </p:sp>
-      <p:sp>
-        <p:nvSpPr>
-          <p:cNvPr id="20" name="TextBox 19"/>
-          <p:cNvSpPr txBox="1"/>
-          <p:nvPr/>
-        </p:nvSpPr>
-        <p:spPr>
-          <a:xfrm>
-            <a:off x="914400" y="3081528"/>
-            <a:ext cx="2560320" cy="292608"/>
-          </a:xfrm>
-          <a:prstGeom prst="rect">
-            <a:avLst/>
-          </a:prstGeom>
-          <a:noFill/>
-        </p:spPr>
-        <p:txBody>
-          <a:bodyPr wrap="none" anchor="t">
-            <a:spAutoFit/>
-          </a:bodyPr>
-          <a:lstStyle/>
-          <a:p>
-            <a:pPr algn="l"/>
-            <a:r>
-              <a:rPr sz="1450" b="1">
-                <a:solidFill>
-                  <a:srgbClr val="143057"/>
-                </a:solidFill>
-                <a:latin typeface="Aptos"/>
-              </a:rPr>
-              <a:t>VS Code</a:t>
-            </a:r>
-          </a:p>
-        </p:txBody>
-      </p:sp>
-      <p:sp>
-        <p:nvSpPr>
-          <p:cNvPr id="21" name="TextBox 20"/>
-          <p:cNvSpPr txBox="1"/>
-          <p:nvPr/>
-        </p:nvSpPr>
-        <p:spPr>
-          <a:xfrm>
-            <a:off x="914400" y="3474720"/>
-            <a:ext cx="2560320" cy="365760"/>
-          </a:xfrm>
-          <a:prstGeom prst="rect">
-            <a:avLst/>
-          </a:prstGeom>
-          <a:noFill/>
-        </p:spPr>
-        <p:txBody>
-          <a:bodyPr wrap="none" anchor="t">
-            <a:spAutoFit/>
-          </a:bodyPr>
-          <a:lstStyle/>
-          <a:p>
-            <a:pPr algn="l"/>
-            <a:r>
-              <a:rPr sz="1120" b="0">
-                <a:solidFill>
-                  <a:srgbClr val="2D2D2D"/>
-                </a:solidFill>
-                <a:latin typeface="Aptos"/>
-              </a:rPr>
-              <a:t>Primary code editor used for development.</a:t>
-            </a:r>
-          </a:p>
-        </p:txBody>
-      </p:sp>
-      <p:sp>
-        <p:nvSpPr>
-          <p:cNvPr id="22" name="Rounded Rectangle 21"/>
-          <p:cNvSpPr/>
-          <p:nvPr/>
-        </p:nvSpPr>
-        <p:spPr>
-          <a:xfrm>
-            <a:off x="4160520" y="2880360"/>
-            <a:ext cx="2971800" cy="1143000"/>
-          </a:xfrm>
-          <a:prstGeom prst="roundRect">
-            <a:avLst>
-              <a:gd name="adj" fmla="val 8000"/>
-            </a:avLst>
-          </a:prstGeom>
-          <a:solidFill>
-            <a:srgbClr val="FFFFFF"/>
-          </a:solidFill>
-          <a:ln>
-            <a:solidFill>
-              <a:srgbClr val="D7DDE4"/>
-            </a:solidFill>
-          </a:ln>
-        </p:spPr>
-        <p:style>
-          <a:lnRef idx="1">
-            <a:schemeClr val="accent1"/>
-          </a:lnRef>
-          <a:fillRef idx="3">
-            <a:schemeClr val="accent1"/>
-          </a:fillRef>
-          <a:effectRef idx="2">
-            <a:schemeClr val="accent1"/>
-          </a:effectRef>
-          <a:fontRef idx="minor">
-            <a:schemeClr val="lt1"/>
-          </a:fontRef>
-        </p:style>
-        <p:txBody>
-          <a:bodyPr rtlCol="0" anchor="ctr"/>
-          <a:lstStyle/>
-          <a:p>
-            <a:pPr algn="ctr"/>
-            <a:endParaRPr/>
-          </a:p>
-        </p:txBody>
-      </p:sp>
-      <p:sp>
-        <p:nvSpPr>
-          <p:cNvPr id="23" name="Rectangle 22"/>
-          <p:cNvSpPr/>
-          <p:nvPr/>
-        </p:nvSpPr>
-        <p:spPr>
-          <a:xfrm>
-            <a:off x="4160520" y="2880360"/>
-            <a:ext cx="54864" cy="1143000"/>
-          </a:xfrm>
-          <a:prstGeom prst="rect">
-            <a:avLst/>
-          </a:prstGeom>
-          <a:solidFill>
-            <a:srgbClr val="A6232D"/>
-          </a:solidFill>
-          <a:ln>
-            <a:solidFill>
-              <a:srgbClr val="A6232D"/>
-            </a:solidFill>
-          </a:ln>
-        </p:spPr>
-        <p:style>
-          <a:lnRef idx="1">
-            <a:schemeClr val="accent1"/>
-          </a:lnRef>
-          <a:fillRef idx="3">
-            <a:schemeClr val="accent1"/>
-          </a:fillRef>
-          <a:effectRef idx="2">
-            <a:schemeClr val="accent1"/>
-          </a:effectRef>
-          <a:fontRef idx="minor">
-            <a:schemeClr val="lt1"/>
-          </a:fontRef>
-        </p:style>
-        <p:txBody>
-          <a:bodyPr rtlCol="0" anchor="ctr"/>
-          <a:lstStyle/>
-          <a:p>
-            <a:pPr algn="ctr"/>
-            <a:endParaRPr/>
-          </a:p>
-        </p:txBody>
-      </p:sp>
-      <p:sp>
-        <p:nvSpPr>
-          <p:cNvPr id="24" name="TextBox 23"/>
-          <p:cNvSpPr txBox="1"/>
-          <p:nvPr/>
-        </p:nvSpPr>
-        <p:spPr>
-          <a:xfrm>
-            <a:off x="4389120" y="3081528"/>
-            <a:ext cx="2560320" cy="292608"/>
-          </a:xfrm>
-          <a:prstGeom prst="rect">
-            <a:avLst/>
-          </a:prstGeom>
-          <a:noFill/>
-        </p:spPr>
-        <p:txBody>
-          <a:bodyPr wrap="none" anchor="t">
-            <a:spAutoFit/>
-          </a:bodyPr>
-          <a:lstStyle/>
-          <a:p>
-            <a:pPr algn="l"/>
-            <a:r>
-              <a:rPr sz="1450" b="1">
-                <a:solidFill>
-                  <a:srgbClr val="143057"/>
-                </a:solidFill>
-                <a:latin typeface="Aptos"/>
-              </a:rPr>
-              <a:t>GitHub</a:t>
-            </a:r>
-          </a:p>
-        </p:txBody>
-      </p:sp>
-      <p:sp>
-        <p:nvSpPr>
-          <p:cNvPr id="25" name="TextBox 24"/>
-          <p:cNvSpPr txBox="1"/>
-          <p:nvPr/>
-        </p:nvSpPr>
-        <p:spPr>
-          <a:xfrm>
-            <a:off x="4389120" y="3474720"/>
-            <a:ext cx="2736647" cy="437043"/>
-          </a:xfrm>
-          <a:prstGeom prst="rect">
-            <a:avLst/>
-          </a:prstGeom>
-          <a:noFill/>
-        </p:spPr>
-        <p:txBody>
-          <a:bodyPr wrap="none" anchor="t">
-            <a:spAutoFit/>
-          </a:bodyPr>
-          <a:lstStyle/>
-          <a:p>
-            <a:pPr algn="l"/>
-            <a:r>
-              <a:rPr sz="1120" b="0" dirty="0">
-                <a:solidFill>
-                  <a:srgbClr val="2D2D2D"/>
-                </a:solidFill>
-                <a:latin typeface="Aptos"/>
-              </a:rPr>
-              <a:t>Repository storage and versioned project </a:t>
-            </a:r>
-            <a:endParaRPr lang="en-US" sz="1120" b="0" dirty="0">
-              <a:solidFill>
-                <a:srgbClr val="2D2D2D"/>
-              </a:solidFill>
-              <a:latin typeface="Aptos"/>
-            </a:endParaRPr>
-          </a:p>
-          <a:p>
-            <a:pPr algn="l"/>
-            <a:r>
-              <a:rPr sz="1120" b="0" dirty="0">
-                <a:solidFill>
-                  <a:srgbClr val="2D2D2D"/>
-                </a:solidFill>
-                <a:latin typeface="Aptos"/>
-              </a:rPr>
-              <a:t>management.</a:t>
-            </a:r>
-          </a:p>
-        </p:txBody>
-      </p:sp>
-      <p:sp>
-        <p:nvSpPr>
-          <p:cNvPr id="26" name="Rounded Rectangle 25"/>
-          <p:cNvSpPr/>
-          <p:nvPr/>
-        </p:nvSpPr>
-        <p:spPr>
-          <a:xfrm>
-            <a:off x="7635240" y="2880360"/>
-            <a:ext cx="2971800" cy="1143000"/>
-          </a:xfrm>
-          <a:prstGeom prst="roundRect">
-            <a:avLst>
-              <a:gd name="adj" fmla="val 8000"/>
-            </a:avLst>
-          </a:prstGeom>
-          <a:solidFill>
-            <a:srgbClr val="FFFFFF"/>
-          </a:solidFill>
-          <a:ln>
-            <a:solidFill>
-              <a:srgbClr val="D7DDE4"/>
-            </a:solidFill>
-          </a:ln>
-        </p:spPr>
-        <p:style>
-          <a:lnRef idx="1">
-            <a:schemeClr val="accent1"/>
-          </a:lnRef>
-          <a:fillRef idx="3">
-            <a:schemeClr val="accent1"/>
-          </a:fillRef>
-          <a:effectRef idx="2">
-            <a:schemeClr val="accent1"/>
-          </a:effectRef>
-          <a:fontRef idx="minor">
-            <a:schemeClr val="lt1"/>
-          </a:fontRef>
-        </p:style>
-        <p:txBody>
-          <a:bodyPr rtlCol="0" anchor="ctr"/>
-          <a:lstStyle/>
-          <a:p>
-            <a:pPr algn="ctr"/>
-            <a:endParaRPr/>
-          </a:p>
-        </p:txBody>
-      </p:sp>
-      <p:sp>
-        <p:nvSpPr>
-          <p:cNvPr id="27" name="Rectangle 26"/>
-          <p:cNvSpPr/>
-          <p:nvPr/>
-        </p:nvSpPr>
-        <p:spPr>
-          <a:xfrm>
-            <a:off x="7635240" y="2880360"/>
-            <a:ext cx="54864" cy="1143000"/>
-          </a:xfrm>
-          <a:prstGeom prst="rect">
-            <a:avLst/>
-          </a:prstGeom>
-          <a:solidFill>
-            <a:srgbClr val="A6232D"/>
-          </a:solidFill>
-          <a:ln>
-            <a:solidFill>
-              <a:srgbClr val="A6232D"/>
-            </a:solidFill>
-          </a:ln>
-        </p:spPr>
-        <p:style>
-          <a:lnRef idx="1">
-            <a:schemeClr val="accent1"/>
-          </a:lnRef>
-          <a:fillRef idx="3">
-            <a:schemeClr val="accent1"/>
-          </a:fillRef>
-          <a:effectRef idx="2">
-            <a:schemeClr val="accent1"/>
-          </a:effectRef>
-          <a:fontRef idx="minor">
-            <a:schemeClr val="lt1"/>
-          </a:fontRef>
-        </p:style>
-        <p:txBody>
-          <a:bodyPr rtlCol="0" anchor="ctr"/>
-          <a:lstStyle/>
-          <a:p>
-            <a:pPr algn="ctr"/>
-            <a:endParaRPr/>
-          </a:p>
-        </p:txBody>
-      </p:sp>
-      <p:sp>
-        <p:nvSpPr>
-          <p:cNvPr id="28" name="TextBox 27"/>
-          <p:cNvSpPr txBox="1"/>
-          <p:nvPr/>
-        </p:nvSpPr>
-        <p:spPr>
-          <a:xfrm>
-            <a:off x="7863840" y="3081528"/>
-            <a:ext cx="2560320" cy="292608"/>
-          </a:xfrm>
-          <a:prstGeom prst="rect">
-            <a:avLst/>
-          </a:prstGeom>
-          <a:noFill/>
-        </p:spPr>
-        <p:txBody>
-          <a:bodyPr wrap="none" anchor="t">
-            <a:spAutoFit/>
-          </a:bodyPr>
-          <a:lstStyle/>
-          <a:p>
-            <a:pPr algn="l"/>
-            <a:r>
-              <a:rPr sz="1450" b="1">
-                <a:solidFill>
-                  <a:srgbClr val="143057"/>
-                </a:solidFill>
-                <a:latin typeface="Aptos"/>
-              </a:rPr>
-              <a:t>Weather API</a:t>
-            </a:r>
-          </a:p>
-        </p:txBody>
-      </p:sp>
-      <p:sp>
-        <p:nvSpPr>
-          <p:cNvPr id="29" name="TextBox 28"/>
-          <p:cNvSpPr txBox="1"/>
-          <p:nvPr/>
-        </p:nvSpPr>
-        <p:spPr>
-          <a:xfrm>
-            <a:off x="7863840" y="3474720"/>
-            <a:ext cx="2419252" cy="437043"/>
-          </a:xfrm>
-          <a:prstGeom prst="rect">
-            <a:avLst/>
-          </a:prstGeom>
-          <a:noFill/>
-        </p:spPr>
-        <p:txBody>
-          <a:bodyPr wrap="none" anchor="t">
-            <a:spAutoFit/>
-          </a:bodyPr>
-          <a:lstStyle/>
-          <a:p>
-            <a:pPr algn="l"/>
-            <a:r>
-              <a:rPr sz="1120" b="0" dirty="0">
-                <a:solidFill>
-                  <a:srgbClr val="2D2D2D"/>
-                </a:solidFill>
-                <a:latin typeface="Aptos"/>
-              </a:rPr>
-              <a:t>Fetches weather information for the </a:t>
-            </a:r>
-            <a:endParaRPr lang="en-US" sz="1120" b="0" dirty="0">
-              <a:solidFill>
-                <a:srgbClr val="2D2D2D"/>
-              </a:solidFill>
-              <a:latin typeface="Aptos"/>
-            </a:endParaRPr>
-          </a:p>
-          <a:p>
-            <a:pPr algn="l"/>
-            <a:r>
-              <a:rPr sz="1120" b="0" dirty="0">
-                <a:solidFill>
-                  <a:srgbClr val="2D2D2D"/>
-                </a:solidFill>
-                <a:latin typeface="Aptos"/>
-              </a:rPr>
-              <a:t>weather application.</a:t>
-            </a:r>
-          </a:p>
-        </p:txBody>
-      </p:sp>
-      <p:sp>
-        <p:nvSpPr>
-          <p:cNvPr id="39" name="TextBox 38"/>
-          <p:cNvSpPr txBox="1"/>
-          <p:nvPr/>
-        </p:nvSpPr>
-        <p:spPr>
-          <a:xfrm>
-            <a:off x="11064240" y="6620256"/>
-            <a:ext cx="411480" cy="164592"/>
-          </a:xfrm>
-          <a:prstGeom prst="rect">
-            <a:avLst/>
-          </a:prstGeom>
-          <a:noFill/>
-        </p:spPr>
-        <p:txBody>
-          <a:bodyPr wrap="none" anchor="t">
-            <a:spAutoFit/>
-          </a:bodyPr>
-          <a:lstStyle/>
-          <a:p>
-            <a:pPr algn="r"/>
-            <a:r>
-              <a:rPr sz="850" b="1">
-                <a:solidFill>
-                  <a:srgbClr val="FFFFFF"/>
-                </a:solidFill>
-                <a:latin typeface="Aptos"/>
-              </a:rPr>
-              <a:t>5</a:t>
+              <a:t>10</a:t>
             </a:r>
           </a:p>
         </p:txBody>
@@ -5543,7 +4716,7 @@
                 </a:solidFill>
                 <a:latin typeface="Aptos Display"/>
               </a:rPr>
-              <a:t>PROJECTS COMPLETED</a:t>
+              <a:t>WEATHER APPLICATION</a:t>
             </a:r>
           </a:p>
         </p:txBody>
@@ -5642,14 +4815,60 @@
       </p:sp>
       <p:sp>
         <p:nvSpPr>
-          <p:cNvPr id="6" name="TextBox 5"/>
+          <p:cNvPr id="6" name="Rectangle 5"/>
+          <p:cNvSpPr/>
+          <p:nvPr/>
+        </p:nvSpPr>
+        <p:spPr>
+          <a:xfrm>
+            <a:off x="822960" y="1417320"/>
+            <a:ext cx="1965960" cy="411480"/>
+          </a:xfrm>
+          <a:prstGeom prst="rect">
+            <a:avLst/>
+          </a:prstGeom>
+          <a:solidFill>
+            <a:srgbClr val="A6232D"/>
+          </a:solidFill>
+          <a:ln>
+            <a:solidFill>
+              <a:srgbClr val="A6232D"/>
+            </a:solidFill>
+          </a:ln>
+        </p:spPr>
+        <p:style>
+          <a:lnRef idx="1">
+            <a:schemeClr val="accent1"/>
+          </a:lnRef>
+          <a:fillRef idx="3">
+            <a:schemeClr val="accent1"/>
+          </a:fillRef>
+          <a:effectRef idx="2">
+            <a:schemeClr val="accent1"/>
+          </a:effectRef>
+          <a:fontRef idx="minor">
+            <a:schemeClr val="lt1"/>
+          </a:fontRef>
+        </p:style>
+        <p:txBody>
+          <a:bodyPr rtlCol="0" anchor="ctr"/>
+          <a:lstStyle/>
+          <a:p>
+            <a:pPr algn="ctr"/>
+            <a:endParaRPr/>
+          </a:p>
+        </p:txBody>
+      </p:sp>
+      <p:sp>
+        <p:nvSpPr>
+          <p:cNvPr id="7" name="TextBox 6"/>
           <p:cNvSpPr txBox="1"/>
           <p:nvPr/>
         </p:nvSpPr>
         <p:spPr>
           <a:xfrm>
-            <a:off x="914400" y="1417320"/>
-            <a:ext cx="502920" cy="384048"/>
+            <a:off x="822960" y="1490472"/>
+            <a:ext cx="1965960" cy="201168"/>
           </a:xfrm>
           <a:prstGeom prst="rect">
             <a:avLst/>
@@ -5664,27 +4883,27 @@
           <a:p>
             <a:pPr algn="ctr"/>
             <a:r>
-              <a:rPr sz="1300" b="1">
-                <a:solidFill>
-                  <a:srgbClr val="A6232D"/>
+              <a:rPr sz="1000" b="1">
+                <a:solidFill>
+                  <a:srgbClr val="FFFFFF"/>
                 </a:solidFill>
                 <a:latin typeface="Aptos"/>
               </a:rPr>
-              <a:t>01</a:t>
-            </a:r>
-          </a:p>
-        </p:txBody>
-      </p:sp>
-      <p:sp>
-        <p:nvSpPr>
-          <p:cNvPr id="7" name="Rounded Rectangle 6"/>
+              <a:t>PROJECT 05</a:t>
+            </a:r>
+          </a:p>
+        </p:txBody>
+      </p:sp>
+      <p:sp>
+        <p:nvSpPr>
+          <p:cNvPr id="8" name="Rounded Rectangle 7"/>
           <p:cNvSpPr/>
           <p:nvPr/>
         </p:nvSpPr>
         <p:spPr>
           <a:xfrm>
-            <a:off x="1554480" y="1435608"/>
-            <a:ext cx="9144000" cy="685800"/>
+            <a:off x="822960" y="2057400"/>
+            <a:ext cx="10561320" cy="3246120"/>
           </a:xfrm>
           <a:prstGeom prst="roundRect">
             <a:avLst>
@@ -5692,7 +4911,7 @@
             </a:avLst>
           </a:prstGeom>
           <a:solidFill>
-            <a:srgbClr val="FFFFFF"/>
+            <a:srgbClr val="F2F5F8"/>
           </a:solidFill>
           <a:ln>
             <a:solidFill>
@@ -5725,14 +4944,101 @@
       </p:sp>
       <p:sp>
         <p:nvSpPr>
-          <p:cNvPr id="8" name="TextBox 7"/>
+          <p:cNvPr id="9" name="TextBox 8"/>
           <p:cNvSpPr txBox="1"/>
           <p:nvPr/>
         </p:nvSpPr>
         <p:spPr>
           <a:xfrm>
-            <a:off x="1874519" y="1591056"/>
-            <a:ext cx="8138160" cy="292608"/>
+            <a:off x="1234440" y="2514600"/>
+            <a:ext cx="9784080" cy="2468880"/>
+          </a:xfrm>
+          <a:prstGeom prst="rect">
+            <a:avLst/>
+          </a:prstGeom>
+          <a:noFill/>
+        </p:spPr>
+        <p:txBody>
+          <a:bodyPr wrap="square">
+            <a:spAutoFit/>
+          </a:bodyPr>
+          <a:lstStyle/>
+          <a:p>
+            <a:pPr>
+              <a:spcAft>
+                <a:spcPts val="1500"/>
+              </a:spcAft>
+              <a:defRPr sz="1700">
+                <a:solidFill>
+                  <a:srgbClr val="2D2D2D"/>
+                </a:solidFill>
+                <a:latin typeface="Aptos"/>
+              </a:defRPr>
+            </a:pPr>
+            <a:r>
+              <a:t>• Developed a weather application using a Weather API.</a:t>
+            </a:r>
+          </a:p>
+          <a:p>
+            <a:pPr>
+              <a:spcAft>
+                <a:spcPts val="1500"/>
+              </a:spcAft>
+              <a:defRPr sz="1700">
+                <a:solidFill>
+                  <a:srgbClr val="2D2D2D"/>
+                </a:solidFill>
+                <a:latin typeface="Aptos"/>
+              </a:defRPr>
+            </a:pPr>
+            <a:r>
+              <a:t>• Allows users to search for weather by city.</a:t>
+            </a:r>
+          </a:p>
+          <a:p>
+            <a:pPr>
+              <a:spcAft>
+                <a:spcPts val="1500"/>
+              </a:spcAft>
+              <a:defRPr sz="1700">
+                <a:solidFill>
+                  <a:srgbClr val="2D2D2D"/>
+                </a:solidFill>
+                <a:latin typeface="Aptos"/>
+              </a:defRPr>
+            </a:pPr>
+            <a:r>
+              <a:t>• Displays current weather information such as temperature and conditions.</a:t>
+            </a:r>
+          </a:p>
+          <a:p>
+            <a:pPr>
+              <a:spcAft>
+                <a:spcPts val="1500"/>
+              </a:spcAft>
+              <a:defRPr sz="1700">
+                <a:solidFill>
+                  <a:srgbClr val="2D2D2D"/>
+                </a:solidFill>
+                <a:latin typeface="Aptos"/>
+              </a:defRPr>
+            </a:pPr>
+            <a:r>
+              <a:t>• Practised basic API integration and dynamic data display.</a:t>
+            </a:r>
+          </a:p>
+        </p:txBody>
+      </p:sp>
+      <p:sp>
+        <p:nvSpPr>
+          <p:cNvPr id="11" name="TextBox 10"/>
+          <p:cNvSpPr txBox="1"/>
+          <p:nvPr/>
+        </p:nvSpPr>
+        <p:spPr>
+          <a:xfrm>
+            <a:off x="11064240" y="6620256"/>
+            <a:ext cx="411480" cy="164592"/>
           </a:xfrm>
           <a:prstGeom prst="rect">
             <a:avLst/>
@@ -5745,522 +5051,15 @@
           </a:bodyPr>
           <a:lstStyle/>
           <a:p>
-            <a:pPr algn="l"/>
-            <a:r>
-              <a:rPr sz="1700" b="1">
-                <a:solidFill>
-                  <a:srgbClr val="143057"/>
+            <a:pPr algn="r"/>
+            <a:r>
+              <a:rPr sz="850" b="1">
+                <a:solidFill>
+                  <a:srgbClr val="FFFFFF"/>
                 </a:solidFill>
                 <a:latin typeface="Aptos"/>
               </a:rPr>
-              <a:t>Responsive Landing Page</a:t>
-            </a:r>
-          </a:p>
-        </p:txBody>
-      </p:sp>
-      <p:sp>
-        <p:nvSpPr>
-          <p:cNvPr id="9" name="TextBox 8"/>
-          <p:cNvSpPr txBox="1"/>
-          <p:nvPr/>
-        </p:nvSpPr>
-        <p:spPr>
-          <a:xfrm>
-            <a:off x="914400" y="2331720"/>
-            <a:ext cx="502920" cy="384048"/>
-          </a:xfrm>
-          <a:prstGeom prst="rect">
-            <a:avLst/>
-          </a:prstGeom>
-          <a:noFill/>
-        </p:spPr>
-        <p:txBody>
-          <a:bodyPr wrap="none" anchor="t">
-            <a:spAutoFit/>
-          </a:bodyPr>
-          <a:lstStyle/>
-          <a:p>
-            <a:pPr algn="ctr"/>
-            <a:r>
-              <a:rPr sz="1300" b="1">
-                <a:solidFill>
-                  <a:srgbClr val="A6232D"/>
-                </a:solidFill>
-                <a:latin typeface="Aptos"/>
-              </a:rPr>
-              <a:t>02</a:t>
-            </a:r>
-          </a:p>
-        </p:txBody>
-      </p:sp>
-      <p:sp>
-        <p:nvSpPr>
-          <p:cNvPr id="10" name="Rounded Rectangle 9"/>
-          <p:cNvSpPr/>
-          <p:nvPr/>
-        </p:nvSpPr>
-        <p:spPr>
-          <a:xfrm>
-            <a:off x="1554480" y="2350008"/>
-            <a:ext cx="9144000" cy="685800"/>
-          </a:xfrm>
-          <a:prstGeom prst="roundRect">
-            <a:avLst>
-              <a:gd name="adj" fmla="val 8000"/>
-            </a:avLst>
-          </a:prstGeom>
-          <a:solidFill>
-            <a:srgbClr val="FFFFFF"/>
-          </a:solidFill>
-          <a:ln>
-            <a:solidFill>
-              <a:srgbClr val="D7DDE4"/>
-            </a:solidFill>
-          </a:ln>
-        </p:spPr>
-        <p:style>
-          <a:lnRef idx="1">
-            <a:schemeClr val="accent1"/>
-          </a:lnRef>
-          <a:fillRef idx="3">
-            <a:schemeClr val="accent1"/>
-          </a:fillRef>
-          <a:effectRef idx="2">
-            <a:schemeClr val="accent1"/>
-          </a:effectRef>
-          <a:fontRef idx="minor">
-            <a:schemeClr val="lt1"/>
-          </a:fontRef>
-        </p:style>
-        <p:txBody>
-          <a:bodyPr rtlCol="0" anchor="ctr"/>
-          <a:lstStyle/>
-          <a:p>
-            <a:pPr algn="ctr"/>
-            <a:endParaRPr/>
-          </a:p>
-        </p:txBody>
-      </p:sp>
-      <p:sp>
-        <p:nvSpPr>
-          <p:cNvPr id="11" name="TextBox 10"/>
-          <p:cNvSpPr txBox="1"/>
-          <p:nvPr/>
-        </p:nvSpPr>
-        <p:spPr>
-          <a:xfrm>
-            <a:off x="1874519" y="2505456"/>
-            <a:ext cx="8138160" cy="292608"/>
-          </a:xfrm>
-          <a:prstGeom prst="rect">
-            <a:avLst/>
-          </a:prstGeom>
-          <a:noFill/>
-        </p:spPr>
-        <p:txBody>
-          <a:bodyPr wrap="none" anchor="t">
-            <a:spAutoFit/>
-          </a:bodyPr>
-          <a:lstStyle/>
-          <a:p>
-            <a:pPr algn="l"/>
-            <a:r>
-              <a:rPr sz="1700" b="1">
-                <a:solidFill>
-                  <a:srgbClr val="143057"/>
-                </a:solidFill>
-                <a:latin typeface="Aptos"/>
-              </a:rPr>
-              <a:t>Stopwatch Web Application</a:t>
-            </a:r>
-          </a:p>
-        </p:txBody>
-      </p:sp>
-      <p:sp>
-        <p:nvSpPr>
-          <p:cNvPr id="12" name="TextBox 11"/>
-          <p:cNvSpPr txBox="1"/>
-          <p:nvPr/>
-        </p:nvSpPr>
-        <p:spPr>
-          <a:xfrm>
-            <a:off x="914400" y="3246120"/>
-            <a:ext cx="502920" cy="384048"/>
-          </a:xfrm>
-          <a:prstGeom prst="rect">
-            <a:avLst/>
-          </a:prstGeom>
-          <a:noFill/>
-        </p:spPr>
-        <p:txBody>
-          <a:bodyPr wrap="none" anchor="t">
-            <a:spAutoFit/>
-          </a:bodyPr>
-          <a:lstStyle/>
-          <a:p>
-            <a:pPr algn="ctr"/>
-            <a:r>
-              <a:rPr sz="1300" b="1">
-                <a:solidFill>
-                  <a:srgbClr val="A6232D"/>
-                </a:solidFill>
-                <a:latin typeface="Aptos"/>
-              </a:rPr>
-              <a:t>03</a:t>
-            </a:r>
-          </a:p>
-        </p:txBody>
-      </p:sp>
-      <p:sp>
-        <p:nvSpPr>
-          <p:cNvPr id="13" name="Rounded Rectangle 12"/>
-          <p:cNvSpPr/>
-          <p:nvPr/>
-        </p:nvSpPr>
-        <p:spPr>
-          <a:xfrm>
-            <a:off x="1554480" y="3264408"/>
-            <a:ext cx="9144000" cy="685800"/>
-          </a:xfrm>
-          <a:prstGeom prst="roundRect">
-            <a:avLst>
-              <a:gd name="adj" fmla="val 8000"/>
-            </a:avLst>
-          </a:prstGeom>
-          <a:solidFill>
-            <a:srgbClr val="FFFFFF"/>
-          </a:solidFill>
-          <a:ln>
-            <a:solidFill>
-              <a:srgbClr val="D7DDE4"/>
-            </a:solidFill>
-          </a:ln>
-        </p:spPr>
-        <p:style>
-          <a:lnRef idx="1">
-            <a:schemeClr val="accent1"/>
-          </a:lnRef>
-          <a:fillRef idx="3">
-            <a:schemeClr val="accent1"/>
-          </a:fillRef>
-          <a:effectRef idx="2">
-            <a:schemeClr val="accent1"/>
-          </a:effectRef>
-          <a:fontRef idx="minor">
-            <a:schemeClr val="lt1"/>
-          </a:fontRef>
-        </p:style>
-        <p:txBody>
-          <a:bodyPr rtlCol="0" anchor="ctr"/>
-          <a:lstStyle/>
-          <a:p>
-            <a:pPr algn="ctr"/>
-            <a:endParaRPr/>
-          </a:p>
-        </p:txBody>
-      </p:sp>
-      <p:sp>
-        <p:nvSpPr>
-          <p:cNvPr id="14" name="TextBox 13"/>
-          <p:cNvSpPr txBox="1"/>
-          <p:nvPr/>
-        </p:nvSpPr>
-        <p:spPr>
-          <a:xfrm>
-            <a:off x="1874519" y="3419856"/>
-            <a:ext cx="8138160" cy="292608"/>
-          </a:xfrm>
-          <a:prstGeom prst="rect">
-            <a:avLst/>
-          </a:prstGeom>
-          <a:noFill/>
-        </p:spPr>
-        <p:txBody>
-          <a:bodyPr wrap="none" anchor="t">
-            <a:spAutoFit/>
-          </a:bodyPr>
-          <a:lstStyle/>
-          <a:p>
-            <a:pPr algn="l"/>
-            <a:r>
-              <a:rPr sz="1700" b="1">
-                <a:solidFill>
-                  <a:srgbClr val="143057"/>
-                </a:solidFill>
-                <a:latin typeface="Aptos"/>
-              </a:rPr>
-              <a:t>Tic-Tac-Toe Web Application</a:t>
-            </a:r>
-          </a:p>
-        </p:txBody>
-      </p:sp>
-      <p:sp>
-        <p:nvSpPr>
-          <p:cNvPr id="15" name="TextBox 14"/>
-          <p:cNvSpPr txBox="1"/>
-          <p:nvPr/>
-        </p:nvSpPr>
-        <p:spPr>
-          <a:xfrm>
-            <a:off x="914400" y="4160520"/>
-            <a:ext cx="502920" cy="384048"/>
-          </a:xfrm>
-          <a:prstGeom prst="rect">
-            <a:avLst/>
-          </a:prstGeom>
-          <a:noFill/>
-        </p:spPr>
-        <p:txBody>
-          <a:bodyPr wrap="none" anchor="t">
-            <a:spAutoFit/>
-          </a:bodyPr>
-          <a:lstStyle/>
-          <a:p>
-            <a:pPr algn="ctr"/>
-            <a:r>
-              <a:rPr sz="1300" b="1">
-                <a:solidFill>
-                  <a:srgbClr val="A6232D"/>
-                </a:solidFill>
-                <a:latin typeface="Aptos"/>
-              </a:rPr>
-              <a:t>04</a:t>
-            </a:r>
-          </a:p>
-        </p:txBody>
-      </p:sp>
-      <p:sp>
-        <p:nvSpPr>
-          <p:cNvPr id="16" name="Rounded Rectangle 15"/>
-          <p:cNvSpPr/>
-          <p:nvPr/>
-        </p:nvSpPr>
-        <p:spPr>
-          <a:xfrm>
-            <a:off x="1554480" y="4178807"/>
-            <a:ext cx="9144000" cy="685800"/>
-          </a:xfrm>
-          <a:prstGeom prst="roundRect">
-            <a:avLst>
-              <a:gd name="adj" fmla="val 8000"/>
-            </a:avLst>
-          </a:prstGeom>
-          <a:solidFill>
-            <a:srgbClr val="FFFFFF"/>
-          </a:solidFill>
-          <a:ln>
-            <a:solidFill>
-              <a:srgbClr val="D7DDE4"/>
-            </a:solidFill>
-          </a:ln>
-        </p:spPr>
-        <p:style>
-          <a:lnRef idx="1">
-            <a:schemeClr val="accent1"/>
-          </a:lnRef>
-          <a:fillRef idx="3">
-            <a:schemeClr val="accent1"/>
-          </a:fillRef>
-          <a:effectRef idx="2">
-            <a:schemeClr val="accent1"/>
-          </a:effectRef>
-          <a:fontRef idx="minor">
-            <a:schemeClr val="lt1"/>
-          </a:fontRef>
-        </p:style>
-        <p:txBody>
-          <a:bodyPr rtlCol="0" anchor="ctr"/>
-          <a:lstStyle/>
-          <a:p>
-            <a:pPr algn="ctr"/>
-            <a:endParaRPr/>
-          </a:p>
-        </p:txBody>
-      </p:sp>
-      <p:sp>
-        <p:nvSpPr>
-          <p:cNvPr id="17" name="TextBox 16"/>
-          <p:cNvSpPr txBox="1"/>
-          <p:nvPr/>
-        </p:nvSpPr>
-        <p:spPr>
-          <a:xfrm>
-            <a:off x="1874519" y="4334256"/>
-            <a:ext cx="8138160" cy="292608"/>
-          </a:xfrm>
-          <a:prstGeom prst="rect">
-            <a:avLst/>
-          </a:prstGeom>
-          <a:noFill/>
-        </p:spPr>
-        <p:txBody>
-          <a:bodyPr wrap="none" anchor="t">
-            <a:spAutoFit/>
-          </a:bodyPr>
-          <a:lstStyle/>
-          <a:p>
-            <a:pPr algn="l"/>
-            <a:r>
-              <a:rPr sz="1700" b="1">
-                <a:solidFill>
-                  <a:srgbClr val="143057"/>
-                </a:solidFill>
-                <a:latin typeface="Aptos"/>
-              </a:rPr>
-              <a:t>Personal Portfolio Website</a:t>
-            </a:r>
-          </a:p>
-        </p:txBody>
-      </p:sp>
-      <p:sp>
-        <p:nvSpPr>
-          <p:cNvPr id="18" name="TextBox 17"/>
-          <p:cNvSpPr txBox="1"/>
-          <p:nvPr/>
-        </p:nvSpPr>
-        <p:spPr>
-          <a:xfrm>
-            <a:off x="914400" y="5074920"/>
-            <a:ext cx="502920" cy="384048"/>
-          </a:xfrm>
-          <a:prstGeom prst="rect">
-            <a:avLst/>
-          </a:prstGeom>
-          <a:noFill/>
-        </p:spPr>
-        <p:txBody>
-          <a:bodyPr wrap="none" anchor="t">
-            <a:spAutoFit/>
-          </a:bodyPr>
-          <a:lstStyle/>
-          <a:p>
-            <a:pPr algn="ctr"/>
-            <a:r>
-              <a:rPr sz="1300" b="1">
-                <a:solidFill>
-                  <a:srgbClr val="A6232D"/>
-                </a:solidFill>
-                <a:latin typeface="Aptos"/>
-              </a:rPr>
-              <a:t>05</a:t>
-            </a:r>
-          </a:p>
-        </p:txBody>
-      </p:sp>
-      <p:sp>
-        <p:nvSpPr>
-          <p:cNvPr id="19" name="Rounded Rectangle 18"/>
-          <p:cNvSpPr/>
-          <p:nvPr/>
-        </p:nvSpPr>
-        <p:spPr>
-          <a:xfrm>
-            <a:off x="1554480" y="5093207"/>
-            <a:ext cx="9144000" cy="685800"/>
-          </a:xfrm>
-          <a:prstGeom prst="roundRect">
-            <a:avLst>
-              <a:gd name="adj" fmla="val 8000"/>
-            </a:avLst>
-          </a:prstGeom>
-          <a:solidFill>
-            <a:srgbClr val="FFFFFF"/>
-          </a:solidFill>
-          <a:ln>
-            <a:solidFill>
-              <a:srgbClr val="D7DDE4"/>
-            </a:solidFill>
-          </a:ln>
-        </p:spPr>
-        <p:style>
-          <a:lnRef idx="1">
-            <a:schemeClr val="accent1"/>
-          </a:lnRef>
-          <a:fillRef idx="3">
-            <a:schemeClr val="accent1"/>
-          </a:fillRef>
-          <a:effectRef idx="2">
-            <a:schemeClr val="accent1"/>
-          </a:effectRef>
-          <a:fontRef idx="minor">
-            <a:schemeClr val="lt1"/>
-          </a:fontRef>
-        </p:style>
-        <p:txBody>
-          <a:bodyPr rtlCol="0" anchor="ctr"/>
-          <a:lstStyle/>
-          <a:p>
-            <a:pPr algn="ctr"/>
-            <a:endParaRPr/>
-          </a:p>
-        </p:txBody>
-      </p:sp>
-      <p:sp>
-        <p:nvSpPr>
-          <p:cNvPr id="20" name="TextBox 19"/>
-          <p:cNvSpPr txBox="1"/>
-          <p:nvPr/>
-        </p:nvSpPr>
-        <p:spPr>
-          <a:xfrm>
-            <a:off x="1874519" y="5248656"/>
-            <a:ext cx="8138160" cy="292608"/>
-          </a:xfrm>
-          <a:prstGeom prst="rect">
-            <a:avLst/>
-          </a:prstGeom>
-          <a:noFill/>
-        </p:spPr>
-        <p:txBody>
-          <a:bodyPr wrap="none" anchor="t">
-            <a:spAutoFit/>
-          </a:bodyPr>
-          <a:lstStyle/>
-          <a:p>
-            <a:pPr algn="l"/>
-            <a:r>
-              <a:rPr sz="1700" b="1">
-                <a:solidFill>
-                  <a:srgbClr val="143057"/>
-                </a:solidFill>
-                <a:latin typeface="Aptos"/>
-              </a:rPr>
-              <a:t>Weather Application</a:t>
-            </a:r>
-          </a:p>
-        </p:txBody>
-      </p:sp>
-      <p:sp>
-        <p:nvSpPr>
-          <p:cNvPr id="22" name="TextBox 21"/>
-          <p:cNvSpPr txBox="1"/>
-          <p:nvPr/>
-        </p:nvSpPr>
-        <p:spPr>
-          <a:xfrm>
-            <a:off x="11064240" y="6620256"/>
-            <a:ext cx="411480" cy="164592"/>
-          </a:xfrm>
-          <a:prstGeom prst="rect">
-            <a:avLst/>
-          </a:prstGeom>
-          <a:noFill/>
-        </p:spPr>
-        <p:txBody>
-          <a:bodyPr wrap="none" anchor="t">
-            <a:spAutoFit/>
-          </a:bodyPr>
-          <a:lstStyle/>
-          <a:p>
-            <a:pPr algn="r"/>
-            <a:r>
-              <a:rPr sz="850" b="1">
-                <a:solidFill>
-                  <a:srgbClr val="FFFFFF"/>
-                </a:solidFill>
-                <a:latin typeface="Aptos"/>
-              </a:rPr>
-              <a:t>6</a:t>
+              <a:t>11</a:t>
             </a:r>
           </a:p>
         </p:txBody>
@@ -6328,7 +5127,7 @@
                 </a:solidFill>
                 <a:latin typeface="Aptos Display"/>
               </a:rPr>
-              <a:t>RESPONSIVE LANDING PAGE</a:t>
+              <a:t>KEY LEARNINGS</a:t>
             </a:r>
           </a:p>
         </p:txBody>
@@ -6427,95 +5226,14 @@
       </p:sp>
       <p:sp>
         <p:nvSpPr>
-          <p:cNvPr id="6" name="Rectangle 5"/>
+          <p:cNvPr id="6" name="Rounded Rectangle 5"/>
           <p:cNvSpPr/>
           <p:nvPr/>
         </p:nvSpPr>
         <p:spPr>
           <a:xfrm>
-            <a:off x="822960" y="1417320"/>
-            <a:ext cx="1965960" cy="411480"/>
-          </a:xfrm>
-          <a:prstGeom prst="rect">
-            <a:avLst/>
-          </a:prstGeom>
-          <a:solidFill>
-            <a:srgbClr val="A6232D"/>
-          </a:solidFill>
-          <a:ln>
-            <a:solidFill>
-              <a:srgbClr val="A6232D"/>
-            </a:solidFill>
-          </a:ln>
-        </p:spPr>
-        <p:style>
-          <a:lnRef idx="1">
-            <a:schemeClr val="accent1"/>
-          </a:lnRef>
-          <a:fillRef idx="3">
-            <a:schemeClr val="accent1"/>
-          </a:fillRef>
-          <a:effectRef idx="2">
-            <a:schemeClr val="accent1"/>
-          </a:effectRef>
-          <a:fontRef idx="minor">
-            <a:schemeClr val="lt1"/>
-          </a:fontRef>
-        </p:style>
-        <p:txBody>
-          <a:bodyPr rtlCol="0" anchor="ctr"/>
-          <a:lstStyle/>
-          <a:p>
-            <a:pPr algn="ctr"/>
-            <a:endParaRPr/>
-          </a:p>
-        </p:txBody>
-      </p:sp>
-      <p:sp>
-        <p:nvSpPr>
-          <p:cNvPr id="7" name="TextBox 6"/>
-          <p:cNvSpPr txBox="1"/>
-          <p:nvPr/>
-        </p:nvSpPr>
-        <p:spPr>
-          <a:xfrm>
-            <a:off x="822960" y="1490472"/>
-            <a:ext cx="1965960" cy="201168"/>
-          </a:xfrm>
-          <a:prstGeom prst="rect">
-            <a:avLst/>
-          </a:prstGeom>
-          <a:noFill/>
-        </p:spPr>
-        <p:txBody>
-          <a:bodyPr wrap="none" anchor="t">
-            <a:spAutoFit/>
-          </a:bodyPr>
-          <a:lstStyle/>
-          <a:p>
-            <a:pPr algn="ctr"/>
-            <a:r>
-              <a:rPr sz="1000" b="1">
-                <a:solidFill>
-                  <a:srgbClr val="FFFFFF"/>
-                </a:solidFill>
-                <a:latin typeface="Aptos"/>
-              </a:rPr>
-              <a:t>PROJECT 01</a:t>
-            </a:r>
-          </a:p>
-        </p:txBody>
-      </p:sp>
-      <p:sp>
-        <p:nvSpPr>
-          <p:cNvPr id="8" name="Rounded Rectangle 7"/>
-          <p:cNvSpPr/>
-          <p:nvPr/>
-        </p:nvSpPr>
-        <p:spPr>
-          <a:xfrm>
-            <a:off x="822960" y="2057400"/>
-            <a:ext cx="10561320" cy="3246120"/>
+            <a:off x="914400" y="1417320"/>
+            <a:ext cx="10332720" cy="4526280"/>
           </a:xfrm>
           <a:prstGeom prst="roundRect">
             <a:avLst>
@@ -6556,14 +5274,14 @@
       </p:sp>
       <p:sp>
         <p:nvSpPr>
-          <p:cNvPr id="9" name="TextBox 8"/>
+          <p:cNvPr id="7" name="TextBox 6"/>
           <p:cNvSpPr txBox="1"/>
           <p:nvPr/>
         </p:nvSpPr>
         <p:spPr>
           <a:xfrm>
-            <a:off x="1234440" y="2514600"/>
-            <a:ext cx="9784080" cy="2468880"/>
+            <a:off x="1325880" y="1783080"/>
+            <a:ext cx="9509760" cy="3749039"/>
           </a:xfrm>
           <a:prstGeom prst="rect">
             <a:avLst/>
@@ -6578,9 +5296,9 @@
           <a:p>
             <a:pPr>
               <a:spcAft>
-                <a:spcPts val="1500"/>
+                <a:spcPts val="1600"/>
               </a:spcAft>
-              <a:defRPr sz="1700">
+              <a:defRPr sz="1750">
                 <a:solidFill>
                   <a:srgbClr val="2D2D2D"/>
                 </a:solidFill>
@@ -6588,15 +5306,15 @@
               </a:defRPr>
             </a:pPr>
             <a:r>
-              <a:t>• Designed a responsive landing page using HTML, CSS and JavaScript.</a:t>
+              <a:t>• Improved practical skills in HTML, CSS and JavaScript.</a:t>
             </a:r>
           </a:p>
           <a:p>
             <a:pPr>
               <a:spcAft>
-                <a:spcPts val="1500"/>
+                <a:spcPts val="1600"/>
               </a:spcAft>
-              <a:defRPr sz="1700">
+              <a:defRPr sz="1750">
                 <a:solidFill>
                   <a:srgbClr val="2D2D2D"/>
                 </a:solidFill>
@@ -6604,15 +5322,15 @@
               </a:defRPr>
             </a:pPr>
             <a:r>
-              <a:t>• Included navigation and multiple content sections.</a:t>
+              <a:t>• Learned to create responsive and interactive web pages.</a:t>
             </a:r>
           </a:p>
           <a:p>
             <a:pPr>
               <a:spcAft>
-                <a:spcPts val="1500"/>
+                <a:spcPts val="1600"/>
               </a:spcAft>
-              <a:defRPr sz="1700">
+              <a:defRPr sz="1750">
                 <a:solidFill>
                   <a:srgbClr val="2D2D2D"/>
                 </a:solidFill>
@@ -6620,15 +5338,15 @@
               </a:defRPr>
             </a:pPr>
             <a:r>
-              <a:t>• Focused on a clean, user-friendly layout.</a:t>
+              <a:t>• Understood JavaScript logic, events and application behaviour.</a:t>
             </a:r>
           </a:p>
           <a:p>
             <a:pPr>
               <a:spcAft>
-                <a:spcPts val="1500"/>
+                <a:spcPts val="1600"/>
               </a:spcAft>
-              <a:defRPr sz="1700">
+              <a:defRPr sz="1750">
                 <a:solidFill>
                   <a:srgbClr val="2D2D2D"/>
                 </a:solidFill>
@@ -6636,14 +5354,46 @@
               </a:defRPr>
             </a:pPr>
             <a:r>
-              <a:t>• Made the page adaptable to different screen sizes.</a:t>
-            </a:r>
-          </a:p>
-        </p:txBody>
-      </p:sp>
-      <p:sp>
-        <p:nvSpPr>
-          <p:cNvPr id="11" name="TextBox 10"/>
+              <a:t>• Gained basic experience with API integration through the Weather Application.</a:t>
+            </a:r>
+          </a:p>
+          <a:p>
+            <a:pPr>
+              <a:spcAft>
+                <a:spcPts val="1600"/>
+              </a:spcAft>
+              <a:defRPr sz="1750">
+                <a:solidFill>
+                  <a:srgbClr val="2D2D2D"/>
+                </a:solidFill>
+                <a:latin typeface="Aptos"/>
+              </a:defRPr>
+            </a:pPr>
+            <a:r>
+              <a:t>• Practised using GitHub for project repositories and versioned work.</a:t>
+            </a:r>
+          </a:p>
+          <a:p>
+            <a:pPr>
+              <a:spcAft>
+                <a:spcPts val="1600"/>
+              </a:spcAft>
+              <a:defRPr sz="1750">
+                <a:solidFill>
+                  <a:srgbClr val="2D2D2D"/>
+                </a:solidFill>
+                <a:latin typeface="Aptos"/>
+              </a:defRPr>
+            </a:pPr>
+            <a:r>
+              <a:t>• Improved debugging, problem-solving and confidence in web development.</a:t>
+            </a:r>
+          </a:p>
+        </p:txBody>
+      </p:sp>
+      <p:sp>
+        <p:nvSpPr>
+          <p:cNvPr id="9" name="TextBox 8"/>
           <p:cNvSpPr txBox="1"/>
           <p:nvPr/>
         </p:nvSpPr>
@@ -6671,7 +5421,7 @@
                 </a:solidFill>
                 <a:latin typeface="Aptos"/>
               </a:rPr>
-              <a:t>7</a:t>
+              <a:t>12</a:t>
             </a:r>
           </a:p>
         </p:txBody>
@@ -6739,7 +5489,7 @@
                 </a:solidFill>
                 <a:latin typeface="Aptos Display"/>
               </a:rPr>
-              <a:t>STOPWATCH WEB APPLICATION</a:t>
+              <a:t>INTERNSHIP OUTCOME</a:t>
             </a:r>
           </a:p>
         </p:txBody>
@@ -6838,14 +5588,62 @@
       </p:sp>
       <p:sp>
         <p:nvSpPr>
-          <p:cNvPr id="6" name="Rectangle 5"/>
+          <p:cNvPr id="6" name="Rounded Rectangle 5"/>
           <p:cNvSpPr/>
           <p:nvPr/>
         </p:nvSpPr>
         <p:spPr>
           <a:xfrm>
-            <a:off x="822960" y="1417320"/>
-            <a:ext cx="1965960" cy="411480"/>
+            <a:off x="914400" y="1417320"/>
+            <a:ext cx="10332720" cy="1234440"/>
+          </a:xfrm>
+          <a:prstGeom prst="roundRect">
+            <a:avLst>
+              <a:gd name="adj" fmla="val 8000"/>
+            </a:avLst>
+          </a:prstGeom>
+          <a:solidFill>
+            <a:srgbClr val="FFFFFF"/>
+          </a:solidFill>
+          <a:ln>
+            <a:solidFill>
+              <a:srgbClr val="D7DDE4"/>
+            </a:solidFill>
+          </a:ln>
+        </p:spPr>
+        <p:style>
+          <a:lnRef idx="1">
+            <a:schemeClr val="accent1"/>
+          </a:lnRef>
+          <a:fillRef idx="3">
+            <a:schemeClr val="accent1"/>
+          </a:fillRef>
+          <a:effectRef idx="2">
+            <a:schemeClr val="accent1"/>
+          </a:effectRef>
+          <a:fontRef idx="minor">
+            <a:schemeClr val="lt1"/>
+          </a:fontRef>
+        </p:style>
+        <p:txBody>
+          <a:bodyPr rtlCol="0" anchor="ctr"/>
+          <a:lstStyle/>
+          <a:p>
+            <a:pPr algn="ctr"/>
+            <a:endParaRPr/>
+          </a:p>
+        </p:txBody>
+      </p:sp>
+      <p:sp>
+        <p:nvSpPr>
+          <p:cNvPr id="7" name="Rectangle 6"/>
+          <p:cNvSpPr/>
+          <p:nvPr/>
+        </p:nvSpPr>
+        <p:spPr>
+          <a:xfrm>
+            <a:off x="914400" y="1417320"/>
+            <a:ext cx="54864" cy="1234440"/>
           </a:xfrm>
           <a:prstGeom prst="rect">
             <a:avLst/>
@@ -6884,14 +5682,14 @@
       </p:sp>
       <p:sp>
         <p:nvSpPr>
-          <p:cNvPr id="7" name="TextBox 6"/>
+          <p:cNvPr id="8" name="TextBox 7"/>
           <p:cNvSpPr txBox="1"/>
           <p:nvPr/>
         </p:nvSpPr>
         <p:spPr>
           <a:xfrm>
-            <a:off x="822960" y="1490472"/>
-            <a:ext cx="1965960" cy="201168"/>
+            <a:off x="1143000" y="1618488"/>
+            <a:ext cx="9921240" cy="292608"/>
           </a:xfrm>
           <a:prstGeom prst="rect">
             <a:avLst/>
@@ -6904,29 +5702,82 @@
           </a:bodyPr>
           <a:lstStyle/>
           <a:p>
-            <a:pPr algn="ctr"/>
-            <a:r>
-              <a:rPr sz="1000" b="1">
-                <a:solidFill>
-                  <a:srgbClr val="FFFFFF"/>
+            <a:pPr algn="l"/>
+            <a:r>
+              <a:rPr sz="1500" b="1">
+                <a:solidFill>
+                  <a:srgbClr val="143057"/>
                 </a:solidFill>
                 <a:latin typeface="Aptos"/>
               </a:rPr>
-              <a:t>PROJECT 02</a:t>
-            </a:r>
-          </a:p>
-        </p:txBody>
-      </p:sp>
-      <p:sp>
-        <p:nvSpPr>
-          <p:cNvPr id="8" name="Rounded Rectangle 7"/>
+              <a:t>Technical Growth</a:t>
+            </a:r>
+          </a:p>
+        </p:txBody>
+      </p:sp>
+      <p:sp>
+        <p:nvSpPr>
+          <p:cNvPr id="9" name="TextBox 8"/>
+          <p:cNvSpPr txBox="1"/>
+          <p:nvPr/>
+        </p:nvSpPr>
+        <p:spPr>
+          <a:xfrm>
+            <a:off x="1143000" y="2011680"/>
+            <a:ext cx="10160730" cy="492443"/>
+          </a:xfrm>
+          <a:prstGeom prst="rect">
+            <a:avLst/>
+          </a:prstGeom>
+          <a:noFill/>
+        </p:spPr>
+        <p:txBody>
+          <a:bodyPr wrap="none" anchor="t">
+            <a:spAutoFit/>
+          </a:bodyPr>
+          <a:lstStyle/>
+          <a:p>
+            <a:pPr algn="l"/>
+            <a:r>
+              <a:rPr sz="1300" b="0" dirty="0">
+                <a:solidFill>
+                  <a:srgbClr val="2D2D2D"/>
+                </a:solidFill>
+                <a:latin typeface="Aptos"/>
+              </a:rPr>
+              <a:t>The internship strengthened practical understanding of front-end development and provided experience applying HTML, CSS and JavaScript </a:t>
+            </a:r>
+            <a:endParaRPr lang="en-US" sz="1300" b="0" dirty="0">
+              <a:solidFill>
+                <a:srgbClr val="2D2D2D"/>
+              </a:solidFill>
+              <a:latin typeface="Aptos"/>
+            </a:endParaRPr>
+          </a:p>
+          <a:p>
+            <a:pPr algn="l"/>
+            <a:r>
+              <a:rPr sz="1300" b="0" dirty="0">
+                <a:solidFill>
+                  <a:srgbClr val="2D2D2D"/>
+                </a:solidFill>
+                <a:latin typeface="Aptos"/>
+              </a:rPr>
+              <a:t>to project-based tasks.</a:t>
+            </a:r>
+          </a:p>
+        </p:txBody>
+      </p:sp>
+      <p:sp>
+        <p:nvSpPr>
+          <p:cNvPr id="10" name="Rounded Rectangle 9"/>
           <p:cNvSpPr/>
           <p:nvPr/>
         </p:nvSpPr>
         <p:spPr>
           <a:xfrm>
-            <a:off x="822960" y="2057400"/>
-            <a:ext cx="10561320" cy="3246120"/>
+            <a:off x="914400" y="2834640"/>
+            <a:ext cx="10332720" cy="1234440"/>
           </a:xfrm>
           <a:prstGeom prst="roundRect">
             <a:avLst>
@@ -6934,7 +5785,7 @@
             </a:avLst>
           </a:prstGeom>
           <a:solidFill>
-            <a:srgbClr val="F2F5F8"/>
+            <a:srgbClr val="FFFFFF"/>
           </a:solidFill>
           <a:ln>
             <a:solidFill>
@@ -6967,113 +5818,60 @@
       </p:sp>
       <p:sp>
         <p:nvSpPr>
-          <p:cNvPr id="9" name="TextBox 8"/>
+          <p:cNvPr id="11" name="Rectangle 10"/>
+          <p:cNvSpPr/>
+          <p:nvPr/>
+        </p:nvSpPr>
+        <p:spPr>
+          <a:xfrm>
+            <a:off x="914400" y="2834640"/>
+            <a:ext cx="54864" cy="1234440"/>
+          </a:xfrm>
+          <a:prstGeom prst="rect">
+            <a:avLst/>
+          </a:prstGeom>
+          <a:solidFill>
+            <a:srgbClr val="A6232D"/>
+          </a:solidFill>
+          <a:ln>
+            <a:solidFill>
+              <a:srgbClr val="A6232D"/>
+            </a:solidFill>
+          </a:ln>
+        </p:spPr>
+        <p:style>
+          <a:lnRef idx="1">
+            <a:schemeClr val="accent1"/>
+          </a:lnRef>
+          <a:fillRef idx="3">
+            <a:schemeClr val="accent1"/>
+          </a:fillRef>
+          <a:effectRef idx="2">
+            <a:schemeClr val="accent1"/>
+          </a:effectRef>
+          <a:fontRef idx="minor">
+            <a:schemeClr val="lt1"/>
+          </a:fontRef>
+        </p:style>
+        <p:txBody>
+          <a:bodyPr rtlCol="0" anchor="ctr"/>
+          <a:lstStyle/>
+          <a:p>
+            <a:pPr algn="ctr"/>
+            <a:endParaRPr/>
+          </a:p>
+        </p:txBody>
+      </p:sp>
+      <p:sp>
+        <p:nvSpPr>
+          <p:cNvPr id="12" name="TextBox 11"/>
           <p:cNvSpPr txBox="1"/>
           <p:nvPr/>
         </p:nvSpPr>
         <p:spPr>
           <a:xfrm>
-            <a:off x="1234440" y="2514600"/>
-            <a:ext cx="9784080" cy="1715854"/>
-          </a:xfrm>
-          <a:prstGeom prst="rect">
-            <a:avLst/>
-          </a:prstGeom>
-          <a:noFill/>
-        </p:spPr>
-        <p:txBody>
-          <a:bodyPr wrap="square">
-            <a:spAutoFit/>
-          </a:bodyPr>
-          <a:lstStyle/>
-          <a:p>
-            <a:pPr>
-              <a:spcAft>
-                <a:spcPts val="1500"/>
-              </a:spcAft>
-              <a:defRPr sz="1700">
-                <a:solidFill>
-                  <a:srgbClr val="2D2D2D"/>
-                </a:solidFill>
-                <a:latin typeface="Aptos"/>
-              </a:defRPr>
-            </a:pPr>
-            <a:r>
-              <a:rPr dirty="0"/>
-              <a:t>• Developed an interactive stopwatch using JavaScript.</a:t>
-            </a:r>
-          </a:p>
-          <a:p>
-            <a:pPr>
-              <a:spcAft>
-                <a:spcPts val="1500"/>
-              </a:spcAft>
-              <a:defRPr sz="1700">
-                <a:solidFill>
-                  <a:srgbClr val="2D2D2D"/>
-                </a:solidFill>
-                <a:latin typeface="Aptos"/>
-              </a:defRPr>
-            </a:pPr>
-            <a:r>
-              <a:rPr dirty="0"/>
-              <a:t>• Implemented Start, Stop, Reset</a:t>
-            </a:r>
-            <a:r>
-              <a:rPr lang="en-US" dirty="0"/>
-              <a:t>, Pause</a:t>
-            </a:r>
-            <a:r>
-              <a:rPr dirty="0"/>
-              <a:t> and Lap functionality.</a:t>
-            </a:r>
-          </a:p>
-          <a:p>
-            <a:pPr>
-              <a:spcAft>
-                <a:spcPts val="1500"/>
-              </a:spcAft>
-              <a:defRPr sz="1700">
-                <a:solidFill>
-                  <a:srgbClr val="2D2D2D"/>
-                </a:solidFill>
-                <a:latin typeface="Aptos"/>
-              </a:defRPr>
-            </a:pPr>
-            <a:r>
-              <a:rPr dirty="0"/>
-              <a:t>• Used JavaScript timing and event handling.</a:t>
-            </a:r>
-          </a:p>
-          <a:p>
-            <a:pPr>
-              <a:spcAft>
-                <a:spcPts val="1500"/>
-              </a:spcAft>
-              <a:defRPr sz="1700">
-                <a:solidFill>
-                  <a:srgbClr val="2D2D2D"/>
-                </a:solidFill>
-                <a:latin typeface="Aptos"/>
-              </a:defRPr>
-            </a:pPr>
-            <a:r>
-              <a:rPr dirty="0"/>
-              <a:t>• Improved understanding of interactive web application logic.</a:t>
-            </a:r>
-          </a:p>
-        </p:txBody>
-      </p:sp>
-      <p:sp>
-        <p:nvSpPr>
-          <p:cNvPr id="11" name="TextBox 10"/>
-          <p:cNvSpPr txBox="1"/>
-          <p:nvPr/>
-        </p:nvSpPr>
-        <p:spPr>
-          <a:xfrm>
-            <a:off x="11064240" y="6620256"/>
-            <a:ext cx="411480" cy="164592"/>
+            <a:off x="1143000" y="3035808"/>
+            <a:ext cx="9921240" cy="292608"/>
           </a:xfrm>
           <a:prstGeom prst="rect">
             <a:avLst/>
@@ -7086,15 +5884,267 @@
           </a:bodyPr>
           <a:lstStyle/>
           <a:p>
-            <a:pPr algn="r"/>
-            <a:r>
-              <a:rPr sz="850" b="1">
-                <a:solidFill>
-                  <a:srgbClr val="FFFFFF"/>
+            <a:pPr algn="l"/>
+            <a:r>
+              <a:rPr sz="1500" b="1">
+                <a:solidFill>
+                  <a:srgbClr val="143057"/>
                 </a:solidFill>
                 <a:latin typeface="Aptos"/>
               </a:rPr>
-              <a:t>8</a:t>
+              <a:t>Professional Growth</a:t>
+            </a:r>
+          </a:p>
+        </p:txBody>
+      </p:sp>
+      <p:sp>
+        <p:nvSpPr>
+          <p:cNvPr id="13" name="TextBox 12"/>
+          <p:cNvSpPr txBox="1"/>
+          <p:nvPr/>
+        </p:nvSpPr>
+        <p:spPr>
+          <a:xfrm>
+            <a:off x="1143000" y="3429000"/>
+            <a:ext cx="9921240" cy="457200"/>
+          </a:xfrm>
+          <a:prstGeom prst="rect">
+            <a:avLst/>
+          </a:prstGeom>
+          <a:noFill/>
+        </p:spPr>
+        <p:txBody>
+          <a:bodyPr wrap="none" anchor="t">
+            <a:spAutoFit/>
+          </a:bodyPr>
+          <a:lstStyle/>
+          <a:p>
+            <a:pPr algn="l"/>
+            <a:r>
+              <a:rPr sz="1300" b="0">
+                <a:solidFill>
+                  <a:srgbClr val="2D2D2D"/>
+                </a:solidFill>
+                <a:latin typeface="Aptos"/>
+              </a:rPr>
+              <a:t>Working through multiple projects improved the ability to plan, build, test and refine web applications.</a:t>
+            </a:r>
+          </a:p>
+        </p:txBody>
+      </p:sp>
+      <p:sp>
+        <p:nvSpPr>
+          <p:cNvPr id="14" name="Rounded Rectangle 13"/>
+          <p:cNvSpPr/>
+          <p:nvPr/>
+        </p:nvSpPr>
+        <p:spPr>
+          <a:xfrm>
+            <a:off x="914400" y="4251960"/>
+            <a:ext cx="10332720" cy="1234440"/>
+          </a:xfrm>
+          <a:prstGeom prst="roundRect">
+            <a:avLst>
+              <a:gd name="adj" fmla="val 8000"/>
+            </a:avLst>
+          </a:prstGeom>
+          <a:solidFill>
+            <a:srgbClr val="FFFFFF"/>
+          </a:solidFill>
+          <a:ln>
+            <a:solidFill>
+              <a:srgbClr val="D7DDE4"/>
+            </a:solidFill>
+          </a:ln>
+        </p:spPr>
+        <p:style>
+          <a:lnRef idx="1">
+            <a:schemeClr val="accent1"/>
+          </a:lnRef>
+          <a:fillRef idx="3">
+            <a:schemeClr val="accent1"/>
+          </a:fillRef>
+          <a:effectRef idx="2">
+            <a:schemeClr val="accent1"/>
+          </a:effectRef>
+          <a:fontRef idx="minor">
+            <a:schemeClr val="lt1"/>
+          </a:fontRef>
+        </p:style>
+        <p:txBody>
+          <a:bodyPr rtlCol="0" anchor="ctr"/>
+          <a:lstStyle/>
+          <a:p>
+            <a:pPr algn="ctr"/>
+            <a:endParaRPr/>
+          </a:p>
+        </p:txBody>
+      </p:sp>
+      <p:sp>
+        <p:nvSpPr>
+          <p:cNvPr id="15" name="Rectangle 14"/>
+          <p:cNvSpPr/>
+          <p:nvPr/>
+        </p:nvSpPr>
+        <p:spPr>
+          <a:xfrm>
+            <a:off x="914400" y="4251960"/>
+            <a:ext cx="54864" cy="1234440"/>
+          </a:xfrm>
+          <a:prstGeom prst="rect">
+            <a:avLst/>
+          </a:prstGeom>
+          <a:solidFill>
+            <a:srgbClr val="A6232D"/>
+          </a:solidFill>
+          <a:ln>
+            <a:solidFill>
+              <a:srgbClr val="A6232D"/>
+            </a:solidFill>
+          </a:ln>
+        </p:spPr>
+        <p:style>
+          <a:lnRef idx="1">
+            <a:schemeClr val="accent1"/>
+          </a:lnRef>
+          <a:fillRef idx="3">
+            <a:schemeClr val="accent1"/>
+          </a:fillRef>
+          <a:effectRef idx="2">
+            <a:schemeClr val="accent1"/>
+          </a:effectRef>
+          <a:fontRef idx="minor">
+            <a:schemeClr val="lt1"/>
+          </a:fontRef>
+        </p:style>
+        <p:txBody>
+          <a:bodyPr rtlCol="0" anchor="ctr"/>
+          <a:lstStyle/>
+          <a:p>
+            <a:pPr algn="ctr"/>
+            <a:endParaRPr/>
+          </a:p>
+        </p:txBody>
+      </p:sp>
+      <p:sp>
+        <p:nvSpPr>
+          <p:cNvPr id="16" name="TextBox 15"/>
+          <p:cNvSpPr txBox="1"/>
+          <p:nvPr/>
+        </p:nvSpPr>
+        <p:spPr>
+          <a:xfrm>
+            <a:off x="1143000" y="4453128"/>
+            <a:ext cx="9921240" cy="292608"/>
+          </a:xfrm>
+          <a:prstGeom prst="rect">
+            <a:avLst/>
+          </a:prstGeom>
+          <a:noFill/>
+        </p:spPr>
+        <p:txBody>
+          <a:bodyPr wrap="none" anchor="t">
+            <a:spAutoFit/>
+          </a:bodyPr>
+          <a:lstStyle/>
+          <a:p>
+            <a:pPr algn="l"/>
+            <a:r>
+              <a:rPr sz="1500" b="1">
+                <a:solidFill>
+                  <a:srgbClr val="143057"/>
+                </a:solidFill>
+                <a:latin typeface="Aptos"/>
+              </a:rPr>
+              <a:t>Overall Outcome</a:t>
+            </a:r>
+          </a:p>
+        </p:txBody>
+      </p:sp>
+      <p:sp>
+        <p:nvSpPr>
+          <p:cNvPr id="17" name="TextBox 16"/>
+          <p:cNvSpPr txBox="1"/>
+          <p:nvPr/>
+        </p:nvSpPr>
+        <p:spPr>
+          <a:xfrm>
+            <a:off x="1143000" y="4846320"/>
+            <a:ext cx="9824228" cy="492443"/>
+          </a:xfrm>
+          <a:prstGeom prst="rect">
+            <a:avLst/>
+          </a:prstGeom>
+          <a:noFill/>
+        </p:spPr>
+        <p:txBody>
+          <a:bodyPr wrap="none" anchor="t">
+            <a:spAutoFit/>
+          </a:bodyPr>
+          <a:lstStyle/>
+          <a:p>
+            <a:pPr algn="l"/>
+            <a:r>
+              <a:rPr sz="1300" b="0" dirty="0">
+                <a:solidFill>
+                  <a:srgbClr val="2D2D2D"/>
+                </a:solidFill>
+                <a:latin typeface="Aptos"/>
+              </a:rPr>
+              <a:t>The internship provided valuable hands-on exposure to web development and strengthened the foundation for further learning in Cloud </a:t>
+            </a:r>
+            <a:endParaRPr lang="en-US" sz="1300" b="0" dirty="0">
+              <a:solidFill>
+                <a:srgbClr val="2D2D2D"/>
+              </a:solidFill>
+              <a:latin typeface="Aptos"/>
+            </a:endParaRPr>
+          </a:p>
+          <a:p>
+            <a:pPr algn="l"/>
+            <a:r>
+              <a:rPr sz="1300" b="0" dirty="0">
+                <a:solidFill>
+                  <a:srgbClr val="2D2D2D"/>
+                </a:solidFill>
+                <a:latin typeface="Aptos"/>
+              </a:rPr>
+              <a:t>Computing, DevOps and modern technologies.</a:t>
+            </a:r>
+          </a:p>
+        </p:txBody>
+      </p:sp>
+      <p:sp>
+        <p:nvSpPr>
+          <p:cNvPr id="19" name="TextBox 18"/>
+          <p:cNvSpPr txBox="1"/>
+          <p:nvPr/>
+        </p:nvSpPr>
+        <p:spPr>
+          <a:xfrm>
+            <a:off x="11064240" y="6620256"/>
+            <a:ext cx="411480" cy="164592"/>
+          </a:xfrm>
+          <a:prstGeom prst="rect">
+            <a:avLst/>
+          </a:prstGeom>
+          <a:noFill/>
+        </p:spPr>
+        <p:txBody>
+          <a:bodyPr wrap="none" anchor="t">
+            <a:spAutoFit/>
+          </a:bodyPr>
+          <a:lstStyle/>
+          <a:p>
+            <a:pPr algn="r"/>
+            <a:r>
+              <a:rPr sz="850" b="1">
+                <a:solidFill>
+                  <a:srgbClr val="FFFFFF"/>
+                </a:solidFill>
+                <a:latin typeface="Aptos"/>
+              </a:rPr>
+              <a:t>13</a:t>
             </a:r>
           </a:p>
         </p:txBody>
@@ -7162,7 +6212,7 @@
                 </a:solidFill>
                 <a:latin typeface="Aptos Display"/>
               </a:rPr>
-              <a:t>TIC-TAC-TOE WEB APPLICATION</a:t>
+              <a:t>INTERNSHIP COMPLETION CERTIFICATE</a:t>
             </a:r>
           </a:p>
         </p:txBody>
@@ -7261,95 +6311,14 @@
       </p:sp>
       <p:sp>
         <p:nvSpPr>
-          <p:cNvPr id="6" name="Rectangle 5"/>
+          <p:cNvPr id="6" name="Rounded Rectangle 5"/>
           <p:cNvSpPr/>
           <p:nvPr/>
         </p:nvSpPr>
         <p:spPr>
           <a:xfrm>
-            <a:off x="822960" y="1417320"/>
-            <a:ext cx="1965960" cy="411480"/>
-          </a:xfrm>
-          <a:prstGeom prst="rect">
-            <a:avLst/>
-          </a:prstGeom>
-          <a:solidFill>
-            <a:srgbClr val="A6232D"/>
-          </a:solidFill>
-          <a:ln>
-            <a:solidFill>
-              <a:srgbClr val="A6232D"/>
-            </a:solidFill>
-          </a:ln>
-        </p:spPr>
-        <p:style>
-          <a:lnRef idx="1">
-            <a:schemeClr val="accent1"/>
-          </a:lnRef>
-          <a:fillRef idx="3">
-            <a:schemeClr val="accent1"/>
-          </a:fillRef>
-          <a:effectRef idx="2">
-            <a:schemeClr val="accent1"/>
-          </a:effectRef>
-          <a:fontRef idx="minor">
-            <a:schemeClr val="lt1"/>
-          </a:fontRef>
-        </p:style>
-        <p:txBody>
-          <a:bodyPr rtlCol="0" anchor="ctr"/>
-          <a:lstStyle/>
-          <a:p>
-            <a:pPr algn="ctr"/>
-            <a:endParaRPr/>
-          </a:p>
-        </p:txBody>
-      </p:sp>
-      <p:sp>
-        <p:nvSpPr>
-          <p:cNvPr id="7" name="TextBox 6"/>
-          <p:cNvSpPr txBox="1"/>
-          <p:nvPr/>
-        </p:nvSpPr>
-        <p:spPr>
-          <a:xfrm>
-            <a:off x="822960" y="1490472"/>
-            <a:ext cx="1965960" cy="201168"/>
-          </a:xfrm>
-          <a:prstGeom prst="rect">
-            <a:avLst/>
-          </a:prstGeom>
-          <a:noFill/>
-        </p:spPr>
-        <p:txBody>
-          <a:bodyPr wrap="none" anchor="t">
-            <a:spAutoFit/>
-          </a:bodyPr>
-          <a:lstStyle/>
-          <a:p>
-            <a:pPr algn="ctr"/>
-            <a:r>
-              <a:rPr sz="1000" b="1">
-                <a:solidFill>
-                  <a:srgbClr val="FFFFFF"/>
-                </a:solidFill>
-                <a:latin typeface="Aptos"/>
-              </a:rPr>
-              <a:t>PROJECT 03</a:t>
-            </a:r>
-          </a:p>
-        </p:txBody>
-      </p:sp>
-      <p:sp>
-        <p:nvSpPr>
-          <p:cNvPr id="8" name="Rounded Rectangle 7"/>
-          <p:cNvSpPr/>
-          <p:nvPr/>
-        </p:nvSpPr>
-        <p:spPr>
-          <a:xfrm>
-            <a:off x="822960" y="2057400"/>
-            <a:ext cx="10561320" cy="3246120"/>
+            <a:off x="1874519" y="1325880"/>
+            <a:ext cx="8458200" cy="4892040"/>
           </a:xfrm>
           <a:prstGeom prst="roundRect">
             <a:avLst>
@@ -7357,7 +6326,7 @@
             </a:avLst>
           </a:prstGeom>
           <a:solidFill>
-            <a:srgbClr val="F2F5F8"/>
+            <a:srgbClr val="FFFFFF"/>
           </a:solidFill>
           <a:ln>
             <a:solidFill>
@@ -7396,105 +6365,6 @@
         </p:nvSpPr>
         <p:spPr>
           <a:xfrm>
-            <a:off x="1234440" y="2514600"/>
-            <a:ext cx="9784080" cy="1715854"/>
-          </a:xfrm>
-          <a:prstGeom prst="rect">
-            <a:avLst/>
-          </a:prstGeom>
-          <a:noFill/>
-        </p:spPr>
-        <p:txBody>
-          <a:bodyPr wrap="square">
-            <a:spAutoFit/>
-          </a:bodyPr>
-          <a:lstStyle/>
-          <a:p>
-            <a:pPr>
-              <a:spcAft>
-                <a:spcPts val="1500"/>
-              </a:spcAft>
-              <a:defRPr sz="1700">
-                <a:solidFill>
-                  <a:srgbClr val="2D2D2D"/>
-                </a:solidFill>
-                <a:latin typeface="Aptos"/>
-              </a:defRPr>
-            </a:pPr>
-            <a:r>
-              <a:rPr dirty="0"/>
-              <a:t>• Created an interactive Tic-Tac-Toe game using HTML, CSS and JavaScript.</a:t>
-            </a:r>
-          </a:p>
-          <a:p>
-            <a:pPr>
-              <a:spcAft>
-                <a:spcPts val="1500"/>
-              </a:spcAft>
-              <a:defRPr sz="1700">
-                <a:solidFill>
-                  <a:srgbClr val="2D2D2D"/>
-                </a:solidFill>
-                <a:latin typeface="Aptos"/>
-              </a:defRPr>
-            </a:pPr>
-            <a:r>
-              <a:rPr dirty="0"/>
-              <a:t>• Implemented turn-based game logic</a:t>
-            </a:r>
-            <a:r>
-              <a:rPr lang="en-US" dirty="0"/>
-              <a:t> and also add for single user, player vs AI</a:t>
-            </a:r>
-            <a:r>
-              <a:rPr dirty="0"/>
-              <a:t>.</a:t>
-            </a:r>
-          </a:p>
-          <a:p>
-            <a:pPr>
-              <a:spcAft>
-                <a:spcPts val="1500"/>
-              </a:spcAft>
-              <a:defRPr sz="1700">
-                <a:solidFill>
-                  <a:srgbClr val="2D2D2D"/>
-                </a:solidFill>
-                <a:latin typeface="Aptos"/>
-              </a:defRPr>
-            </a:pPr>
-            <a:r>
-              <a:rPr dirty="0"/>
-              <a:t>• Added winner checking and game reset functionality.</a:t>
-            </a:r>
-          </a:p>
-          <a:p>
-            <a:pPr>
-              <a:spcAft>
-                <a:spcPts val="1500"/>
-              </a:spcAft>
-              <a:defRPr sz="1700">
-                <a:solidFill>
-                  <a:srgbClr val="2D2D2D"/>
-                </a:solidFill>
-                <a:latin typeface="Aptos"/>
-              </a:defRPr>
-            </a:pPr>
-            <a:r>
-              <a:rPr dirty="0"/>
-              <a:t>• Focused on simple and engaging user interaction.</a:t>
-            </a:r>
-          </a:p>
-        </p:txBody>
-      </p:sp>
-      <p:sp>
-        <p:nvSpPr>
-          <p:cNvPr id="11" name="TextBox 10"/>
-          <p:cNvSpPr txBox="1"/>
-          <p:nvPr/>
-        </p:nvSpPr>
-        <p:spPr>
-          <a:xfrm>
             <a:off x="11064240" y="6620256"/>
             <a:ext cx="411480" cy="164592"/>
           </a:xfrm>
@@ -7517,11 +6387,68 @@
                 </a:solidFill>
                 <a:latin typeface="Aptos"/>
               </a:rPr>
-              <a:t>9</a:t>
-            </a:r>
-          </a:p>
-        </p:txBody>
-      </p:sp>
+              <a:t>14</a:t>
+            </a:r>
+          </a:p>
+        </p:txBody>
+      </p:sp>
+      <p:pic>
+        <p:nvPicPr>
+          <p:cNvPr id="11" name="Picture 10">
+            <a:extLst>
+              <a:ext uri="{FF2B5EF4-FFF2-40B4-BE49-F238E27FC236}">
+                <a16:creationId xmlns:a16="http://schemas.microsoft.com/office/drawing/2014/main" id="{F77C852D-40DC-B33B-23EF-815F7ED5AD20}"/>
+              </a:ext>
+            </a:extLst>
+          </p:cNvPr>
+          <p:cNvPicPr>
+            <a:picLocks noChangeAspect="1"/>
+          </p:cNvPicPr>
+          <p:nvPr/>
+        </p:nvPicPr>
+        <p:blipFill>
+          <a:blip r:embed="rId2"/>
+          <a:stretch>
+            <a:fillRect/>
+          </a:stretch>
+        </p:blipFill>
+        <p:spPr>
+          <a:xfrm>
+            <a:off x="1874519" y="1298448"/>
+            <a:ext cx="8496000" cy="4897333"/>
+          </a:xfrm>
+          <a:prstGeom prst="roundRect">
+            <a:avLst>
+              <a:gd name="adj" fmla="val 11111"/>
+            </a:avLst>
+          </a:prstGeom>
+          <a:ln w="190500" cap="rnd">
+            <a:solidFill>
+              <a:srgbClr val="C8C6BD"/>
+            </a:solidFill>
+            <a:prstDash val="solid"/>
+          </a:ln>
+          <a:effectLst>
+            <a:outerShdw blurRad="101600" dist="50800" dir="7200000" algn="tl" rotWithShape="0">
+              <a:srgbClr val="000000">
+                <a:alpha val="45000"/>
+              </a:srgbClr>
+            </a:outerShdw>
+          </a:effectLst>
+          <a:scene3d>
+            <a:camera prst="perspectiveFront" fov="5400000"/>
+            <a:lightRig rig="threePt" dir="t">
+              <a:rot lat="0" lon="0" rev="19200000"/>
+            </a:lightRig>
+          </a:scene3d>
+          <a:sp3d extrusionH="25400">
+            <a:bevelT w="304800" h="152400" prst="hardEdge"/>
+            <a:extrusionClr>
+              <a:srgbClr val="FFFFFF"/>
+            </a:extrusionClr>
+          </a:sp3d>
+        </p:spPr>
+      </p:pic>
     </p:spTree>
   </p:cSld>
   <p:clrMapOvr>
@@ -7557,36 +6484,47 @@
       </p:grpSpPr>
       <p:sp>
         <p:nvSpPr>
-          <p:cNvPr id="2" name="TextBox 1"/>
-          <p:cNvSpPr txBox="1"/>
-          <p:nvPr/>
-        </p:nvSpPr>
-        <p:spPr>
-          <a:xfrm>
-            <a:off x="685800" y="475488"/>
-            <a:ext cx="9966960" cy="438912"/>
-          </a:xfrm>
-          <a:prstGeom prst="rect">
-            <a:avLst/>
-          </a:prstGeom>
-          <a:noFill/>
-        </p:spPr>
-        <p:txBody>
-          <a:bodyPr wrap="none" anchor="t">
-            <a:spAutoFit/>
-          </a:bodyPr>
-          <a:lstStyle/>
-          <a:p>
-            <a:pPr algn="l"/>
-            <a:r>
-              <a:rPr sz="2300" b="1">
-                <a:solidFill>
-                  <a:srgbClr val="143057"/>
-                </a:solidFill>
-                <a:latin typeface="Aptos Display"/>
-              </a:rPr>
-              <a:t>PERSONAL PORTFOLIO WEBSITE</a:t>
-            </a:r>
+          <p:cNvPr id="2" name="Rectangle 1"/>
+          <p:cNvSpPr/>
+          <p:nvPr/>
+        </p:nvSpPr>
+        <p:spPr>
+          <a:xfrm>
+            <a:off x="0" y="0"/>
+            <a:ext cx="12191695" cy="128016"/>
+          </a:xfrm>
+          <a:prstGeom prst="rect">
+            <a:avLst/>
+          </a:prstGeom>
+          <a:solidFill>
+            <a:srgbClr val="143057"/>
+          </a:solidFill>
+          <a:ln>
+            <a:solidFill>
+              <a:srgbClr val="143057"/>
+            </a:solidFill>
+          </a:ln>
+        </p:spPr>
+        <p:style>
+          <a:lnRef idx="1">
+            <a:schemeClr val="accent1"/>
+          </a:lnRef>
+          <a:fillRef idx="3">
+            <a:schemeClr val="accent1"/>
+          </a:fillRef>
+          <a:effectRef idx="2">
+            <a:schemeClr val="accent1"/>
+          </a:effectRef>
+          <a:fontRef idx="minor">
+            <a:schemeClr val="lt1"/>
+          </a:fontRef>
+        </p:style>
+        <p:txBody>
+          <a:bodyPr rtlCol="0" anchor="ctr"/>
+          <a:lstStyle/>
+          <a:p>
+            <a:pPr algn="ctr"/>
+            <a:endParaRPr/>
           </a:p>
         </p:txBody>
       </p:sp>
@@ -7598,8 +6536,8 @@
         </p:nvSpPr>
         <p:spPr>
           <a:xfrm>
-            <a:off x="685800" y="1024128"/>
-            <a:ext cx="685800" cy="50292"/>
+            <a:off x="0" y="128016"/>
+            <a:ext cx="12191695" cy="41148"/>
           </a:xfrm>
           <a:prstGeom prst="rect">
             <a:avLst/>
@@ -7638,60 +6576,49 @@
       </p:sp>
       <p:sp>
         <p:nvSpPr>
+          <p:cNvPr id="4" name="TextBox 3"/>
+          <p:cNvSpPr txBox="1"/>
+          <p:nvPr/>
+        </p:nvSpPr>
+        <p:spPr>
+          <a:xfrm>
+            <a:off x="1828800" y="1965960"/>
+            <a:ext cx="8531352" cy="640080"/>
+          </a:xfrm>
+          <a:prstGeom prst="rect">
+            <a:avLst/>
+          </a:prstGeom>
+          <a:noFill/>
+        </p:spPr>
+        <p:txBody>
+          <a:bodyPr wrap="none" anchor="t">
+            <a:spAutoFit/>
+          </a:bodyPr>
+          <a:lstStyle/>
+          <a:p>
+            <a:pPr algn="ctr"/>
+            <a:r>
+              <a:rPr sz="3200" b="1">
+                <a:solidFill>
+                  <a:srgbClr val="143057"/>
+                </a:solidFill>
+                <a:latin typeface="Aptos Display"/>
+              </a:rPr>
+              <a:t>THANK YOU</a:t>
+            </a:r>
+          </a:p>
+        </p:txBody>
+      </p:sp>
+      <p:sp>
+        <p:nvSpPr>
           <p:cNvPr id="5" name="Rectangle 4"/>
           <p:cNvSpPr/>
           <p:nvPr/>
         </p:nvSpPr>
         <p:spPr>
           <a:xfrm>
-            <a:off x="0" y="6601968"/>
-            <a:ext cx="12191695" cy="256032"/>
-          </a:xfrm>
-          <a:prstGeom prst="rect">
-            <a:avLst/>
-          </a:prstGeom>
-          <a:solidFill>
-            <a:srgbClr val="143057"/>
-          </a:solidFill>
-          <a:ln>
-            <a:solidFill>
-              <a:srgbClr val="143057"/>
-            </a:solidFill>
-          </a:ln>
-        </p:spPr>
-        <p:style>
-          <a:lnRef idx="1">
-            <a:schemeClr val="accent1"/>
-          </a:lnRef>
-          <a:fillRef idx="3">
-            <a:schemeClr val="accent1"/>
-          </a:fillRef>
-          <a:effectRef idx="2">
-            <a:schemeClr val="accent1"/>
-          </a:effectRef>
-          <a:fontRef idx="minor">
-            <a:schemeClr val="lt1"/>
-          </a:fontRef>
-        </p:style>
-        <p:txBody>
-          <a:bodyPr rtlCol="0" anchor="ctr"/>
-          <a:lstStyle/>
-          <a:p>
-            <a:pPr algn="ctr"/>
-            <a:endParaRPr/>
-          </a:p>
-        </p:txBody>
-      </p:sp>
-      <p:sp>
-        <p:nvSpPr>
-          <p:cNvPr id="6" name="Rectangle 5"/>
-          <p:cNvSpPr/>
-          <p:nvPr/>
-        </p:nvSpPr>
-        <p:spPr>
-          <a:xfrm>
-            <a:off x="822960" y="1417320"/>
-            <a:ext cx="1965960" cy="411480"/>
+            <a:off x="4983480" y="2788920"/>
+            <a:ext cx="2240280" cy="50292"/>
           </a:xfrm>
           <a:prstGeom prst="rect">
             <a:avLst/>
@@ -7730,14 +6657,14 @@
       </p:sp>
       <p:sp>
         <p:nvSpPr>
-          <p:cNvPr id="7" name="TextBox 6"/>
+          <p:cNvPr id="6" name="TextBox 5"/>
           <p:cNvSpPr txBox="1"/>
           <p:nvPr/>
         </p:nvSpPr>
         <p:spPr>
           <a:xfrm>
-            <a:off x="822960" y="1490472"/>
-            <a:ext cx="1965960" cy="201168"/>
+            <a:off x="5585425" y="3154680"/>
+            <a:ext cx="1018099" cy="369332"/>
           </a:xfrm>
           <a:prstGeom prst="rect">
             <a:avLst/>
@@ -7752,162 +6679,33 @@
           <a:p>
             <a:pPr algn="ctr"/>
             <a:r>
-              <a:rPr sz="1000" b="1">
-                <a:solidFill>
-                  <a:srgbClr val="FFFFFF"/>
+              <a:rPr lang="en-US" b="1" dirty="0">
+                <a:solidFill>
+                  <a:srgbClr val="2D2D2D"/>
                 </a:solidFill>
                 <a:latin typeface="Aptos"/>
               </a:rPr>
-              <a:t>PROJECT 04</a:t>
-            </a:r>
-          </a:p>
-        </p:txBody>
-      </p:sp>
-      <p:sp>
-        <p:nvSpPr>
-          <p:cNvPr id="8" name="Rounded Rectangle 7"/>
-          <p:cNvSpPr/>
-          <p:nvPr/>
-        </p:nvSpPr>
-        <p:spPr>
-          <a:xfrm>
-            <a:off x="822960" y="2057400"/>
-            <a:ext cx="10561320" cy="3246120"/>
-          </a:xfrm>
-          <a:prstGeom prst="roundRect">
-            <a:avLst>
-              <a:gd name="adj" fmla="val 8000"/>
-            </a:avLst>
-          </a:prstGeom>
-          <a:solidFill>
-            <a:srgbClr val="F2F5F8"/>
-          </a:solidFill>
-          <a:ln>
-            <a:solidFill>
-              <a:srgbClr val="D7DDE4"/>
-            </a:solidFill>
-          </a:ln>
-        </p:spPr>
-        <p:style>
-          <a:lnRef idx="1">
-            <a:schemeClr val="accent1"/>
-          </a:lnRef>
-          <a:fillRef idx="3">
-            <a:schemeClr val="accent1"/>
-          </a:fillRef>
-          <a:effectRef idx="2">
-            <a:schemeClr val="accent1"/>
-          </a:effectRef>
-          <a:fontRef idx="minor">
-            <a:schemeClr val="lt1"/>
-          </a:fontRef>
-        </p:style>
-        <p:txBody>
-          <a:bodyPr rtlCol="0" anchor="ctr"/>
-          <a:lstStyle/>
-          <a:p>
-            <a:pPr algn="ctr"/>
-            <a:endParaRPr/>
-          </a:p>
-        </p:txBody>
-      </p:sp>
-      <p:sp>
-        <p:nvSpPr>
-          <p:cNvPr id="9" name="TextBox 8"/>
+              <a:t>Ravi Raj</a:t>
+            </a:r>
+            <a:endParaRPr sz="1800" b="1" dirty="0">
+              <a:solidFill>
+                <a:srgbClr val="2D2D2D"/>
+              </a:solidFill>
+              <a:latin typeface="Aptos"/>
+            </a:endParaRPr>
+          </a:p>
+        </p:txBody>
+      </p:sp>
+      <p:sp>
+        <p:nvSpPr>
+          <p:cNvPr id="7" name="TextBox 6"/>
           <p:cNvSpPr txBox="1"/>
           <p:nvPr/>
         </p:nvSpPr>
         <p:spPr>
           <a:xfrm>
-            <a:off x="1234440" y="2514600"/>
-            <a:ext cx="9784080" cy="2468880"/>
-          </a:xfrm>
-          <a:prstGeom prst="rect">
-            <a:avLst/>
-          </a:prstGeom>
-          <a:noFill/>
-        </p:spPr>
-        <p:txBody>
-          <a:bodyPr wrap="square">
-            <a:spAutoFit/>
-          </a:bodyPr>
-          <a:lstStyle/>
-          <a:p>
-            <a:pPr>
-              <a:spcAft>
-                <a:spcPts val="1500"/>
-              </a:spcAft>
-              <a:defRPr sz="1700">
-                <a:solidFill>
-                  <a:srgbClr val="2D2D2D"/>
-                </a:solidFill>
-                <a:latin typeface="Aptos"/>
-              </a:defRPr>
-            </a:pPr>
-            <a:r>
-              <a:t>• Designed a personal portfolio website using HTML, CSS and JavaScript.</a:t>
-            </a:r>
-          </a:p>
-          <a:p>
-            <a:pPr>
-              <a:spcAft>
-                <a:spcPts val="1500"/>
-              </a:spcAft>
-              <a:defRPr sz="1700">
-                <a:solidFill>
-                  <a:srgbClr val="2D2D2D"/>
-                </a:solidFill>
-                <a:latin typeface="Aptos"/>
-              </a:defRPr>
-            </a:pPr>
-            <a:r>
-              <a:t>• Included About, Skills, Projects, Education and Contact sections.</a:t>
-            </a:r>
-          </a:p>
-          <a:p>
-            <a:pPr>
-              <a:spcAft>
-                <a:spcPts val="1500"/>
-              </a:spcAft>
-              <a:defRPr sz="1700">
-                <a:solidFill>
-                  <a:srgbClr val="2D2D2D"/>
-                </a:solidFill>
-                <a:latin typeface="Aptos"/>
-              </a:defRPr>
-            </a:pPr>
-            <a:r>
-              <a:t>• Added responsive navigation and interactive page behaviour.</a:t>
-            </a:r>
-          </a:p>
-          <a:p>
-            <a:pPr>
-              <a:spcAft>
-                <a:spcPts val="1500"/>
-              </a:spcAft>
-              <a:defRPr sz="1700">
-                <a:solidFill>
-                  <a:srgbClr val="2D2D2D"/>
-                </a:solidFill>
-                <a:latin typeface="Aptos"/>
-              </a:defRPr>
-            </a:pPr>
-            <a:r>
-              <a:t>• Created the portfolio to present academic and technical work professionally.</a:t>
-            </a:r>
-          </a:p>
-        </p:txBody>
-      </p:sp>
-      <p:sp>
-        <p:nvSpPr>
-          <p:cNvPr id="11" name="TextBox 10"/>
-          <p:cNvSpPr txBox="1"/>
-          <p:nvPr/>
-        </p:nvSpPr>
-        <p:spPr>
-          <a:xfrm>
-            <a:off x="11064240" y="6620256"/>
-            <a:ext cx="411480" cy="164592"/>
+            <a:off x="4717912" y="3657600"/>
+            <a:ext cx="2753126" cy="307777"/>
           </a:xfrm>
           <a:prstGeom prst="rect">
             <a:avLst/>
@@ -7920,15 +6718,118 @@
           </a:bodyPr>
           <a:lstStyle/>
           <a:p>
-            <a:pPr algn="r"/>
-            <a:r>
-              <a:rPr sz="850" b="1">
-                <a:solidFill>
-                  <a:srgbClr val="FFFFFF"/>
+            <a:pPr algn="ctr"/>
+            <a:r>
+              <a:rPr sz="1400" b="0" dirty="0" err="1">
+                <a:solidFill>
+                  <a:srgbClr val="5F6973"/>
                 </a:solidFill>
                 <a:latin typeface="Aptos"/>
               </a:rPr>
-              <a:t>10</a:t>
+              <a:t>B.Tech</a:t>
+            </a:r>
+            <a:r>
+              <a:rPr sz="1400" b="0" dirty="0">
+                <a:solidFill>
+                  <a:srgbClr val="5F6973"/>
+                </a:solidFill>
+                <a:latin typeface="Aptos"/>
+              </a:rPr>
+              <a:t> CSE | </a:t>
+            </a:r>
+            <a:r>
+              <a:rPr lang="en-US" sz="1400" dirty="0">
+                <a:solidFill>
+                  <a:srgbClr val="5F6973"/>
+                </a:solidFill>
+                <a:latin typeface="Aptos"/>
+              </a:rPr>
+              <a:t>AI/ML </a:t>
+            </a:r>
+            <a:r>
+              <a:rPr sz="1400" b="0" dirty="0" err="1">
+                <a:solidFill>
+                  <a:srgbClr val="5F6973"/>
+                </a:solidFill>
+                <a:latin typeface="Aptos"/>
+              </a:rPr>
+              <a:t>Specialisation</a:t>
+            </a:r>
+            <a:endParaRPr sz="1400" b="0" dirty="0">
+              <a:solidFill>
+                <a:srgbClr val="5F6973"/>
+              </a:solidFill>
+              <a:latin typeface="Aptos"/>
+            </a:endParaRPr>
+          </a:p>
+        </p:txBody>
+      </p:sp>
+      <p:sp>
+        <p:nvSpPr>
+          <p:cNvPr id="8" name="TextBox 7"/>
+          <p:cNvSpPr txBox="1"/>
+          <p:nvPr/>
+        </p:nvSpPr>
+        <p:spPr>
+          <a:xfrm>
+            <a:off x="1828800" y="4096512"/>
+            <a:ext cx="8531352" cy="320040"/>
+          </a:xfrm>
+          <a:prstGeom prst="rect">
+            <a:avLst/>
+          </a:prstGeom>
+          <a:noFill/>
+        </p:spPr>
+        <p:txBody>
+          <a:bodyPr wrap="none" anchor="t">
+            <a:spAutoFit/>
+          </a:bodyPr>
+          <a:lstStyle/>
+          <a:p>
+            <a:pPr algn="ctr"/>
+            <a:r>
+              <a:rPr sz="1300" b="0">
+                <a:solidFill>
+                  <a:srgbClr val="5F6973"/>
+                </a:solidFill>
+                <a:latin typeface="Aptos"/>
+              </a:rPr>
+              <a:t>Web Development Internship | Prodigy InfoTech</a:t>
+            </a:r>
+          </a:p>
+        </p:txBody>
+      </p:sp>
+      <p:sp>
+        <p:nvSpPr>
+          <p:cNvPr id="9" name="TextBox 8"/>
+          <p:cNvSpPr txBox="1"/>
+          <p:nvPr/>
+        </p:nvSpPr>
+        <p:spPr>
+          <a:xfrm>
+            <a:off x="1828800" y="4800600"/>
+            <a:ext cx="8531352" cy="320040"/>
+          </a:xfrm>
+          <a:prstGeom prst="rect">
+            <a:avLst/>
+          </a:prstGeom>
+          <a:noFill/>
+        </p:spPr>
+        <p:txBody>
+          <a:bodyPr wrap="none" anchor="t">
+            <a:spAutoFit/>
+          </a:bodyPr>
+          <a:lstStyle/>
+          <a:p>
+            <a:pPr algn="ctr"/>
+            <a:r>
+              <a:rPr sz="1300" b="1">
+                <a:solidFill>
+                  <a:srgbClr val="264E79"/>
+                </a:solidFill>
+                <a:latin typeface="Aptos"/>
+              </a:rPr>
+              <a:t>IILM University</a:t>
             </a:r>
           </a:p>
         </p:txBody>
@@ -7941,7 +6842,7 @@
 </p:sld>
 </file>
 
-<file path=ppt/slides/slide16.xml><?xml version="1.0" encoding="utf-8"?>
+<file path=ppt/slides/slide2.xml><?xml version="1.0" encoding="utf-8"?>
 <p:sld xmlns:a="http://schemas.openxmlformats.org/drawingml/2006/main" xmlns:r="http://schemas.openxmlformats.org/officeDocument/2006/relationships" xmlns:p="http://schemas.openxmlformats.org/presentationml/2006/main">
   <p:cSld>
     <p:bg>
@@ -7996,7 +6897,7 @@
                 </a:solidFill>
                 <a:latin typeface="Aptos Display"/>
               </a:rPr>
-              <a:t>WEATHER APPLICATION</a:t>
+              <a:t>WEB DEVELOPMENT INTERNSHIP</a:t>
             </a:r>
           </a:p>
         </p:txBody>
@@ -8095,14 +6996,49 @@
       </p:sp>
       <p:sp>
         <p:nvSpPr>
-          <p:cNvPr id="6" name="Rectangle 5"/>
+          <p:cNvPr id="6" name="TextBox 5"/>
+          <p:cNvSpPr txBox="1"/>
+          <p:nvPr/>
+        </p:nvSpPr>
+        <p:spPr>
+          <a:xfrm>
+            <a:off x="777240" y="1508760"/>
+            <a:ext cx="10698480" cy="502920"/>
+          </a:xfrm>
+          <a:prstGeom prst="rect">
+            <a:avLst/>
+          </a:prstGeom>
+          <a:noFill/>
+        </p:spPr>
+        <p:txBody>
+          <a:bodyPr wrap="none" anchor="t">
+            <a:spAutoFit/>
+          </a:bodyPr>
+          <a:lstStyle/>
+          <a:p>
+            <a:pPr algn="ctr"/>
+            <a:r>
+              <a:rPr sz="2800" b="1">
+                <a:solidFill>
+                  <a:srgbClr val="143057"/>
+                </a:solidFill>
+                <a:latin typeface="Aptos Display"/>
+              </a:rPr>
+              <a:t>INTERNSHIP PRESENTATION</a:t>
+            </a:r>
+          </a:p>
+        </p:txBody>
+      </p:sp>
+      <p:sp>
+        <p:nvSpPr>
+          <p:cNvPr id="7" name="Rectangle 6"/>
           <p:cNvSpPr/>
           <p:nvPr/>
         </p:nvSpPr>
         <p:spPr>
           <a:xfrm>
-            <a:off x="822960" y="1417320"/>
-            <a:ext cx="1965960" cy="411480"/>
+            <a:off x="4892040" y="2148840"/>
+            <a:ext cx="2423160" cy="50292"/>
           </a:xfrm>
           <a:prstGeom prst="rect">
             <a:avLst/>
@@ -8141,14 +7077,14 @@
       </p:sp>
       <p:sp>
         <p:nvSpPr>
-          <p:cNvPr id="7" name="TextBox 6"/>
+          <p:cNvPr id="8" name="TextBox 7"/>
           <p:cNvSpPr txBox="1"/>
           <p:nvPr/>
         </p:nvSpPr>
         <p:spPr>
           <a:xfrm>
-            <a:off x="822960" y="1490472"/>
-            <a:ext cx="1965960" cy="201168"/>
+            <a:off x="4206240" y="2788920"/>
+            <a:ext cx="3749039" cy="274320"/>
           </a:xfrm>
           <a:prstGeom prst="rect">
             <a:avLst/>
@@ -8163,62 +7099,14 @@
           <a:p>
             <a:pPr algn="ctr"/>
             <a:r>
-              <a:rPr sz="1000" b="1">
-                <a:solidFill>
-                  <a:srgbClr val="FFFFFF"/>
+              <a:rPr sz="1300" b="1">
+                <a:solidFill>
+                  <a:srgbClr val="5F6973"/>
                 </a:solidFill>
                 <a:latin typeface="Aptos"/>
               </a:rPr>
-              <a:t>PROJECT 05</a:t>
-            </a:r>
-          </a:p>
-        </p:txBody>
-      </p:sp>
-      <p:sp>
-        <p:nvSpPr>
-          <p:cNvPr id="8" name="Rounded Rectangle 7"/>
-          <p:cNvSpPr/>
-          <p:nvPr/>
-        </p:nvSpPr>
-        <p:spPr>
-          <a:xfrm>
-            <a:off x="822960" y="2057400"/>
-            <a:ext cx="10561320" cy="3246120"/>
-          </a:xfrm>
-          <a:prstGeom prst="roundRect">
-            <a:avLst>
-              <a:gd name="adj" fmla="val 8000"/>
-            </a:avLst>
-          </a:prstGeom>
-          <a:solidFill>
-            <a:srgbClr val="F2F5F8"/>
-          </a:solidFill>
-          <a:ln>
-            <a:solidFill>
-              <a:srgbClr val="D7DDE4"/>
-            </a:solidFill>
-          </a:ln>
-        </p:spPr>
-        <p:style>
-          <a:lnRef idx="1">
-            <a:schemeClr val="accent1"/>
-          </a:lnRef>
-          <a:fillRef idx="3">
-            <a:schemeClr val="accent1"/>
-          </a:fillRef>
-          <a:effectRef idx="2">
-            <a:schemeClr val="accent1"/>
-          </a:effectRef>
-          <a:fontRef idx="minor">
-            <a:schemeClr val="lt1"/>
-          </a:fontRef>
-        </p:style>
-        <p:txBody>
-          <a:bodyPr rtlCol="0" anchor="ctr"/>
-          <a:lstStyle/>
-          <a:p>
-            <a:pPr algn="ctr"/>
-            <a:endParaRPr/>
+              <a:t>Organization</a:t>
+            </a:r>
           </a:p>
         </p:txBody>
       </p:sp>
@@ -8230,95 +7118,8 @@
         </p:nvSpPr>
         <p:spPr>
           <a:xfrm>
-            <a:off x="1234440" y="2514600"/>
-            <a:ext cx="9784080" cy="2468880"/>
-          </a:xfrm>
-          <a:prstGeom prst="rect">
-            <a:avLst/>
-          </a:prstGeom>
-          <a:noFill/>
-        </p:spPr>
-        <p:txBody>
-          <a:bodyPr wrap="square">
-            <a:spAutoFit/>
-          </a:bodyPr>
-          <a:lstStyle/>
-          <a:p>
-            <a:pPr>
-              <a:spcAft>
-                <a:spcPts val="1500"/>
-              </a:spcAft>
-              <a:defRPr sz="1700">
-                <a:solidFill>
-                  <a:srgbClr val="2D2D2D"/>
-                </a:solidFill>
-                <a:latin typeface="Aptos"/>
-              </a:defRPr>
-            </a:pPr>
-            <a:r>
-              <a:t>• Developed a weather application using a Weather API.</a:t>
-            </a:r>
-          </a:p>
-          <a:p>
-            <a:pPr>
-              <a:spcAft>
-                <a:spcPts val="1500"/>
-              </a:spcAft>
-              <a:defRPr sz="1700">
-                <a:solidFill>
-                  <a:srgbClr val="2D2D2D"/>
-                </a:solidFill>
-                <a:latin typeface="Aptos"/>
-              </a:defRPr>
-            </a:pPr>
-            <a:r>
-              <a:t>• Allows users to search for weather by city.</a:t>
-            </a:r>
-          </a:p>
-          <a:p>
-            <a:pPr>
-              <a:spcAft>
-                <a:spcPts val="1500"/>
-              </a:spcAft>
-              <a:defRPr sz="1700">
-                <a:solidFill>
-                  <a:srgbClr val="2D2D2D"/>
-                </a:solidFill>
-                <a:latin typeface="Aptos"/>
-              </a:defRPr>
-            </a:pPr>
-            <a:r>
-              <a:t>• Displays current weather information such as temperature and conditions.</a:t>
-            </a:r>
-          </a:p>
-          <a:p>
-            <a:pPr>
-              <a:spcAft>
-                <a:spcPts val="1500"/>
-              </a:spcAft>
-              <a:defRPr sz="1700">
-                <a:solidFill>
-                  <a:srgbClr val="2D2D2D"/>
-                </a:solidFill>
-                <a:latin typeface="Aptos"/>
-              </a:defRPr>
-            </a:pPr>
-            <a:r>
-              <a:t>• Practised basic API integration and dynamic data display.</a:t>
-            </a:r>
-          </a:p>
-        </p:txBody>
-      </p:sp>
-      <p:sp>
-        <p:nvSpPr>
-          <p:cNvPr id="11" name="TextBox 10"/>
-          <p:cNvSpPr txBox="1"/>
-          <p:nvPr/>
-        </p:nvSpPr>
-        <p:spPr>
-          <a:xfrm>
-            <a:off x="11064240" y="6620256"/>
-            <a:ext cx="411480" cy="164592"/>
+            <a:off x="2926080" y="3154680"/>
+            <a:ext cx="6309360" cy="475488"/>
           </a:xfrm>
           <a:prstGeom prst="rect">
             <a:avLst/>
@@ -8331,15 +7132,120 @@
           </a:bodyPr>
           <a:lstStyle/>
           <a:p>
-            <a:pPr algn="r"/>
-            <a:r>
-              <a:rPr sz="850" b="1">
-                <a:solidFill>
-                  <a:srgbClr val="FFFFFF"/>
+            <a:pPr algn="ctr"/>
+            <a:r>
+              <a:rPr sz="2500" b="1">
+                <a:solidFill>
+                  <a:srgbClr val="2D2D2D"/>
                 </a:solidFill>
                 <a:latin typeface="Aptos"/>
               </a:rPr>
-              <a:t>11</a:t>
+              <a:t>Prodigy InfoTech</a:t>
+            </a:r>
+          </a:p>
+        </p:txBody>
+      </p:sp>
+      <p:sp>
+        <p:nvSpPr>
+          <p:cNvPr id="10" name="TextBox 9"/>
+          <p:cNvSpPr txBox="1"/>
+          <p:nvPr/>
+        </p:nvSpPr>
+        <p:spPr>
+          <a:xfrm>
+            <a:off x="2926080" y="3840480"/>
+            <a:ext cx="6309360" cy="320040"/>
+          </a:xfrm>
+          <a:prstGeom prst="rect">
+            <a:avLst/>
+          </a:prstGeom>
+          <a:noFill/>
+        </p:spPr>
+        <p:txBody>
+          <a:bodyPr wrap="none" anchor="t">
+            <a:spAutoFit/>
+          </a:bodyPr>
+          <a:lstStyle/>
+          <a:p>
+            <a:pPr algn="ctr"/>
+            <a:r>
+              <a:rPr sz="1500" b="0">
+                <a:solidFill>
+                  <a:srgbClr val="264E79"/>
+                </a:solidFill>
+                <a:latin typeface="Aptos"/>
+              </a:rPr>
+              <a:t>Role: Web Development Intern</a:t>
+            </a:r>
+          </a:p>
+        </p:txBody>
+      </p:sp>
+      <p:sp>
+        <p:nvSpPr>
+          <p:cNvPr id="11" name="TextBox 10"/>
+          <p:cNvSpPr txBox="1"/>
+          <p:nvPr/>
+        </p:nvSpPr>
+        <p:spPr>
+          <a:xfrm>
+            <a:off x="2926080" y="4315968"/>
+            <a:ext cx="6309360" cy="292608"/>
+          </a:xfrm>
+          <a:prstGeom prst="rect">
+            <a:avLst/>
+          </a:prstGeom>
+          <a:noFill/>
+        </p:spPr>
+        <p:txBody>
+          <a:bodyPr wrap="none" anchor="t">
+            <a:spAutoFit/>
+          </a:bodyPr>
+          <a:lstStyle/>
+          <a:p>
+            <a:pPr algn="ctr"/>
+            <a:r>
+              <a:rPr sz="1400" b="0">
+                <a:solidFill>
+                  <a:srgbClr val="5F6973"/>
+                </a:solidFill>
+                <a:latin typeface="Aptos"/>
+              </a:rPr>
+              <a:t>15 July 2026 – 15 August 2026</a:t>
+            </a:r>
+          </a:p>
+        </p:txBody>
+      </p:sp>
+      <p:sp>
+        <p:nvSpPr>
+          <p:cNvPr id="13" name="TextBox 12"/>
+          <p:cNvSpPr txBox="1"/>
+          <p:nvPr/>
+        </p:nvSpPr>
+        <p:spPr>
+          <a:xfrm>
+            <a:off x="11064240" y="6620256"/>
+            <a:ext cx="411480" cy="164592"/>
+          </a:xfrm>
+          <a:prstGeom prst="rect">
+            <a:avLst/>
+          </a:prstGeom>
+          <a:noFill/>
+        </p:spPr>
+        <p:txBody>
+          <a:bodyPr wrap="none" anchor="t">
+            <a:spAutoFit/>
+          </a:bodyPr>
+          <a:lstStyle/>
+          <a:p>
+            <a:pPr algn="r"/>
+            <a:r>
+              <a:rPr sz="850" b="1" dirty="0">
+                <a:solidFill>
+                  <a:srgbClr val="FFFFFF"/>
+                </a:solidFill>
+                <a:latin typeface="Aptos"/>
+              </a:rPr>
+              <a:t>2</a:t>
             </a:r>
           </a:p>
         </p:txBody>
@@ -8352,7 +7258,7 @@
 </p:sld>
 </file>
 
-<file path=ppt/slides/slide17.xml><?xml version="1.0" encoding="utf-8"?>
+<file path=ppt/slides/slide3.xml><?xml version="1.0" encoding="utf-8"?>
 <p:sld xmlns:a="http://schemas.openxmlformats.org/drawingml/2006/main" xmlns:r="http://schemas.openxmlformats.org/officeDocument/2006/relationships" xmlns:p="http://schemas.openxmlformats.org/presentationml/2006/main">
   <p:cSld>
     <p:bg>
@@ -8407,7 +7313,7 @@
                 </a:solidFill>
                 <a:latin typeface="Aptos Display"/>
               </a:rPr>
-              <a:t>KEY LEARNINGS</a:t>
+              <a:t>INTERNSHIP OVERVIEW</a:t>
             </a:r>
           </a:p>
         </p:txBody>
@@ -8512,8 +7418,8 @@
         </p:nvSpPr>
         <p:spPr>
           <a:xfrm>
-            <a:off x="914400" y="1417320"/>
-            <a:ext cx="10332720" cy="4526280"/>
+            <a:off x="731520" y="1417320"/>
+            <a:ext cx="5074920" cy="1051560"/>
           </a:xfrm>
           <a:prstGeom prst="roundRect">
             <a:avLst>
@@ -8521,7 +7427,7 @@
             </a:avLst>
           </a:prstGeom>
           <a:solidFill>
-            <a:srgbClr val="F2F5F8"/>
+            <a:srgbClr val="FFFFFF"/>
           </a:solidFill>
           <a:ln>
             <a:solidFill>
@@ -8554,133 +7460,60 @@
       </p:sp>
       <p:sp>
         <p:nvSpPr>
-          <p:cNvPr id="7" name="TextBox 6"/>
+          <p:cNvPr id="7" name="Rectangle 6"/>
+          <p:cNvSpPr/>
+          <p:nvPr/>
+        </p:nvSpPr>
+        <p:spPr>
+          <a:xfrm>
+            <a:off x="731520" y="1417320"/>
+            <a:ext cx="54864" cy="1051560"/>
+          </a:xfrm>
+          <a:prstGeom prst="rect">
+            <a:avLst/>
+          </a:prstGeom>
+          <a:solidFill>
+            <a:srgbClr val="A6232D"/>
+          </a:solidFill>
+          <a:ln>
+            <a:solidFill>
+              <a:srgbClr val="A6232D"/>
+            </a:solidFill>
+          </a:ln>
+        </p:spPr>
+        <p:style>
+          <a:lnRef idx="1">
+            <a:schemeClr val="accent1"/>
+          </a:lnRef>
+          <a:fillRef idx="3">
+            <a:schemeClr val="accent1"/>
+          </a:fillRef>
+          <a:effectRef idx="2">
+            <a:schemeClr val="accent1"/>
+          </a:effectRef>
+          <a:fontRef idx="minor">
+            <a:schemeClr val="lt1"/>
+          </a:fontRef>
+        </p:style>
+        <p:txBody>
+          <a:bodyPr rtlCol="0" anchor="ctr"/>
+          <a:lstStyle/>
+          <a:p>
+            <a:pPr algn="ctr"/>
+            <a:endParaRPr/>
+          </a:p>
+        </p:txBody>
+      </p:sp>
+      <p:sp>
+        <p:nvSpPr>
+          <p:cNvPr id="8" name="TextBox 7"/>
           <p:cNvSpPr txBox="1"/>
           <p:nvPr/>
         </p:nvSpPr>
         <p:spPr>
           <a:xfrm>
-            <a:off x="1325880" y="1783080"/>
-            <a:ext cx="9509760" cy="3749039"/>
-          </a:xfrm>
-          <a:prstGeom prst="rect">
-            <a:avLst/>
-          </a:prstGeom>
-          <a:noFill/>
-        </p:spPr>
-        <p:txBody>
-          <a:bodyPr wrap="square">
-            <a:spAutoFit/>
-          </a:bodyPr>
-          <a:lstStyle/>
-          <a:p>
-            <a:pPr>
-              <a:spcAft>
-                <a:spcPts val="1600"/>
-              </a:spcAft>
-              <a:defRPr sz="1750">
-                <a:solidFill>
-                  <a:srgbClr val="2D2D2D"/>
-                </a:solidFill>
-                <a:latin typeface="Aptos"/>
-              </a:defRPr>
-            </a:pPr>
-            <a:r>
-              <a:t>• Improved practical skills in HTML, CSS and JavaScript.</a:t>
-            </a:r>
-          </a:p>
-          <a:p>
-            <a:pPr>
-              <a:spcAft>
-                <a:spcPts val="1600"/>
-              </a:spcAft>
-              <a:defRPr sz="1750">
-                <a:solidFill>
-                  <a:srgbClr val="2D2D2D"/>
-                </a:solidFill>
-                <a:latin typeface="Aptos"/>
-              </a:defRPr>
-            </a:pPr>
-            <a:r>
-              <a:t>• Learned to create responsive and interactive web pages.</a:t>
-            </a:r>
-          </a:p>
-          <a:p>
-            <a:pPr>
-              <a:spcAft>
-                <a:spcPts val="1600"/>
-              </a:spcAft>
-              <a:defRPr sz="1750">
-                <a:solidFill>
-                  <a:srgbClr val="2D2D2D"/>
-                </a:solidFill>
-                <a:latin typeface="Aptos"/>
-              </a:defRPr>
-            </a:pPr>
-            <a:r>
-              <a:t>• Understood JavaScript logic, events and application behaviour.</a:t>
-            </a:r>
-          </a:p>
-          <a:p>
-            <a:pPr>
-              <a:spcAft>
-                <a:spcPts val="1600"/>
-              </a:spcAft>
-              <a:defRPr sz="1750">
-                <a:solidFill>
-                  <a:srgbClr val="2D2D2D"/>
-                </a:solidFill>
-                <a:latin typeface="Aptos"/>
-              </a:defRPr>
-            </a:pPr>
-            <a:r>
-              <a:t>• Gained basic experience with API integration through the Weather Application.</a:t>
-            </a:r>
-          </a:p>
-          <a:p>
-            <a:pPr>
-              <a:spcAft>
-                <a:spcPts val="1600"/>
-              </a:spcAft>
-              <a:defRPr sz="1750">
-                <a:solidFill>
-                  <a:srgbClr val="2D2D2D"/>
-                </a:solidFill>
-                <a:latin typeface="Aptos"/>
-              </a:defRPr>
-            </a:pPr>
-            <a:r>
-              <a:t>• Practised using GitHub for project repositories and versioned work.</a:t>
-            </a:r>
-          </a:p>
-          <a:p>
-            <a:pPr>
-              <a:spcAft>
-                <a:spcPts val="1600"/>
-              </a:spcAft>
-              <a:defRPr sz="1750">
-                <a:solidFill>
-                  <a:srgbClr val="2D2D2D"/>
-                </a:solidFill>
-                <a:latin typeface="Aptos"/>
-              </a:defRPr>
-            </a:pPr>
-            <a:r>
-              <a:t>• Improved debugging, problem-solving and confidence in web development.</a:t>
-            </a:r>
-          </a:p>
-        </p:txBody>
-      </p:sp>
-      <p:sp>
-        <p:nvSpPr>
-          <p:cNvPr id="9" name="TextBox 8"/>
-          <p:cNvSpPr txBox="1"/>
-          <p:nvPr/>
-        </p:nvSpPr>
-        <p:spPr>
-          <a:xfrm>
-            <a:off x="11064240" y="6620256"/>
-            <a:ext cx="411480" cy="164592"/>
+            <a:off x="960120" y="1618488"/>
+            <a:ext cx="4663440" cy="292608"/>
           </a:xfrm>
           <a:prstGeom prst="rect">
             <a:avLst/>
@@ -8693,15 +7526,759 @@
           </a:bodyPr>
           <a:lstStyle/>
           <a:p>
-            <a:pPr algn="r"/>
-            <a:r>
-              <a:rPr sz="850" b="1">
-                <a:solidFill>
-                  <a:srgbClr val="FFFFFF"/>
+            <a:pPr algn="l"/>
+            <a:r>
+              <a:rPr sz="1500" b="1">
+                <a:solidFill>
+                  <a:srgbClr val="143057"/>
                 </a:solidFill>
                 <a:latin typeface="Aptos"/>
               </a:rPr>
-              <a:t>12</a:t>
+              <a:t>Organization</a:t>
+            </a:r>
+          </a:p>
+        </p:txBody>
+      </p:sp>
+      <p:sp>
+        <p:nvSpPr>
+          <p:cNvPr id="9" name="TextBox 8"/>
+          <p:cNvSpPr txBox="1"/>
+          <p:nvPr/>
+        </p:nvSpPr>
+        <p:spPr>
+          <a:xfrm>
+            <a:off x="960120" y="2011680"/>
+            <a:ext cx="4663440" cy="274319"/>
+          </a:xfrm>
+          <a:prstGeom prst="rect">
+            <a:avLst/>
+          </a:prstGeom>
+          <a:noFill/>
+        </p:spPr>
+        <p:txBody>
+          <a:bodyPr wrap="none" anchor="t">
+            <a:spAutoFit/>
+          </a:bodyPr>
+          <a:lstStyle/>
+          <a:p>
+            <a:pPr algn="l"/>
+            <a:r>
+              <a:rPr sz="1300" b="0">
+                <a:solidFill>
+                  <a:srgbClr val="2D2D2D"/>
+                </a:solidFill>
+                <a:latin typeface="Aptos"/>
+              </a:rPr>
+              <a:t>Prodigy InfoTech</a:t>
+            </a:r>
+          </a:p>
+        </p:txBody>
+      </p:sp>
+      <p:sp>
+        <p:nvSpPr>
+          <p:cNvPr id="10" name="Rounded Rectangle 9"/>
+          <p:cNvSpPr/>
+          <p:nvPr/>
+        </p:nvSpPr>
+        <p:spPr>
+          <a:xfrm>
+            <a:off x="6309360" y="1417320"/>
+            <a:ext cx="5074920" cy="1051560"/>
+          </a:xfrm>
+          <a:prstGeom prst="roundRect">
+            <a:avLst>
+              <a:gd name="adj" fmla="val 8000"/>
+            </a:avLst>
+          </a:prstGeom>
+          <a:solidFill>
+            <a:srgbClr val="FFFFFF"/>
+          </a:solidFill>
+          <a:ln>
+            <a:solidFill>
+              <a:srgbClr val="D7DDE4"/>
+            </a:solidFill>
+          </a:ln>
+        </p:spPr>
+        <p:style>
+          <a:lnRef idx="1">
+            <a:schemeClr val="accent1"/>
+          </a:lnRef>
+          <a:fillRef idx="3">
+            <a:schemeClr val="accent1"/>
+          </a:fillRef>
+          <a:effectRef idx="2">
+            <a:schemeClr val="accent1"/>
+          </a:effectRef>
+          <a:fontRef idx="minor">
+            <a:schemeClr val="lt1"/>
+          </a:fontRef>
+        </p:style>
+        <p:txBody>
+          <a:bodyPr rtlCol="0" anchor="ctr"/>
+          <a:lstStyle/>
+          <a:p>
+            <a:pPr algn="ctr"/>
+            <a:endParaRPr/>
+          </a:p>
+        </p:txBody>
+      </p:sp>
+      <p:sp>
+        <p:nvSpPr>
+          <p:cNvPr id="11" name="Rectangle 10"/>
+          <p:cNvSpPr/>
+          <p:nvPr/>
+        </p:nvSpPr>
+        <p:spPr>
+          <a:xfrm>
+            <a:off x="6309360" y="1417320"/>
+            <a:ext cx="54864" cy="1051560"/>
+          </a:xfrm>
+          <a:prstGeom prst="rect">
+            <a:avLst/>
+          </a:prstGeom>
+          <a:solidFill>
+            <a:srgbClr val="A6232D"/>
+          </a:solidFill>
+          <a:ln>
+            <a:solidFill>
+              <a:srgbClr val="A6232D"/>
+            </a:solidFill>
+          </a:ln>
+        </p:spPr>
+        <p:style>
+          <a:lnRef idx="1">
+            <a:schemeClr val="accent1"/>
+          </a:lnRef>
+          <a:fillRef idx="3">
+            <a:schemeClr val="accent1"/>
+          </a:fillRef>
+          <a:effectRef idx="2">
+            <a:schemeClr val="accent1"/>
+          </a:effectRef>
+          <a:fontRef idx="minor">
+            <a:schemeClr val="lt1"/>
+          </a:fontRef>
+        </p:style>
+        <p:txBody>
+          <a:bodyPr rtlCol="0" anchor="ctr"/>
+          <a:lstStyle/>
+          <a:p>
+            <a:pPr algn="ctr"/>
+            <a:endParaRPr/>
+          </a:p>
+        </p:txBody>
+      </p:sp>
+      <p:sp>
+        <p:nvSpPr>
+          <p:cNvPr id="12" name="TextBox 11"/>
+          <p:cNvSpPr txBox="1"/>
+          <p:nvPr/>
+        </p:nvSpPr>
+        <p:spPr>
+          <a:xfrm>
+            <a:off x="6537960" y="1618488"/>
+            <a:ext cx="4663440" cy="292608"/>
+          </a:xfrm>
+          <a:prstGeom prst="rect">
+            <a:avLst/>
+          </a:prstGeom>
+          <a:noFill/>
+        </p:spPr>
+        <p:txBody>
+          <a:bodyPr wrap="none" anchor="t">
+            <a:spAutoFit/>
+          </a:bodyPr>
+          <a:lstStyle/>
+          <a:p>
+            <a:pPr algn="l"/>
+            <a:r>
+              <a:rPr sz="1500" b="1">
+                <a:solidFill>
+                  <a:srgbClr val="143057"/>
+                </a:solidFill>
+                <a:latin typeface="Aptos"/>
+              </a:rPr>
+              <a:t>Role</a:t>
+            </a:r>
+          </a:p>
+        </p:txBody>
+      </p:sp>
+      <p:sp>
+        <p:nvSpPr>
+          <p:cNvPr id="13" name="TextBox 12"/>
+          <p:cNvSpPr txBox="1"/>
+          <p:nvPr/>
+        </p:nvSpPr>
+        <p:spPr>
+          <a:xfrm>
+            <a:off x="6537960" y="2011680"/>
+            <a:ext cx="4663440" cy="274319"/>
+          </a:xfrm>
+          <a:prstGeom prst="rect">
+            <a:avLst/>
+          </a:prstGeom>
+          <a:noFill/>
+        </p:spPr>
+        <p:txBody>
+          <a:bodyPr wrap="none" anchor="t">
+            <a:spAutoFit/>
+          </a:bodyPr>
+          <a:lstStyle/>
+          <a:p>
+            <a:pPr algn="l"/>
+            <a:r>
+              <a:rPr sz="1300" b="0">
+                <a:solidFill>
+                  <a:srgbClr val="2D2D2D"/>
+                </a:solidFill>
+                <a:latin typeface="Aptos"/>
+              </a:rPr>
+              <a:t>Web Development Intern</a:t>
+            </a:r>
+          </a:p>
+        </p:txBody>
+      </p:sp>
+      <p:sp>
+        <p:nvSpPr>
+          <p:cNvPr id="14" name="Rounded Rectangle 13"/>
+          <p:cNvSpPr/>
+          <p:nvPr/>
+        </p:nvSpPr>
+        <p:spPr>
+          <a:xfrm>
+            <a:off x="731520" y="2788920"/>
+            <a:ext cx="5074920" cy="1051560"/>
+          </a:xfrm>
+          <a:prstGeom prst="roundRect">
+            <a:avLst>
+              <a:gd name="adj" fmla="val 8000"/>
+            </a:avLst>
+          </a:prstGeom>
+          <a:solidFill>
+            <a:srgbClr val="FFFFFF"/>
+          </a:solidFill>
+          <a:ln>
+            <a:solidFill>
+              <a:srgbClr val="D7DDE4"/>
+            </a:solidFill>
+          </a:ln>
+        </p:spPr>
+        <p:style>
+          <a:lnRef idx="1">
+            <a:schemeClr val="accent1"/>
+          </a:lnRef>
+          <a:fillRef idx="3">
+            <a:schemeClr val="accent1"/>
+          </a:fillRef>
+          <a:effectRef idx="2">
+            <a:schemeClr val="accent1"/>
+          </a:effectRef>
+          <a:fontRef idx="minor">
+            <a:schemeClr val="lt1"/>
+          </a:fontRef>
+        </p:style>
+        <p:txBody>
+          <a:bodyPr rtlCol="0" anchor="ctr"/>
+          <a:lstStyle/>
+          <a:p>
+            <a:pPr algn="ctr"/>
+            <a:endParaRPr/>
+          </a:p>
+        </p:txBody>
+      </p:sp>
+      <p:sp>
+        <p:nvSpPr>
+          <p:cNvPr id="15" name="Rectangle 14"/>
+          <p:cNvSpPr/>
+          <p:nvPr/>
+        </p:nvSpPr>
+        <p:spPr>
+          <a:xfrm>
+            <a:off x="731520" y="2788920"/>
+            <a:ext cx="54864" cy="1051560"/>
+          </a:xfrm>
+          <a:prstGeom prst="rect">
+            <a:avLst/>
+          </a:prstGeom>
+          <a:solidFill>
+            <a:srgbClr val="A6232D"/>
+          </a:solidFill>
+          <a:ln>
+            <a:solidFill>
+              <a:srgbClr val="A6232D"/>
+            </a:solidFill>
+          </a:ln>
+        </p:spPr>
+        <p:style>
+          <a:lnRef idx="1">
+            <a:schemeClr val="accent1"/>
+          </a:lnRef>
+          <a:fillRef idx="3">
+            <a:schemeClr val="accent1"/>
+          </a:fillRef>
+          <a:effectRef idx="2">
+            <a:schemeClr val="accent1"/>
+          </a:effectRef>
+          <a:fontRef idx="minor">
+            <a:schemeClr val="lt1"/>
+          </a:fontRef>
+        </p:style>
+        <p:txBody>
+          <a:bodyPr rtlCol="0" anchor="ctr"/>
+          <a:lstStyle/>
+          <a:p>
+            <a:pPr algn="ctr"/>
+            <a:endParaRPr/>
+          </a:p>
+        </p:txBody>
+      </p:sp>
+      <p:sp>
+        <p:nvSpPr>
+          <p:cNvPr id="16" name="TextBox 15"/>
+          <p:cNvSpPr txBox="1"/>
+          <p:nvPr/>
+        </p:nvSpPr>
+        <p:spPr>
+          <a:xfrm>
+            <a:off x="960120" y="2990088"/>
+            <a:ext cx="4663440" cy="292608"/>
+          </a:xfrm>
+          <a:prstGeom prst="rect">
+            <a:avLst/>
+          </a:prstGeom>
+          <a:noFill/>
+        </p:spPr>
+        <p:txBody>
+          <a:bodyPr wrap="none" anchor="t">
+            <a:spAutoFit/>
+          </a:bodyPr>
+          <a:lstStyle/>
+          <a:p>
+            <a:pPr algn="l"/>
+            <a:r>
+              <a:rPr sz="1500" b="1">
+                <a:solidFill>
+                  <a:srgbClr val="143057"/>
+                </a:solidFill>
+                <a:latin typeface="Aptos"/>
+              </a:rPr>
+              <a:t>Duration</a:t>
+            </a:r>
+          </a:p>
+        </p:txBody>
+      </p:sp>
+      <p:sp>
+        <p:nvSpPr>
+          <p:cNvPr id="17" name="TextBox 16"/>
+          <p:cNvSpPr txBox="1"/>
+          <p:nvPr/>
+        </p:nvSpPr>
+        <p:spPr>
+          <a:xfrm>
+            <a:off x="960120" y="3383279"/>
+            <a:ext cx="4663440" cy="274319"/>
+          </a:xfrm>
+          <a:prstGeom prst="rect">
+            <a:avLst/>
+          </a:prstGeom>
+          <a:noFill/>
+        </p:spPr>
+        <p:txBody>
+          <a:bodyPr wrap="none" anchor="t">
+            <a:spAutoFit/>
+          </a:bodyPr>
+          <a:lstStyle/>
+          <a:p>
+            <a:pPr algn="l"/>
+            <a:r>
+              <a:rPr sz="1300" b="0">
+                <a:solidFill>
+                  <a:srgbClr val="2D2D2D"/>
+                </a:solidFill>
+                <a:latin typeface="Aptos"/>
+              </a:rPr>
+              <a:t>15 July 2026 – 15 August 2026</a:t>
+            </a:r>
+          </a:p>
+        </p:txBody>
+      </p:sp>
+      <p:sp>
+        <p:nvSpPr>
+          <p:cNvPr id="18" name="Rounded Rectangle 17"/>
+          <p:cNvSpPr/>
+          <p:nvPr/>
+        </p:nvSpPr>
+        <p:spPr>
+          <a:xfrm>
+            <a:off x="6309360" y="2788920"/>
+            <a:ext cx="5074920" cy="1051560"/>
+          </a:xfrm>
+          <a:prstGeom prst="roundRect">
+            <a:avLst>
+              <a:gd name="adj" fmla="val 8000"/>
+            </a:avLst>
+          </a:prstGeom>
+          <a:solidFill>
+            <a:srgbClr val="FFFFFF"/>
+          </a:solidFill>
+          <a:ln>
+            <a:solidFill>
+              <a:srgbClr val="D7DDE4"/>
+            </a:solidFill>
+          </a:ln>
+        </p:spPr>
+        <p:style>
+          <a:lnRef idx="1">
+            <a:schemeClr val="accent1"/>
+          </a:lnRef>
+          <a:fillRef idx="3">
+            <a:schemeClr val="accent1"/>
+          </a:fillRef>
+          <a:effectRef idx="2">
+            <a:schemeClr val="accent1"/>
+          </a:effectRef>
+          <a:fontRef idx="minor">
+            <a:schemeClr val="lt1"/>
+          </a:fontRef>
+        </p:style>
+        <p:txBody>
+          <a:bodyPr rtlCol="0" anchor="ctr"/>
+          <a:lstStyle/>
+          <a:p>
+            <a:pPr algn="ctr"/>
+            <a:endParaRPr/>
+          </a:p>
+        </p:txBody>
+      </p:sp>
+      <p:sp>
+        <p:nvSpPr>
+          <p:cNvPr id="19" name="Rectangle 18"/>
+          <p:cNvSpPr/>
+          <p:nvPr/>
+        </p:nvSpPr>
+        <p:spPr>
+          <a:xfrm>
+            <a:off x="6309360" y="2788920"/>
+            <a:ext cx="54864" cy="1051560"/>
+          </a:xfrm>
+          <a:prstGeom prst="rect">
+            <a:avLst/>
+          </a:prstGeom>
+          <a:solidFill>
+            <a:srgbClr val="A6232D"/>
+          </a:solidFill>
+          <a:ln>
+            <a:solidFill>
+              <a:srgbClr val="A6232D"/>
+            </a:solidFill>
+          </a:ln>
+        </p:spPr>
+        <p:style>
+          <a:lnRef idx="1">
+            <a:schemeClr val="accent1"/>
+          </a:lnRef>
+          <a:fillRef idx="3">
+            <a:schemeClr val="accent1"/>
+          </a:fillRef>
+          <a:effectRef idx="2">
+            <a:schemeClr val="accent1"/>
+          </a:effectRef>
+          <a:fontRef idx="minor">
+            <a:schemeClr val="lt1"/>
+          </a:fontRef>
+        </p:style>
+        <p:txBody>
+          <a:bodyPr rtlCol="0" anchor="ctr"/>
+          <a:lstStyle/>
+          <a:p>
+            <a:pPr algn="ctr"/>
+            <a:endParaRPr/>
+          </a:p>
+        </p:txBody>
+      </p:sp>
+      <p:sp>
+        <p:nvSpPr>
+          <p:cNvPr id="20" name="TextBox 19"/>
+          <p:cNvSpPr txBox="1"/>
+          <p:nvPr/>
+        </p:nvSpPr>
+        <p:spPr>
+          <a:xfrm>
+            <a:off x="6537960" y="2990088"/>
+            <a:ext cx="4663440" cy="292608"/>
+          </a:xfrm>
+          <a:prstGeom prst="rect">
+            <a:avLst/>
+          </a:prstGeom>
+          <a:noFill/>
+        </p:spPr>
+        <p:txBody>
+          <a:bodyPr wrap="none" anchor="t">
+            <a:spAutoFit/>
+          </a:bodyPr>
+          <a:lstStyle/>
+          <a:p>
+            <a:pPr algn="l"/>
+            <a:r>
+              <a:rPr sz="1500" b="1">
+                <a:solidFill>
+                  <a:srgbClr val="143057"/>
+                </a:solidFill>
+                <a:latin typeface="Aptos"/>
+              </a:rPr>
+              <a:t>Domain</a:t>
+            </a:r>
+          </a:p>
+        </p:txBody>
+      </p:sp>
+      <p:sp>
+        <p:nvSpPr>
+          <p:cNvPr id="21" name="TextBox 20"/>
+          <p:cNvSpPr txBox="1"/>
+          <p:nvPr/>
+        </p:nvSpPr>
+        <p:spPr>
+          <a:xfrm>
+            <a:off x="6537960" y="3383279"/>
+            <a:ext cx="4847994" cy="492443"/>
+          </a:xfrm>
+          <a:prstGeom prst="rect">
+            <a:avLst/>
+          </a:prstGeom>
+          <a:noFill/>
+        </p:spPr>
+        <p:txBody>
+          <a:bodyPr wrap="none" anchor="t">
+            <a:spAutoFit/>
+          </a:bodyPr>
+          <a:lstStyle/>
+          <a:p>
+            <a:pPr algn="l"/>
+            <a:r>
+              <a:rPr sz="1300" b="0" dirty="0">
+                <a:solidFill>
+                  <a:srgbClr val="2D2D2D"/>
+                </a:solidFill>
+                <a:latin typeface="Aptos"/>
+              </a:rPr>
+              <a:t>Practical web development using HTML, CSS and JavaScript, with</a:t>
+            </a:r>
+            <a:endParaRPr lang="en-US" sz="1300" b="0" dirty="0">
+              <a:solidFill>
+                <a:srgbClr val="2D2D2D"/>
+              </a:solidFill>
+              <a:latin typeface="Aptos"/>
+            </a:endParaRPr>
+          </a:p>
+          <a:p>
+            <a:pPr algn="l"/>
+            <a:r>
+              <a:rPr sz="1300" b="0" dirty="0">
+                <a:solidFill>
+                  <a:srgbClr val="2D2D2D"/>
+                </a:solidFill>
+                <a:latin typeface="Aptos"/>
+              </a:rPr>
+              <a:t> emphasis on responsive and interactive applications.</a:t>
+            </a:r>
+          </a:p>
+        </p:txBody>
+      </p:sp>
+      <p:sp>
+        <p:nvSpPr>
+          <p:cNvPr id="22" name="Rounded Rectangle 21"/>
+          <p:cNvSpPr/>
+          <p:nvPr/>
+        </p:nvSpPr>
+        <p:spPr>
+          <a:xfrm>
+            <a:off x="731520" y="4160520"/>
+            <a:ext cx="10652760" cy="1234440"/>
+          </a:xfrm>
+          <a:prstGeom prst="roundRect">
+            <a:avLst>
+              <a:gd name="adj" fmla="val 8000"/>
+            </a:avLst>
+          </a:prstGeom>
+          <a:solidFill>
+            <a:srgbClr val="FFFFFF"/>
+          </a:solidFill>
+          <a:ln>
+            <a:solidFill>
+              <a:srgbClr val="D7DDE4"/>
+            </a:solidFill>
+          </a:ln>
+        </p:spPr>
+        <p:style>
+          <a:lnRef idx="1">
+            <a:schemeClr val="accent1"/>
+          </a:lnRef>
+          <a:fillRef idx="3">
+            <a:schemeClr val="accent1"/>
+          </a:fillRef>
+          <a:effectRef idx="2">
+            <a:schemeClr val="accent1"/>
+          </a:effectRef>
+          <a:fontRef idx="minor">
+            <a:schemeClr val="lt1"/>
+          </a:fontRef>
+        </p:style>
+        <p:txBody>
+          <a:bodyPr rtlCol="0" anchor="ctr"/>
+          <a:lstStyle/>
+          <a:p>
+            <a:pPr algn="ctr"/>
+            <a:endParaRPr/>
+          </a:p>
+        </p:txBody>
+      </p:sp>
+      <p:sp>
+        <p:nvSpPr>
+          <p:cNvPr id="23" name="Rectangle 22"/>
+          <p:cNvSpPr/>
+          <p:nvPr/>
+        </p:nvSpPr>
+        <p:spPr>
+          <a:xfrm>
+            <a:off x="731520" y="4160520"/>
+            <a:ext cx="54864" cy="1234440"/>
+          </a:xfrm>
+          <a:prstGeom prst="rect">
+            <a:avLst/>
+          </a:prstGeom>
+          <a:solidFill>
+            <a:srgbClr val="A6232D"/>
+          </a:solidFill>
+          <a:ln>
+            <a:solidFill>
+              <a:srgbClr val="A6232D"/>
+            </a:solidFill>
+          </a:ln>
+        </p:spPr>
+        <p:style>
+          <a:lnRef idx="1">
+            <a:schemeClr val="accent1"/>
+          </a:lnRef>
+          <a:fillRef idx="3">
+            <a:schemeClr val="accent1"/>
+          </a:fillRef>
+          <a:effectRef idx="2">
+            <a:schemeClr val="accent1"/>
+          </a:effectRef>
+          <a:fontRef idx="minor">
+            <a:schemeClr val="lt1"/>
+          </a:fontRef>
+        </p:style>
+        <p:txBody>
+          <a:bodyPr rtlCol="0" anchor="ctr"/>
+          <a:lstStyle/>
+          <a:p>
+            <a:pPr algn="ctr"/>
+            <a:endParaRPr/>
+          </a:p>
+        </p:txBody>
+      </p:sp>
+      <p:sp>
+        <p:nvSpPr>
+          <p:cNvPr id="24" name="TextBox 23"/>
+          <p:cNvSpPr txBox="1"/>
+          <p:nvPr/>
+        </p:nvSpPr>
+        <p:spPr>
+          <a:xfrm>
+            <a:off x="960120" y="4361688"/>
+            <a:ext cx="10241280" cy="292608"/>
+          </a:xfrm>
+          <a:prstGeom prst="rect">
+            <a:avLst/>
+          </a:prstGeom>
+          <a:noFill/>
+        </p:spPr>
+        <p:txBody>
+          <a:bodyPr wrap="none" anchor="t">
+            <a:spAutoFit/>
+          </a:bodyPr>
+          <a:lstStyle/>
+          <a:p>
+            <a:pPr algn="l"/>
+            <a:r>
+              <a:rPr sz="1500" b="1">
+                <a:solidFill>
+                  <a:srgbClr val="143057"/>
+                </a:solidFill>
+                <a:latin typeface="Aptos"/>
+              </a:rPr>
+              <a:t>Work Completed</a:t>
+            </a:r>
+          </a:p>
+        </p:txBody>
+      </p:sp>
+      <p:sp>
+        <p:nvSpPr>
+          <p:cNvPr id="25" name="TextBox 24"/>
+          <p:cNvSpPr txBox="1"/>
+          <p:nvPr/>
+        </p:nvSpPr>
+        <p:spPr>
+          <a:xfrm>
+            <a:off x="960120" y="4754880"/>
+            <a:ext cx="10241280" cy="457200"/>
+          </a:xfrm>
+          <a:prstGeom prst="rect">
+            <a:avLst/>
+          </a:prstGeom>
+          <a:noFill/>
+        </p:spPr>
+        <p:txBody>
+          <a:bodyPr wrap="none" anchor="t">
+            <a:spAutoFit/>
+          </a:bodyPr>
+          <a:lstStyle/>
+          <a:p>
+            <a:pPr algn="l"/>
+            <a:r>
+              <a:rPr sz="1300" b="0">
+                <a:solidFill>
+                  <a:srgbClr val="2D2D2D"/>
+                </a:solidFill>
+                <a:latin typeface="Aptos"/>
+              </a:rPr>
+              <a:t>Five web projects covering responsive design, JavaScript applications, games, portfolio development and weather data integration.</a:t>
+            </a:r>
+          </a:p>
+        </p:txBody>
+      </p:sp>
+      <p:sp>
+        <p:nvSpPr>
+          <p:cNvPr id="27" name="TextBox 26"/>
+          <p:cNvSpPr txBox="1"/>
+          <p:nvPr/>
+        </p:nvSpPr>
+        <p:spPr>
+          <a:xfrm>
+            <a:off x="11064240" y="6620256"/>
+            <a:ext cx="411480" cy="164592"/>
+          </a:xfrm>
+          <a:prstGeom prst="rect">
+            <a:avLst/>
+          </a:prstGeom>
+          <a:noFill/>
+        </p:spPr>
+        <p:txBody>
+          <a:bodyPr wrap="none" anchor="t">
+            <a:spAutoFit/>
+          </a:bodyPr>
+          <a:lstStyle/>
+          <a:p>
+            <a:pPr algn="r"/>
+            <a:r>
+              <a:rPr sz="850" b="1">
+                <a:solidFill>
+                  <a:srgbClr val="FFFFFF"/>
+                </a:solidFill>
+                <a:latin typeface="Aptos"/>
+              </a:rPr>
+              <a:t>3</a:t>
             </a:r>
           </a:p>
         </p:txBody>
@@ -8714,7 +8291,7 @@
 </p:sld>
 </file>
 
-<file path=ppt/slides/slide18.xml><?xml version="1.0" encoding="utf-8"?>
+<file path=ppt/slides/slide4.xml><?xml version="1.0" encoding="utf-8"?>
 <p:sld xmlns:a="http://schemas.openxmlformats.org/drawingml/2006/main" xmlns:r="http://schemas.openxmlformats.org/officeDocument/2006/relationships" xmlns:p="http://schemas.openxmlformats.org/presentationml/2006/main">
   <p:cSld>
     <p:bg>
@@ -8769,7 +8346,7 @@
                 </a:solidFill>
                 <a:latin typeface="Aptos Display"/>
               </a:rPr>
-              <a:t>INTERNSHIP OUTCOME</a:t>
+              <a:t>OBJECTIVES</a:t>
             </a:r>
           </a:p>
         </p:txBody>
@@ -8875,7 +8452,7 @@
         <p:spPr>
           <a:xfrm>
             <a:off x="914400" y="1417320"/>
-            <a:ext cx="10332720" cy="1234440"/>
+            <a:ext cx="10332720" cy="4526280"/>
           </a:xfrm>
           <a:prstGeom prst="roundRect">
             <a:avLst>
@@ -8883,7 +8460,7 @@
             </a:avLst>
           </a:prstGeom>
           <a:solidFill>
-            <a:srgbClr val="FFFFFF"/>
+            <a:srgbClr val="F2F5F8"/>
           </a:solidFill>
           <a:ln>
             <a:solidFill>
@@ -8916,60 +8493,133 @@
       </p:sp>
       <p:sp>
         <p:nvSpPr>
-          <p:cNvPr id="7" name="Rectangle 6"/>
-          <p:cNvSpPr/>
-          <p:nvPr/>
-        </p:nvSpPr>
-        <p:spPr>
-          <a:xfrm>
-            <a:off x="914400" y="1417320"/>
-            <a:ext cx="54864" cy="1234440"/>
-          </a:xfrm>
-          <a:prstGeom prst="rect">
-            <a:avLst/>
-          </a:prstGeom>
-          <a:solidFill>
-            <a:srgbClr val="A6232D"/>
-          </a:solidFill>
-          <a:ln>
-            <a:solidFill>
-              <a:srgbClr val="A6232D"/>
-            </a:solidFill>
-          </a:ln>
-        </p:spPr>
-        <p:style>
-          <a:lnRef idx="1">
-            <a:schemeClr val="accent1"/>
-          </a:lnRef>
-          <a:fillRef idx="3">
-            <a:schemeClr val="accent1"/>
-          </a:fillRef>
-          <a:effectRef idx="2">
-            <a:schemeClr val="accent1"/>
-          </a:effectRef>
-          <a:fontRef idx="minor">
-            <a:schemeClr val="lt1"/>
-          </a:fontRef>
-        </p:style>
-        <p:txBody>
-          <a:bodyPr rtlCol="0" anchor="ctr"/>
-          <a:lstStyle/>
-          <a:p>
-            <a:pPr algn="ctr"/>
-            <a:endParaRPr/>
-          </a:p>
-        </p:txBody>
-      </p:sp>
-      <p:sp>
-        <p:nvSpPr>
-          <p:cNvPr id="8" name="TextBox 7"/>
+          <p:cNvPr id="7" name="TextBox 6"/>
           <p:cNvSpPr txBox="1"/>
           <p:nvPr/>
         </p:nvSpPr>
         <p:spPr>
           <a:xfrm>
-            <a:off x="1143000" y="1618488"/>
-            <a:ext cx="9921240" cy="292608"/>
+            <a:off x="1325880" y="1783080"/>
+            <a:ext cx="9509760" cy="3749039"/>
+          </a:xfrm>
+          <a:prstGeom prst="rect">
+            <a:avLst/>
+          </a:prstGeom>
+          <a:noFill/>
+        </p:spPr>
+        <p:txBody>
+          <a:bodyPr wrap="square">
+            <a:spAutoFit/>
+          </a:bodyPr>
+          <a:lstStyle/>
+          <a:p>
+            <a:pPr>
+              <a:spcAft>
+                <a:spcPts val="1600"/>
+              </a:spcAft>
+              <a:defRPr sz="1800">
+                <a:solidFill>
+                  <a:srgbClr val="2D2D2D"/>
+                </a:solidFill>
+                <a:latin typeface="Aptos"/>
+              </a:defRPr>
+            </a:pPr>
+            <a:r>
+              <a:t>• Gain practical experience in front-end web development.</a:t>
+            </a:r>
+          </a:p>
+          <a:p>
+            <a:pPr>
+              <a:spcAft>
+                <a:spcPts val="1600"/>
+              </a:spcAft>
+              <a:defRPr sz="1800">
+                <a:solidFill>
+                  <a:srgbClr val="2D2D2D"/>
+                </a:solidFill>
+                <a:latin typeface="Aptos"/>
+              </a:defRPr>
+            </a:pPr>
+            <a:r>
+              <a:t>• Strengthen understanding of HTML, CSS and JavaScript.</a:t>
+            </a:r>
+          </a:p>
+          <a:p>
+            <a:pPr>
+              <a:spcAft>
+                <a:spcPts val="1600"/>
+              </a:spcAft>
+              <a:defRPr sz="1800">
+                <a:solidFill>
+                  <a:srgbClr val="2D2D2D"/>
+                </a:solidFill>
+                <a:latin typeface="Aptos"/>
+              </a:defRPr>
+            </a:pPr>
+            <a:r>
+              <a:t>• Build responsive and user-friendly web pages.</a:t>
+            </a:r>
+          </a:p>
+          <a:p>
+            <a:pPr>
+              <a:spcAft>
+                <a:spcPts val="1600"/>
+              </a:spcAft>
+              <a:defRPr sz="1800">
+                <a:solidFill>
+                  <a:srgbClr val="2D2D2D"/>
+                </a:solidFill>
+                <a:latin typeface="Aptos"/>
+              </a:defRPr>
+            </a:pPr>
+            <a:r>
+              <a:t>• Implement interactive functionality using JavaScript.</a:t>
+            </a:r>
+          </a:p>
+          <a:p>
+            <a:pPr>
+              <a:spcAft>
+                <a:spcPts val="1600"/>
+              </a:spcAft>
+              <a:defRPr sz="1800">
+                <a:solidFill>
+                  <a:srgbClr val="2D2D2D"/>
+                </a:solidFill>
+                <a:latin typeface="Aptos"/>
+              </a:defRPr>
+            </a:pPr>
+            <a:r>
+              <a:t>• Understand basic API integration through a weather application.</a:t>
+            </a:r>
+          </a:p>
+          <a:p>
+            <a:pPr>
+              <a:spcAft>
+                <a:spcPts val="1600"/>
+              </a:spcAft>
+              <a:defRPr sz="1800">
+                <a:solidFill>
+                  <a:srgbClr val="2D2D2D"/>
+                </a:solidFill>
+                <a:latin typeface="Aptos"/>
+              </a:defRPr>
+            </a:pPr>
+            <a:r>
+              <a:t>• Improve problem-solving, debugging and project-building skills.</a:t>
+            </a:r>
+          </a:p>
+        </p:txBody>
+      </p:sp>
+      <p:sp>
+        <p:nvSpPr>
+          <p:cNvPr id="9" name="TextBox 8"/>
+          <p:cNvSpPr txBox="1"/>
+          <p:nvPr/>
+        </p:nvSpPr>
+        <p:spPr>
+          <a:xfrm>
+            <a:off x="11064240" y="6620256"/>
+            <a:ext cx="411480" cy="164592"/>
           </a:xfrm>
           <a:prstGeom prst="rect">
             <a:avLst/>
@@ -8982,449 +8632,15 @@
           </a:bodyPr>
           <a:lstStyle/>
           <a:p>
-            <a:pPr algn="l"/>
-            <a:r>
-              <a:rPr sz="1500" b="1">
-                <a:solidFill>
-                  <a:srgbClr val="143057"/>
+            <a:pPr algn="r"/>
+            <a:r>
+              <a:rPr sz="850" b="1">
+                <a:solidFill>
+                  <a:srgbClr val="FFFFFF"/>
                 </a:solidFill>
                 <a:latin typeface="Aptos"/>
               </a:rPr>
-              <a:t>Technical Growth</a:t>
-            </a:r>
-          </a:p>
-        </p:txBody>
-      </p:sp>
-      <p:sp>
-        <p:nvSpPr>
-          <p:cNvPr id="9" name="TextBox 8"/>
-          <p:cNvSpPr txBox="1"/>
-          <p:nvPr/>
-        </p:nvSpPr>
-        <p:spPr>
-          <a:xfrm>
-            <a:off x="1143000" y="2011680"/>
-            <a:ext cx="10160730" cy="492443"/>
-          </a:xfrm>
-          <a:prstGeom prst="rect">
-            <a:avLst/>
-          </a:prstGeom>
-          <a:noFill/>
-        </p:spPr>
-        <p:txBody>
-          <a:bodyPr wrap="none" anchor="t">
-            <a:spAutoFit/>
-          </a:bodyPr>
-          <a:lstStyle/>
-          <a:p>
-            <a:pPr algn="l"/>
-            <a:r>
-              <a:rPr sz="1300" b="0" dirty="0">
-                <a:solidFill>
-                  <a:srgbClr val="2D2D2D"/>
-                </a:solidFill>
-                <a:latin typeface="Aptos"/>
-              </a:rPr>
-              <a:t>The internship strengthened practical understanding of front-end development and provided experience applying HTML, CSS and JavaScript </a:t>
-            </a:r>
-            <a:endParaRPr lang="en-US" sz="1300" b="0" dirty="0">
-              <a:solidFill>
-                <a:srgbClr val="2D2D2D"/>
-              </a:solidFill>
-              <a:latin typeface="Aptos"/>
-            </a:endParaRPr>
-          </a:p>
-          <a:p>
-            <a:pPr algn="l"/>
-            <a:r>
-              <a:rPr sz="1300" b="0" dirty="0">
-                <a:solidFill>
-                  <a:srgbClr val="2D2D2D"/>
-                </a:solidFill>
-                <a:latin typeface="Aptos"/>
-              </a:rPr>
-              <a:t>to project-based tasks.</a:t>
-            </a:r>
-          </a:p>
-        </p:txBody>
-      </p:sp>
-      <p:sp>
-        <p:nvSpPr>
-          <p:cNvPr id="10" name="Rounded Rectangle 9"/>
-          <p:cNvSpPr/>
-          <p:nvPr/>
-        </p:nvSpPr>
-        <p:spPr>
-          <a:xfrm>
-            <a:off x="914400" y="2834640"/>
-            <a:ext cx="10332720" cy="1234440"/>
-          </a:xfrm>
-          <a:prstGeom prst="roundRect">
-            <a:avLst>
-              <a:gd name="adj" fmla="val 8000"/>
-            </a:avLst>
-          </a:prstGeom>
-          <a:solidFill>
-            <a:srgbClr val="FFFFFF"/>
-          </a:solidFill>
-          <a:ln>
-            <a:solidFill>
-              <a:srgbClr val="D7DDE4"/>
-            </a:solidFill>
-          </a:ln>
-        </p:spPr>
-        <p:style>
-          <a:lnRef idx="1">
-            <a:schemeClr val="accent1"/>
-          </a:lnRef>
-          <a:fillRef idx="3">
-            <a:schemeClr val="accent1"/>
-          </a:fillRef>
-          <a:effectRef idx="2">
-            <a:schemeClr val="accent1"/>
-          </a:effectRef>
-          <a:fontRef idx="minor">
-            <a:schemeClr val="lt1"/>
-          </a:fontRef>
-        </p:style>
-        <p:txBody>
-          <a:bodyPr rtlCol="0" anchor="ctr"/>
-          <a:lstStyle/>
-          <a:p>
-            <a:pPr algn="ctr"/>
-            <a:endParaRPr/>
-          </a:p>
-        </p:txBody>
-      </p:sp>
-      <p:sp>
-        <p:nvSpPr>
-          <p:cNvPr id="11" name="Rectangle 10"/>
-          <p:cNvSpPr/>
-          <p:nvPr/>
-        </p:nvSpPr>
-        <p:spPr>
-          <a:xfrm>
-            <a:off x="914400" y="2834640"/>
-            <a:ext cx="54864" cy="1234440"/>
-          </a:xfrm>
-          <a:prstGeom prst="rect">
-            <a:avLst/>
-          </a:prstGeom>
-          <a:solidFill>
-            <a:srgbClr val="A6232D"/>
-          </a:solidFill>
-          <a:ln>
-            <a:solidFill>
-              <a:srgbClr val="A6232D"/>
-            </a:solidFill>
-          </a:ln>
-        </p:spPr>
-        <p:style>
-          <a:lnRef idx="1">
-            <a:schemeClr val="accent1"/>
-          </a:lnRef>
-          <a:fillRef idx="3">
-            <a:schemeClr val="accent1"/>
-          </a:fillRef>
-          <a:effectRef idx="2">
-            <a:schemeClr val="accent1"/>
-          </a:effectRef>
-          <a:fontRef idx="minor">
-            <a:schemeClr val="lt1"/>
-          </a:fontRef>
-        </p:style>
-        <p:txBody>
-          <a:bodyPr rtlCol="0" anchor="ctr"/>
-          <a:lstStyle/>
-          <a:p>
-            <a:pPr algn="ctr"/>
-            <a:endParaRPr/>
-          </a:p>
-        </p:txBody>
-      </p:sp>
-      <p:sp>
-        <p:nvSpPr>
-          <p:cNvPr id="12" name="TextBox 11"/>
-          <p:cNvSpPr txBox="1"/>
-          <p:nvPr/>
-        </p:nvSpPr>
-        <p:spPr>
-          <a:xfrm>
-            <a:off x="1143000" y="3035808"/>
-            <a:ext cx="9921240" cy="292608"/>
-          </a:xfrm>
-          <a:prstGeom prst="rect">
-            <a:avLst/>
-          </a:prstGeom>
-          <a:noFill/>
-        </p:spPr>
-        <p:txBody>
-          <a:bodyPr wrap="none" anchor="t">
-            <a:spAutoFit/>
-          </a:bodyPr>
-          <a:lstStyle/>
-          <a:p>
-            <a:pPr algn="l"/>
-            <a:r>
-              <a:rPr sz="1500" b="1">
-                <a:solidFill>
-                  <a:srgbClr val="143057"/>
-                </a:solidFill>
-                <a:latin typeface="Aptos"/>
-              </a:rPr>
-              <a:t>Professional Growth</a:t>
-            </a:r>
-          </a:p>
-        </p:txBody>
-      </p:sp>
-      <p:sp>
-        <p:nvSpPr>
-          <p:cNvPr id="13" name="TextBox 12"/>
-          <p:cNvSpPr txBox="1"/>
-          <p:nvPr/>
-        </p:nvSpPr>
-        <p:spPr>
-          <a:xfrm>
-            <a:off x="1143000" y="3429000"/>
-            <a:ext cx="9921240" cy="457200"/>
-          </a:xfrm>
-          <a:prstGeom prst="rect">
-            <a:avLst/>
-          </a:prstGeom>
-          <a:noFill/>
-        </p:spPr>
-        <p:txBody>
-          <a:bodyPr wrap="none" anchor="t">
-            <a:spAutoFit/>
-          </a:bodyPr>
-          <a:lstStyle/>
-          <a:p>
-            <a:pPr algn="l"/>
-            <a:r>
-              <a:rPr sz="1300" b="0">
-                <a:solidFill>
-                  <a:srgbClr val="2D2D2D"/>
-                </a:solidFill>
-                <a:latin typeface="Aptos"/>
-              </a:rPr>
-              <a:t>Working through multiple projects improved the ability to plan, build, test and refine web applications.</a:t>
-            </a:r>
-          </a:p>
-        </p:txBody>
-      </p:sp>
-      <p:sp>
-        <p:nvSpPr>
-          <p:cNvPr id="14" name="Rounded Rectangle 13"/>
-          <p:cNvSpPr/>
-          <p:nvPr/>
-        </p:nvSpPr>
-        <p:spPr>
-          <a:xfrm>
-            <a:off x="914400" y="4251960"/>
-            <a:ext cx="10332720" cy="1234440"/>
-          </a:xfrm>
-          <a:prstGeom prst="roundRect">
-            <a:avLst>
-              <a:gd name="adj" fmla="val 8000"/>
-            </a:avLst>
-          </a:prstGeom>
-          <a:solidFill>
-            <a:srgbClr val="FFFFFF"/>
-          </a:solidFill>
-          <a:ln>
-            <a:solidFill>
-              <a:srgbClr val="D7DDE4"/>
-            </a:solidFill>
-          </a:ln>
-        </p:spPr>
-        <p:style>
-          <a:lnRef idx="1">
-            <a:schemeClr val="accent1"/>
-          </a:lnRef>
-          <a:fillRef idx="3">
-            <a:schemeClr val="accent1"/>
-          </a:fillRef>
-          <a:effectRef idx="2">
-            <a:schemeClr val="accent1"/>
-          </a:effectRef>
-          <a:fontRef idx="minor">
-            <a:schemeClr val="lt1"/>
-          </a:fontRef>
-        </p:style>
-        <p:txBody>
-          <a:bodyPr rtlCol="0" anchor="ctr"/>
-          <a:lstStyle/>
-          <a:p>
-            <a:pPr algn="ctr"/>
-            <a:endParaRPr/>
-          </a:p>
-        </p:txBody>
-      </p:sp>
-      <p:sp>
-        <p:nvSpPr>
-          <p:cNvPr id="15" name="Rectangle 14"/>
-          <p:cNvSpPr/>
-          <p:nvPr/>
-        </p:nvSpPr>
-        <p:spPr>
-          <a:xfrm>
-            <a:off x="914400" y="4251960"/>
-            <a:ext cx="54864" cy="1234440"/>
-          </a:xfrm>
-          <a:prstGeom prst="rect">
-            <a:avLst/>
-          </a:prstGeom>
-          <a:solidFill>
-            <a:srgbClr val="A6232D"/>
-          </a:solidFill>
-          <a:ln>
-            <a:solidFill>
-              <a:srgbClr val="A6232D"/>
-            </a:solidFill>
-          </a:ln>
-        </p:spPr>
-        <p:style>
-          <a:lnRef idx="1">
-            <a:schemeClr val="accent1"/>
-          </a:lnRef>
-          <a:fillRef idx="3">
-            <a:schemeClr val="accent1"/>
-          </a:fillRef>
-          <a:effectRef idx="2">
-            <a:schemeClr val="accent1"/>
-          </a:effectRef>
-          <a:fontRef idx="minor">
-            <a:schemeClr val="lt1"/>
-          </a:fontRef>
-        </p:style>
-        <p:txBody>
-          <a:bodyPr rtlCol="0" anchor="ctr"/>
-          <a:lstStyle/>
-          <a:p>
-            <a:pPr algn="ctr"/>
-            <a:endParaRPr/>
-          </a:p>
-        </p:txBody>
-      </p:sp>
-      <p:sp>
-        <p:nvSpPr>
-          <p:cNvPr id="16" name="TextBox 15"/>
-          <p:cNvSpPr txBox="1"/>
-          <p:nvPr/>
-        </p:nvSpPr>
-        <p:spPr>
-          <a:xfrm>
-            <a:off x="1143000" y="4453128"/>
-            <a:ext cx="9921240" cy="292608"/>
-          </a:xfrm>
-          <a:prstGeom prst="rect">
-            <a:avLst/>
-          </a:prstGeom>
-          <a:noFill/>
-        </p:spPr>
-        <p:txBody>
-          <a:bodyPr wrap="none" anchor="t">
-            <a:spAutoFit/>
-          </a:bodyPr>
-          <a:lstStyle/>
-          <a:p>
-            <a:pPr algn="l"/>
-            <a:r>
-              <a:rPr sz="1500" b="1">
-                <a:solidFill>
-                  <a:srgbClr val="143057"/>
-                </a:solidFill>
-                <a:latin typeface="Aptos"/>
-              </a:rPr>
-              <a:t>Overall Outcome</a:t>
-            </a:r>
-          </a:p>
-        </p:txBody>
-      </p:sp>
-      <p:sp>
-        <p:nvSpPr>
-          <p:cNvPr id="17" name="TextBox 16"/>
-          <p:cNvSpPr txBox="1"/>
-          <p:nvPr/>
-        </p:nvSpPr>
-        <p:spPr>
-          <a:xfrm>
-            <a:off x="1143000" y="4846320"/>
-            <a:ext cx="9824228" cy="492443"/>
-          </a:xfrm>
-          <a:prstGeom prst="rect">
-            <a:avLst/>
-          </a:prstGeom>
-          <a:noFill/>
-        </p:spPr>
-        <p:txBody>
-          <a:bodyPr wrap="none" anchor="t">
-            <a:spAutoFit/>
-          </a:bodyPr>
-          <a:lstStyle/>
-          <a:p>
-            <a:pPr algn="l"/>
-            <a:r>
-              <a:rPr sz="1300" b="0" dirty="0">
-                <a:solidFill>
-                  <a:srgbClr val="2D2D2D"/>
-                </a:solidFill>
-                <a:latin typeface="Aptos"/>
-              </a:rPr>
-              <a:t>The internship provided valuable hands-on exposure to web development and strengthened the foundation for further learning in Cloud </a:t>
-            </a:r>
-            <a:endParaRPr lang="en-US" sz="1300" b="0" dirty="0">
-              <a:solidFill>
-                <a:srgbClr val="2D2D2D"/>
-              </a:solidFill>
-              <a:latin typeface="Aptos"/>
-            </a:endParaRPr>
-          </a:p>
-          <a:p>
-            <a:pPr algn="l"/>
-            <a:r>
-              <a:rPr sz="1300" b="0" dirty="0">
-                <a:solidFill>
-                  <a:srgbClr val="2D2D2D"/>
-                </a:solidFill>
-                <a:latin typeface="Aptos"/>
-              </a:rPr>
-              <a:t>Computing, DevOps and modern technologies.</a:t>
-            </a:r>
-          </a:p>
-        </p:txBody>
-      </p:sp>
-      <p:sp>
-        <p:nvSpPr>
-          <p:cNvPr id="19" name="TextBox 18"/>
-          <p:cNvSpPr txBox="1"/>
-          <p:nvPr/>
-        </p:nvSpPr>
-        <p:spPr>
-          <a:xfrm>
-            <a:off x="11064240" y="6620256"/>
-            <a:ext cx="411480" cy="164592"/>
-          </a:xfrm>
-          <a:prstGeom prst="rect">
-            <a:avLst/>
-          </a:prstGeom>
-          <a:noFill/>
-        </p:spPr>
-        <p:txBody>
-          <a:bodyPr wrap="none" anchor="t">
-            <a:spAutoFit/>
-          </a:bodyPr>
-          <a:lstStyle/>
-          <a:p>
-            <a:pPr algn="r"/>
-            <a:r>
-              <a:rPr sz="850" b="1">
-                <a:solidFill>
-                  <a:srgbClr val="FFFFFF"/>
-                </a:solidFill>
-                <a:latin typeface="Aptos"/>
-              </a:rPr>
-              <a:t>13</a:t>
+              <a:t>4</a:t>
             </a:r>
           </a:p>
         </p:txBody>
@@ -9437,7 +8653,7 @@
 </p:sld>
 </file>
 
-<file path=ppt/slides/slide19.xml><?xml version="1.0" encoding="utf-8"?>
+<file path=ppt/slides/slide5.xml><?xml version="1.0" encoding="utf-8"?>
 <p:sld xmlns:a="http://schemas.openxmlformats.org/drawingml/2006/main" xmlns:r="http://schemas.openxmlformats.org/officeDocument/2006/relationships" xmlns:p="http://schemas.openxmlformats.org/presentationml/2006/main">
   <p:cSld>
     <p:bg>
@@ -9492,7 +8708,7 @@
                 </a:solidFill>
                 <a:latin typeface="Aptos Display"/>
               </a:rPr>
-              <a:t>INTERNSHIP COMPLETION CERTIFICATE</a:t>
+              <a:t>TECHNOLOGIES &amp; TOOLS USED</a:t>
             </a:r>
           </a:p>
         </p:txBody>
@@ -9597,8 +8813,8 @@
         </p:nvSpPr>
         <p:spPr>
           <a:xfrm>
-            <a:off x="1874519" y="1325880"/>
-            <a:ext cx="8458200" cy="4892040"/>
+            <a:off x="685800" y="1417320"/>
+            <a:ext cx="2971800" cy="1143000"/>
           </a:xfrm>
           <a:prstGeom prst="roundRect">
             <a:avLst>
@@ -9639,14 +8855,60 @@
       </p:sp>
       <p:sp>
         <p:nvSpPr>
-          <p:cNvPr id="9" name="TextBox 8"/>
+          <p:cNvPr id="7" name="Rectangle 6"/>
+          <p:cNvSpPr/>
+          <p:nvPr/>
+        </p:nvSpPr>
+        <p:spPr>
+          <a:xfrm>
+            <a:off x="685800" y="1417320"/>
+            <a:ext cx="54864" cy="1143000"/>
+          </a:xfrm>
+          <a:prstGeom prst="rect">
+            <a:avLst/>
+          </a:prstGeom>
+          <a:solidFill>
+            <a:srgbClr val="A6232D"/>
+          </a:solidFill>
+          <a:ln>
+            <a:solidFill>
+              <a:srgbClr val="A6232D"/>
+            </a:solidFill>
+          </a:ln>
+        </p:spPr>
+        <p:style>
+          <a:lnRef idx="1">
+            <a:schemeClr val="accent1"/>
+          </a:lnRef>
+          <a:fillRef idx="3">
+            <a:schemeClr val="accent1"/>
+          </a:fillRef>
+          <a:effectRef idx="2">
+            <a:schemeClr val="accent1"/>
+          </a:effectRef>
+          <a:fontRef idx="minor">
+            <a:schemeClr val="lt1"/>
+          </a:fontRef>
+        </p:style>
+        <p:txBody>
+          <a:bodyPr rtlCol="0" anchor="ctr"/>
+          <a:lstStyle/>
+          <a:p>
+            <a:pPr algn="ctr"/>
+            <a:endParaRPr/>
+          </a:p>
+        </p:txBody>
+      </p:sp>
+      <p:sp>
+        <p:nvSpPr>
+          <p:cNvPr id="8" name="TextBox 7"/>
           <p:cNvSpPr txBox="1"/>
           <p:nvPr/>
         </p:nvSpPr>
         <p:spPr>
           <a:xfrm>
-            <a:off x="11064240" y="6620256"/>
-            <a:ext cx="411480" cy="164592"/>
+            <a:off x="914400" y="1618488"/>
+            <a:ext cx="2560320" cy="292608"/>
           </a:xfrm>
           <a:prstGeom prst="rect">
             <a:avLst/>
@@ -9659,76 +8921,963 @@
           </a:bodyPr>
           <a:lstStyle/>
           <a:p>
-            <a:pPr algn="r"/>
-            <a:r>
-              <a:rPr sz="850" b="1">
-                <a:solidFill>
-                  <a:srgbClr val="FFFFFF"/>
+            <a:pPr algn="l"/>
+            <a:r>
+              <a:rPr sz="1450" b="1">
+                <a:solidFill>
+                  <a:srgbClr val="143057"/>
                 </a:solidFill>
                 <a:latin typeface="Aptos"/>
               </a:rPr>
-              <a:t>14</a:t>
-            </a:r>
-          </a:p>
-        </p:txBody>
-      </p:sp>
-      <p:pic>
-        <p:nvPicPr>
-          <p:cNvPr id="11" name="Picture 10">
-            <a:extLst>
-              <a:ext uri="{FF2B5EF4-FFF2-40B4-BE49-F238E27FC236}">
-                <a16:creationId xmlns:a16="http://schemas.microsoft.com/office/drawing/2014/main" id="{F77C852D-40DC-B33B-23EF-815F7ED5AD20}"/>
-              </a:ext>
-            </a:extLst>
-          </p:cNvPr>
-          <p:cNvPicPr>
-            <a:picLocks noChangeAspect="1"/>
-          </p:cNvPicPr>
-          <p:nvPr/>
-        </p:nvPicPr>
-        <p:blipFill>
-          <a:blip r:embed="rId2"/>
-          <a:stretch>
-            <a:fillRect/>
-          </a:stretch>
-        </p:blipFill>
-        <p:spPr>
-          <a:xfrm>
-            <a:off x="1874519" y="1298448"/>
-            <a:ext cx="8496000" cy="4897333"/>
+              <a:t>HTML5</a:t>
+            </a:r>
+          </a:p>
+        </p:txBody>
+      </p:sp>
+      <p:sp>
+        <p:nvSpPr>
+          <p:cNvPr id="9" name="TextBox 8"/>
+          <p:cNvSpPr txBox="1"/>
+          <p:nvPr/>
+        </p:nvSpPr>
+        <p:spPr>
+          <a:xfrm>
+            <a:off x="914400" y="2011680"/>
+            <a:ext cx="2597186" cy="437043"/>
+          </a:xfrm>
+          <a:prstGeom prst="rect">
+            <a:avLst/>
+          </a:prstGeom>
+          <a:noFill/>
+        </p:spPr>
+        <p:txBody>
+          <a:bodyPr wrap="none" anchor="t">
+            <a:spAutoFit/>
+          </a:bodyPr>
+          <a:lstStyle/>
+          <a:p>
+            <a:pPr algn="l"/>
+            <a:r>
+              <a:rPr sz="1120" b="0" dirty="0">
+                <a:solidFill>
+                  <a:srgbClr val="2D2D2D"/>
+                </a:solidFill>
+                <a:latin typeface="Aptos"/>
+              </a:rPr>
+              <a:t>Structure of web pages and application</a:t>
+            </a:r>
+            <a:endParaRPr lang="en-US" sz="1120" b="0" dirty="0">
+              <a:solidFill>
+                <a:srgbClr val="2D2D2D"/>
+              </a:solidFill>
+              <a:latin typeface="Aptos"/>
+            </a:endParaRPr>
+          </a:p>
+          <a:p>
+            <a:pPr algn="l"/>
+            <a:r>
+              <a:rPr sz="1120" b="0" dirty="0">
+                <a:solidFill>
+                  <a:srgbClr val="2D2D2D"/>
+                </a:solidFill>
+                <a:latin typeface="Aptos"/>
+              </a:rPr>
+              <a:t> elements.</a:t>
+            </a:r>
+          </a:p>
+        </p:txBody>
+      </p:sp>
+      <p:sp>
+        <p:nvSpPr>
+          <p:cNvPr id="10" name="Rounded Rectangle 9"/>
+          <p:cNvSpPr/>
+          <p:nvPr/>
+        </p:nvSpPr>
+        <p:spPr>
+          <a:xfrm>
+            <a:off x="4160520" y="1417320"/>
+            <a:ext cx="2971800" cy="1143000"/>
           </a:xfrm>
           <a:prstGeom prst="roundRect">
             <a:avLst>
-              <a:gd name="adj" fmla="val 11111"/>
+              <a:gd name="adj" fmla="val 8000"/>
             </a:avLst>
           </a:prstGeom>
-          <a:ln w="190500" cap="rnd">
+          <a:solidFill>
+            <a:srgbClr val="FFFFFF"/>
+          </a:solidFill>
+          <a:ln>
             <a:solidFill>
-              <a:srgbClr val="C8C6BD"/>
+              <a:srgbClr val="D7DDE4"/>
             </a:solidFill>
-            <a:prstDash val="solid"/>
           </a:ln>
-          <a:effectLst>
-            <a:outerShdw blurRad="101600" dist="50800" dir="7200000" algn="tl" rotWithShape="0">
-              <a:srgbClr val="000000">
-                <a:alpha val="45000"/>
-              </a:srgbClr>
-            </a:outerShdw>
-          </a:effectLst>
-          <a:scene3d>
-            <a:camera prst="perspectiveFront" fov="5400000"/>
-            <a:lightRig rig="threePt" dir="t">
-              <a:rot lat="0" lon="0" rev="19200000"/>
-            </a:lightRig>
-          </a:scene3d>
-          <a:sp3d extrusionH="25400">
-            <a:bevelT w="304800" h="152400" prst="hardEdge"/>
-            <a:extrusionClr>
-              <a:srgbClr val="FFFFFF"/>
-            </a:extrusionClr>
-          </a:sp3d>
-        </p:spPr>
-      </p:pic>
+        </p:spPr>
+        <p:style>
+          <a:lnRef idx="1">
+            <a:schemeClr val="accent1"/>
+          </a:lnRef>
+          <a:fillRef idx="3">
+            <a:schemeClr val="accent1"/>
+          </a:fillRef>
+          <a:effectRef idx="2">
+            <a:schemeClr val="accent1"/>
+          </a:effectRef>
+          <a:fontRef idx="minor">
+            <a:schemeClr val="lt1"/>
+          </a:fontRef>
+        </p:style>
+        <p:txBody>
+          <a:bodyPr rtlCol="0" anchor="ctr"/>
+          <a:lstStyle/>
+          <a:p>
+            <a:pPr algn="ctr"/>
+            <a:endParaRPr/>
+          </a:p>
+        </p:txBody>
+      </p:sp>
+      <p:sp>
+        <p:nvSpPr>
+          <p:cNvPr id="11" name="Rectangle 10"/>
+          <p:cNvSpPr/>
+          <p:nvPr/>
+        </p:nvSpPr>
+        <p:spPr>
+          <a:xfrm>
+            <a:off x="4160520" y="1417320"/>
+            <a:ext cx="54864" cy="1143000"/>
+          </a:xfrm>
+          <a:prstGeom prst="rect">
+            <a:avLst/>
+          </a:prstGeom>
+          <a:solidFill>
+            <a:srgbClr val="A6232D"/>
+          </a:solidFill>
+          <a:ln>
+            <a:solidFill>
+              <a:srgbClr val="A6232D"/>
+            </a:solidFill>
+          </a:ln>
+        </p:spPr>
+        <p:style>
+          <a:lnRef idx="1">
+            <a:schemeClr val="accent1"/>
+          </a:lnRef>
+          <a:fillRef idx="3">
+            <a:schemeClr val="accent1"/>
+          </a:fillRef>
+          <a:effectRef idx="2">
+            <a:schemeClr val="accent1"/>
+          </a:effectRef>
+          <a:fontRef idx="minor">
+            <a:schemeClr val="lt1"/>
+          </a:fontRef>
+        </p:style>
+        <p:txBody>
+          <a:bodyPr rtlCol="0" anchor="ctr"/>
+          <a:lstStyle/>
+          <a:p>
+            <a:pPr algn="ctr"/>
+            <a:endParaRPr/>
+          </a:p>
+        </p:txBody>
+      </p:sp>
+      <p:sp>
+        <p:nvSpPr>
+          <p:cNvPr id="12" name="TextBox 11"/>
+          <p:cNvSpPr txBox="1"/>
+          <p:nvPr/>
+        </p:nvSpPr>
+        <p:spPr>
+          <a:xfrm>
+            <a:off x="4389120" y="1618488"/>
+            <a:ext cx="2560320" cy="292608"/>
+          </a:xfrm>
+          <a:prstGeom prst="rect">
+            <a:avLst/>
+          </a:prstGeom>
+          <a:noFill/>
+        </p:spPr>
+        <p:txBody>
+          <a:bodyPr wrap="none" anchor="t">
+            <a:spAutoFit/>
+          </a:bodyPr>
+          <a:lstStyle/>
+          <a:p>
+            <a:pPr algn="l"/>
+            <a:r>
+              <a:rPr sz="1450" b="1">
+                <a:solidFill>
+                  <a:srgbClr val="143057"/>
+                </a:solidFill>
+                <a:latin typeface="Aptos"/>
+              </a:rPr>
+              <a:t>CSS3</a:t>
+            </a:r>
+          </a:p>
+        </p:txBody>
+      </p:sp>
+      <p:sp>
+        <p:nvSpPr>
+          <p:cNvPr id="13" name="TextBox 12"/>
+          <p:cNvSpPr txBox="1"/>
+          <p:nvPr/>
+        </p:nvSpPr>
+        <p:spPr>
+          <a:xfrm>
+            <a:off x="4389120" y="2011680"/>
+            <a:ext cx="2560320" cy="365760"/>
+          </a:xfrm>
+          <a:prstGeom prst="rect">
+            <a:avLst/>
+          </a:prstGeom>
+          <a:noFill/>
+        </p:spPr>
+        <p:txBody>
+          <a:bodyPr wrap="none" anchor="t">
+            <a:spAutoFit/>
+          </a:bodyPr>
+          <a:lstStyle/>
+          <a:p>
+            <a:pPr algn="l"/>
+            <a:r>
+              <a:rPr sz="1120" b="0">
+                <a:solidFill>
+                  <a:srgbClr val="2D2D2D"/>
+                </a:solidFill>
+                <a:latin typeface="Aptos"/>
+              </a:rPr>
+              <a:t>Styling, layout and responsive design.</a:t>
+            </a:r>
+          </a:p>
+        </p:txBody>
+      </p:sp>
+      <p:sp>
+        <p:nvSpPr>
+          <p:cNvPr id="14" name="Rounded Rectangle 13"/>
+          <p:cNvSpPr/>
+          <p:nvPr/>
+        </p:nvSpPr>
+        <p:spPr>
+          <a:xfrm>
+            <a:off x="7635240" y="1417320"/>
+            <a:ext cx="2971800" cy="1143000"/>
+          </a:xfrm>
+          <a:prstGeom prst="roundRect">
+            <a:avLst>
+              <a:gd name="adj" fmla="val 8000"/>
+            </a:avLst>
+          </a:prstGeom>
+          <a:solidFill>
+            <a:srgbClr val="FFFFFF"/>
+          </a:solidFill>
+          <a:ln>
+            <a:solidFill>
+              <a:srgbClr val="D7DDE4"/>
+            </a:solidFill>
+          </a:ln>
+        </p:spPr>
+        <p:style>
+          <a:lnRef idx="1">
+            <a:schemeClr val="accent1"/>
+          </a:lnRef>
+          <a:fillRef idx="3">
+            <a:schemeClr val="accent1"/>
+          </a:fillRef>
+          <a:effectRef idx="2">
+            <a:schemeClr val="accent1"/>
+          </a:effectRef>
+          <a:fontRef idx="minor">
+            <a:schemeClr val="lt1"/>
+          </a:fontRef>
+        </p:style>
+        <p:txBody>
+          <a:bodyPr rtlCol="0" anchor="ctr"/>
+          <a:lstStyle/>
+          <a:p>
+            <a:pPr algn="ctr"/>
+            <a:endParaRPr/>
+          </a:p>
+        </p:txBody>
+      </p:sp>
+      <p:sp>
+        <p:nvSpPr>
+          <p:cNvPr id="15" name="Rectangle 14"/>
+          <p:cNvSpPr/>
+          <p:nvPr/>
+        </p:nvSpPr>
+        <p:spPr>
+          <a:xfrm>
+            <a:off x="7635240" y="1417320"/>
+            <a:ext cx="54864" cy="1143000"/>
+          </a:xfrm>
+          <a:prstGeom prst="rect">
+            <a:avLst/>
+          </a:prstGeom>
+          <a:solidFill>
+            <a:srgbClr val="A6232D"/>
+          </a:solidFill>
+          <a:ln>
+            <a:solidFill>
+              <a:srgbClr val="A6232D"/>
+            </a:solidFill>
+          </a:ln>
+        </p:spPr>
+        <p:style>
+          <a:lnRef idx="1">
+            <a:schemeClr val="accent1"/>
+          </a:lnRef>
+          <a:fillRef idx="3">
+            <a:schemeClr val="accent1"/>
+          </a:fillRef>
+          <a:effectRef idx="2">
+            <a:schemeClr val="accent1"/>
+          </a:effectRef>
+          <a:fontRef idx="minor">
+            <a:schemeClr val="lt1"/>
+          </a:fontRef>
+        </p:style>
+        <p:txBody>
+          <a:bodyPr rtlCol="0" anchor="ctr"/>
+          <a:lstStyle/>
+          <a:p>
+            <a:pPr algn="ctr"/>
+            <a:endParaRPr/>
+          </a:p>
+        </p:txBody>
+      </p:sp>
+      <p:sp>
+        <p:nvSpPr>
+          <p:cNvPr id="16" name="TextBox 15"/>
+          <p:cNvSpPr txBox="1"/>
+          <p:nvPr/>
+        </p:nvSpPr>
+        <p:spPr>
+          <a:xfrm>
+            <a:off x="7863840" y="1618488"/>
+            <a:ext cx="2560320" cy="292608"/>
+          </a:xfrm>
+          <a:prstGeom prst="rect">
+            <a:avLst/>
+          </a:prstGeom>
+          <a:noFill/>
+        </p:spPr>
+        <p:txBody>
+          <a:bodyPr wrap="none" anchor="t">
+            <a:spAutoFit/>
+          </a:bodyPr>
+          <a:lstStyle/>
+          <a:p>
+            <a:pPr algn="l"/>
+            <a:r>
+              <a:rPr sz="1450" b="1">
+                <a:solidFill>
+                  <a:srgbClr val="143057"/>
+                </a:solidFill>
+                <a:latin typeface="Aptos"/>
+              </a:rPr>
+              <a:t>JavaScript</a:t>
+            </a:r>
+          </a:p>
+        </p:txBody>
+      </p:sp>
+      <p:sp>
+        <p:nvSpPr>
+          <p:cNvPr id="17" name="TextBox 16"/>
+          <p:cNvSpPr txBox="1"/>
+          <p:nvPr/>
+        </p:nvSpPr>
+        <p:spPr>
+          <a:xfrm>
+            <a:off x="7863840" y="2011680"/>
+            <a:ext cx="2560320" cy="365760"/>
+          </a:xfrm>
+          <a:prstGeom prst="rect">
+            <a:avLst/>
+          </a:prstGeom>
+          <a:noFill/>
+        </p:spPr>
+        <p:txBody>
+          <a:bodyPr wrap="none" anchor="t">
+            <a:spAutoFit/>
+          </a:bodyPr>
+          <a:lstStyle/>
+          <a:p>
+            <a:pPr algn="l"/>
+            <a:r>
+              <a:rPr sz="1120" b="0">
+                <a:solidFill>
+                  <a:srgbClr val="2D2D2D"/>
+                </a:solidFill>
+                <a:latin typeface="Aptos"/>
+              </a:rPr>
+              <a:t>Interactivity, logic and dynamic behaviour.</a:t>
+            </a:r>
+          </a:p>
+        </p:txBody>
+      </p:sp>
+      <p:sp>
+        <p:nvSpPr>
+          <p:cNvPr id="18" name="Rounded Rectangle 17"/>
+          <p:cNvSpPr/>
+          <p:nvPr/>
+        </p:nvSpPr>
+        <p:spPr>
+          <a:xfrm>
+            <a:off x="685800" y="2880360"/>
+            <a:ext cx="2971800" cy="1143000"/>
+          </a:xfrm>
+          <a:prstGeom prst="roundRect">
+            <a:avLst>
+              <a:gd name="adj" fmla="val 8000"/>
+            </a:avLst>
+          </a:prstGeom>
+          <a:solidFill>
+            <a:srgbClr val="FFFFFF"/>
+          </a:solidFill>
+          <a:ln>
+            <a:solidFill>
+              <a:srgbClr val="D7DDE4"/>
+            </a:solidFill>
+          </a:ln>
+        </p:spPr>
+        <p:style>
+          <a:lnRef idx="1">
+            <a:schemeClr val="accent1"/>
+          </a:lnRef>
+          <a:fillRef idx="3">
+            <a:schemeClr val="accent1"/>
+          </a:fillRef>
+          <a:effectRef idx="2">
+            <a:schemeClr val="accent1"/>
+          </a:effectRef>
+          <a:fontRef idx="minor">
+            <a:schemeClr val="lt1"/>
+          </a:fontRef>
+        </p:style>
+        <p:txBody>
+          <a:bodyPr rtlCol="0" anchor="ctr"/>
+          <a:lstStyle/>
+          <a:p>
+            <a:pPr algn="ctr"/>
+            <a:endParaRPr/>
+          </a:p>
+        </p:txBody>
+      </p:sp>
+      <p:sp>
+        <p:nvSpPr>
+          <p:cNvPr id="19" name="Rectangle 18"/>
+          <p:cNvSpPr/>
+          <p:nvPr/>
+        </p:nvSpPr>
+        <p:spPr>
+          <a:xfrm>
+            <a:off x="685800" y="2880360"/>
+            <a:ext cx="54864" cy="1143000"/>
+          </a:xfrm>
+          <a:prstGeom prst="rect">
+            <a:avLst/>
+          </a:prstGeom>
+          <a:solidFill>
+            <a:srgbClr val="A6232D"/>
+          </a:solidFill>
+          <a:ln>
+            <a:solidFill>
+              <a:srgbClr val="A6232D"/>
+            </a:solidFill>
+          </a:ln>
+        </p:spPr>
+        <p:style>
+          <a:lnRef idx="1">
+            <a:schemeClr val="accent1"/>
+          </a:lnRef>
+          <a:fillRef idx="3">
+            <a:schemeClr val="accent1"/>
+          </a:fillRef>
+          <a:effectRef idx="2">
+            <a:schemeClr val="accent1"/>
+          </a:effectRef>
+          <a:fontRef idx="minor">
+            <a:schemeClr val="lt1"/>
+          </a:fontRef>
+        </p:style>
+        <p:txBody>
+          <a:bodyPr rtlCol="0" anchor="ctr"/>
+          <a:lstStyle/>
+          <a:p>
+            <a:pPr algn="ctr"/>
+            <a:endParaRPr/>
+          </a:p>
+        </p:txBody>
+      </p:sp>
+      <p:sp>
+        <p:nvSpPr>
+          <p:cNvPr id="20" name="TextBox 19"/>
+          <p:cNvSpPr txBox="1"/>
+          <p:nvPr/>
+        </p:nvSpPr>
+        <p:spPr>
+          <a:xfrm>
+            <a:off x="914400" y="3081528"/>
+            <a:ext cx="2560320" cy="292608"/>
+          </a:xfrm>
+          <a:prstGeom prst="rect">
+            <a:avLst/>
+          </a:prstGeom>
+          <a:noFill/>
+        </p:spPr>
+        <p:txBody>
+          <a:bodyPr wrap="none" anchor="t">
+            <a:spAutoFit/>
+          </a:bodyPr>
+          <a:lstStyle/>
+          <a:p>
+            <a:pPr algn="l"/>
+            <a:r>
+              <a:rPr sz="1450" b="1">
+                <a:solidFill>
+                  <a:srgbClr val="143057"/>
+                </a:solidFill>
+                <a:latin typeface="Aptos"/>
+              </a:rPr>
+              <a:t>VS Code</a:t>
+            </a:r>
+          </a:p>
+        </p:txBody>
+      </p:sp>
+      <p:sp>
+        <p:nvSpPr>
+          <p:cNvPr id="21" name="TextBox 20"/>
+          <p:cNvSpPr txBox="1"/>
+          <p:nvPr/>
+        </p:nvSpPr>
+        <p:spPr>
+          <a:xfrm>
+            <a:off x="914400" y="3474720"/>
+            <a:ext cx="2560320" cy="365760"/>
+          </a:xfrm>
+          <a:prstGeom prst="rect">
+            <a:avLst/>
+          </a:prstGeom>
+          <a:noFill/>
+        </p:spPr>
+        <p:txBody>
+          <a:bodyPr wrap="none" anchor="t">
+            <a:spAutoFit/>
+          </a:bodyPr>
+          <a:lstStyle/>
+          <a:p>
+            <a:pPr algn="l"/>
+            <a:r>
+              <a:rPr sz="1120" b="0">
+                <a:solidFill>
+                  <a:srgbClr val="2D2D2D"/>
+                </a:solidFill>
+                <a:latin typeface="Aptos"/>
+              </a:rPr>
+              <a:t>Primary code editor used for development.</a:t>
+            </a:r>
+          </a:p>
+        </p:txBody>
+      </p:sp>
+      <p:sp>
+        <p:nvSpPr>
+          <p:cNvPr id="22" name="Rounded Rectangle 21"/>
+          <p:cNvSpPr/>
+          <p:nvPr/>
+        </p:nvSpPr>
+        <p:spPr>
+          <a:xfrm>
+            <a:off x="4160520" y="2880360"/>
+            <a:ext cx="2971800" cy="1143000"/>
+          </a:xfrm>
+          <a:prstGeom prst="roundRect">
+            <a:avLst>
+              <a:gd name="adj" fmla="val 8000"/>
+            </a:avLst>
+          </a:prstGeom>
+          <a:solidFill>
+            <a:srgbClr val="FFFFFF"/>
+          </a:solidFill>
+          <a:ln>
+            <a:solidFill>
+              <a:srgbClr val="D7DDE4"/>
+            </a:solidFill>
+          </a:ln>
+        </p:spPr>
+        <p:style>
+          <a:lnRef idx="1">
+            <a:schemeClr val="accent1"/>
+          </a:lnRef>
+          <a:fillRef idx="3">
+            <a:schemeClr val="accent1"/>
+          </a:fillRef>
+          <a:effectRef idx="2">
+            <a:schemeClr val="accent1"/>
+          </a:effectRef>
+          <a:fontRef idx="minor">
+            <a:schemeClr val="lt1"/>
+          </a:fontRef>
+        </p:style>
+        <p:txBody>
+          <a:bodyPr rtlCol="0" anchor="ctr"/>
+          <a:lstStyle/>
+          <a:p>
+            <a:pPr algn="ctr"/>
+            <a:endParaRPr/>
+          </a:p>
+        </p:txBody>
+      </p:sp>
+      <p:sp>
+        <p:nvSpPr>
+          <p:cNvPr id="23" name="Rectangle 22"/>
+          <p:cNvSpPr/>
+          <p:nvPr/>
+        </p:nvSpPr>
+        <p:spPr>
+          <a:xfrm>
+            <a:off x="4160520" y="2880360"/>
+            <a:ext cx="54864" cy="1143000"/>
+          </a:xfrm>
+          <a:prstGeom prst="rect">
+            <a:avLst/>
+          </a:prstGeom>
+          <a:solidFill>
+            <a:srgbClr val="A6232D"/>
+          </a:solidFill>
+          <a:ln>
+            <a:solidFill>
+              <a:srgbClr val="A6232D"/>
+            </a:solidFill>
+          </a:ln>
+        </p:spPr>
+        <p:style>
+          <a:lnRef idx="1">
+            <a:schemeClr val="accent1"/>
+          </a:lnRef>
+          <a:fillRef idx="3">
+            <a:schemeClr val="accent1"/>
+          </a:fillRef>
+          <a:effectRef idx="2">
+            <a:schemeClr val="accent1"/>
+          </a:effectRef>
+          <a:fontRef idx="minor">
+            <a:schemeClr val="lt1"/>
+          </a:fontRef>
+        </p:style>
+        <p:txBody>
+          <a:bodyPr rtlCol="0" anchor="ctr"/>
+          <a:lstStyle/>
+          <a:p>
+            <a:pPr algn="ctr"/>
+            <a:endParaRPr/>
+          </a:p>
+        </p:txBody>
+      </p:sp>
+      <p:sp>
+        <p:nvSpPr>
+          <p:cNvPr id="24" name="TextBox 23"/>
+          <p:cNvSpPr txBox="1"/>
+          <p:nvPr/>
+        </p:nvSpPr>
+        <p:spPr>
+          <a:xfrm>
+            <a:off x="4389120" y="3081528"/>
+            <a:ext cx="2560320" cy="292608"/>
+          </a:xfrm>
+          <a:prstGeom prst="rect">
+            <a:avLst/>
+          </a:prstGeom>
+          <a:noFill/>
+        </p:spPr>
+        <p:txBody>
+          <a:bodyPr wrap="none" anchor="t">
+            <a:spAutoFit/>
+          </a:bodyPr>
+          <a:lstStyle/>
+          <a:p>
+            <a:pPr algn="l"/>
+            <a:r>
+              <a:rPr sz="1450" b="1">
+                <a:solidFill>
+                  <a:srgbClr val="143057"/>
+                </a:solidFill>
+                <a:latin typeface="Aptos"/>
+              </a:rPr>
+              <a:t>GitHub</a:t>
+            </a:r>
+          </a:p>
+        </p:txBody>
+      </p:sp>
+      <p:sp>
+        <p:nvSpPr>
+          <p:cNvPr id="25" name="TextBox 24"/>
+          <p:cNvSpPr txBox="1"/>
+          <p:nvPr/>
+        </p:nvSpPr>
+        <p:spPr>
+          <a:xfrm>
+            <a:off x="4389120" y="3474720"/>
+            <a:ext cx="2736647" cy="437043"/>
+          </a:xfrm>
+          <a:prstGeom prst="rect">
+            <a:avLst/>
+          </a:prstGeom>
+          <a:noFill/>
+        </p:spPr>
+        <p:txBody>
+          <a:bodyPr wrap="none" anchor="t">
+            <a:spAutoFit/>
+          </a:bodyPr>
+          <a:lstStyle/>
+          <a:p>
+            <a:pPr algn="l"/>
+            <a:r>
+              <a:rPr sz="1120" b="0" dirty="0">
+                <a:solidFill>
+                  <a:srgbClr val="2D2D2D"/>
+                </a:solidFill>
+                <a:latin typeface="Aptos"/>
+              </a:rPr>
+              <a:t>Repository storage and versioned project </a:t>
+            </a:r>
+            <a:endParaRPr lang="en-US" sz="1120" b="0" dirty="0">
+              <a:solidFill>
+                <a:srgbClr val="2D2D2D"/>
+              </a:solidFill>
+              <a:latin typeface="Aptos"/>
+            </a:endParaRPr>
+          </a:p>
+          <a:p>
+            <a:pPr algn="l"/>
+            <a:r>
+              <a:rPr sz="1120" b="0" dirty="0">
+                <a:solidFill>
+                  <a:srgbClr val="2D2D2D"/>
+                </a:solidFill>
+                <a:latin typeface="Aptos"/>
+              </a:rPr>
+              <a:t>management.</a:t>
+            </a:r>
+          </a:p>
+        </p:txBody>
+      </p:sp>
+      <p:sp>
+        <p:nvSpPr>
+          <p:cNvPr id="26" name="Rounded Rectangle 25"/>
+          <p:cNvSpPr/>
+          <p:nvPr/>
+        </p:nvSpPr>
+        <p:spPr>
+          <a:xfrm>
+            <a:off x="7635240" y="2880360"/>
+            <a:ext cx="2971800" cy="1143000"/>
+          </a:xfrm>
+          <a:prstGeom prst="roundRect">
+            <a:avLst>
+              <a:gd name="adj" fmla="val 8000"/>
+            </a:avLst>
+          </a:prstGeom>
+          <a:solidFill>
+            <a:srgbClr val="FFFFFF"/>
+          </a:solidFill>
+          <a:ln>
+            <a:solidFill>
+              <a:srgbClr val="D7DDE4"/>
+            </a:solidFill>
+          </a:ln>
+        </p:spPr>
+        <p:style>
+          <a:lnRef idx="1">
+            <a:schemeClr val="accent1"/>
+          </a:lnRef>
+          <a:fillRef idx="3">
+            <a:schemeClr val="accent1"/>
+          </a:fillRef>
+          <a:effectRef idx="2">
+            <a:schemeClr val="accent1"/>
+          </a:effectRef>
+          <a:fontRef idx="minor">
+            <a:schemeClr val="lt1"/>
+          </a:fontRef>
+        </p:style>
+        <p:txBody>
+          <a:bodyPr rtlCol="0" anchor="ctr"/>
+          <a:lstStyle/>
+          <a:p>
+            <a:pPr algn="ctr"/>
+            <a:endParaRPr/>
+          </a:p>
+        </p:txBody>
+      </p:sp>
+      <p:sp>
+        <p:nvSpPr>
+          <p:cNvPr id="27" name="Rectangle 26"/>
+          <p:cNvSpPr/>
+          <p:nvPr/>
+        </p:nvSpPr>
+        <p:spPr>
+          <a:xfrm>
+            <a:off x="7635240" y="2880360"/>
+            <a:ext cx="54864" cy="1143000"/>
+          </a:xfrm>
+          <a:prstGeom prst="rect">
+            <a:avLst/>
+          </a:prstGeom>
+          <a:solidFill>
+            <a:srgbClr val="A6232D"/>
+          </a:solidFill>
+          <a:ln>
+            <a:solidFill>
+              <a:srgbClr val="A6232D"/>
+            </a:solidFill>
+          </a:ln>
+        </p:spPr>
+        <p:style>
+          <a:lnRef idx="1">
+            <a:schemeClr val="accent1"/>
+          </a:lnRef>
+          <a:fillRef idx="3">
+            <a:schemeClr val="accent1"/>
+          </a:fillRef>
+          <a:effectRef idx="2">
+            <a:schemeClr val="accent1"/>
+          </a:effectRef>
+          <a:fontRef idx="minor">
+            <a:schemeClr val="lt1"/>
+          </a:fontRef>
+        </p:style>
+        <p:txBody>
+          <a:bodyPr rtlCol="0" anchor="ctr"/>
+          <a:lstStyle/>
+          <a:p>
+            <a:pPr algn="ctr"/>
+            <a:endParaRPr/>
+          </a:p>
+        </p:txBody>
+      </p:sp>
+      <p:sp>
+        <p:nvSpPr>
+          <p:cNvPr id="28" name="TextBox 27"/>
+          <p:cNvSpPr txBox="1"/>
+          <p:nvPr/>
+        </p:nvSpPr>
+        <p:spPr>
+          <a:xfrm>
+            <a:off x="7863840" y="3081528"/>
+            <a:ext cx="2560320" cy="292608"/>
+          </a:xfrm>
+          <a:prstGeom prst="rect">
+            <a:avLst/>
+          </a:prstGeom>
+          <a:noFill/>
+        </p:spPr>
+        <p:txBody>
+          <a:bodyPr wrap="none" anchor="t">
+            <a:spAutoFit/>
+          </a:bodyPr>
+          <a:lstStyle/>
+          <a:p>
+            <a:pPr algn="l"/>
+            <a:r>
+              <a:rPr sz="1450" b="1">
+                <a:solidFill>
+                  <a:srgbClr val="143057"/>
+                </a:solidFill>
+                <a:latin typeface="Aptos"/>
+              </a:rPr>
+              <a:t>Weather API</a:t>
+            </a:r>
+          </a:p>
+        </p:txBody>
+      </p:sp>
+      <p:sp>
+        <p:nvSpPr>
+          <p:cNvPr id="29" name="TextBox 28"/>
+          <p:cNvSpPr txBox="1"/>
+          <p:nvPr/>
+        </p:nvSpPr>
+        <p:spPr>
+          <a:xfrm>
+            <a:off x="7863840" y="3474720"/>
+            <a:ext cx="2419252" cy="437043"/>
+          </a:xfrm>
+          <a:prstGeom prst="rect">
+            <a:avLst/>
+          </a:prstGeom>
+          <a:noFill/>
+        </p:spPr>
+        <p:txBody>
+          <a:bodyPr wrap="none" anchor="t">
+            <a:spAutoFit/>
+          </a:bodyPr>
+          <a:lstStyle/>
+          <a:p>
+            <a:pPr algn="l"/>
+            <a:r>
+              <a:rPr sz="1120" b="0" dirty="0">
+                <a:solidFill>
+                  <a:srgbClr val="2D2D2D"/>
+                </a:solidFill>
+                <a:latin typeface="Aptos"/>
+              </a:rPr>
+              <a:t>Fetches weather information for the </a:t>
+            </a:r>
+            <a:endParaRPr lang="en-US" sz="1120" b="0" dirty="0">
+              <a:solidFill>
+                <a:srgbClr val="2D2D2D"/>
+              </a:solidFill>
+              <a:latin typeface="Aptos"/>
+            </a:endParaRPr>
+          </a:p>
+          <a:p>
+            <a:pPr algn="l"/>
+            <a:r>
+              <a:rPr sz="1120" b="0" dirty="0">
+                <a:solidFill>
+                  <a:srgbClr val="2D2D2D"/>
+                </a:solidFill>
+                <a:latin typeface="Aptos"/>
+              </a:rPr>
+              <a:t>weather application.</a:t>
+            </a:r>
+          </a:p>
+        </p:txBody>
+      </p:sp>
+      <p:sp>
+        <p:nvSpPr>
+          <p:cNvPr id="39" name="TextBox 38"/>
+          <p:cNvSpPr txBox="1"/>
+          <p:nvPr/>
+        </p:nvSpPr>
+        <p:spPr>
+          <a:xfrm>
+            <a:off x="11064240" y="6620256"/>
+            <a:ext cx="411480" cy="164592"/>
+          </a:xfrm>
+          <a:prstGeom prst="rect">
+            <a:avLst/>
+          </a:prstGeom>
+          <a:noFill/>
+        </p:spPr>
+        <p:txBody>
+          <a:bodyPr wrap="none" anchor="t">
+            <a:spAutoFit/>
+          </a:bodyPr>
+          <a:lstStyle/>
+          <a:p>
+            <a:pPr algn="r"/>
+            <a:r>
+              <a:rPr sz="850" b="1">
+                <a:solidFill>
+                  <a:srgbClr val="FFFFFF"/>
+                </a:solidFill>
+                <a:latin typeface="Aptos"/>
+              </a:rPr>
+              <a:t>5</a:t>
+            </a:r>
+          </a:p>
+        </p:txBody>
+      </p:sp>
     </p:spTree>
   </p:cSld>
   <p:clrMapOvr>
@@ -9737,37 +9886,7 @@
 </p:sld>
 </file>
 
-<file path=ppt/slides/slide2.xml><?xml version="1.0" encoding="utf-8"?>
-<p:sld xmlns:a="http://schemas.openxmlformats.org/drawingml/2006/main" xmlns:r="http://schemas.openxmlformats.org/officeDocument/2006/relationships" xmlns:p="http://schemas.openxmlformats.org/presentationml/2006/main">
-  <p:cSld>
-    <p:spTree>
-      <p:nvGrpSpPr>
-        <p:cNvPr id="1" name=""/>
-        <p:cNvGrpSpPr/>
-        <p:nvPr/>
-      </p:nvGrpSpPr>
-      <p:grpSpPr>
-        <a:xfrm>
-          <a:off x="0" y="0"/>
-          <a:ext cx="0" cy="0"/>
-          <a:chOff x="0" y="0"/>
-          <a:chExt cx="0" cy="0"/>
-        </a:xfrm>
-      </p:grpSpPr>
-    </p:spTree>
-    <p:extLst>
-      <p:ext uri="{BB962C8B-B14F-4D97-AF65-F5344CB8AC3E}">
-        <p14:creationId xmlns:p14="http://schemas.microsoft.com/office/powerpoint/2010/main" val="1179286342"/>
-      </p:ext>
-    </p:extLst>
-  </p:cSld>
-  <p:clrMapOvr>
-    <a:masterClrMapping/>
-  </p:clrMapOvr>
-</p:sld>
-</file>
-
-<file path=ppt/slides/slide20.xml><?xml version="1.0" encoding="utf-8"?>
+<file path=ppt/slides/slide6.xml><?xml version="1.0" encoding="utf-8"?>
 <p:sld xmlns:a="http://schemas.openxmlformats.org/drawingml/2006/main" xmlns:r="http://schemas.openxmlformats.org/officeDocument/2006/relationships" xmlns:p="http://schemas.openxmlformats.org/presentationml/2006/main">
   <p:cSld>
     <p:bg>
@@ -9794,14 +9913,95 @@
       </p:grpSpPr>
       <p:sp>
         <p:nvSpPr>
-          <p:cNvPr id="2" name="Rectangle 1"/>
+          <p:cNvPr id="2" name="TextBox 1"/>
+          <p:cNvSpPr txBox="1"/>
+          <p:nvPr/>
+        </p:nvSpPr>
+        <p:spPr>
+          <a:xfrm>
+            <a:off x="685800" y="475488"/>
+            <a:ext cx="9966960" cy="438912"/>
+          </a:xfrm>
+          <a:prstGeom prst="rect">
+            <a:avLst/>
+          </a:prstGeom>
+          <a:noFill/>
+        </p:spPr>
+        <p:txBody>
+          <a:bodyPr wrap="none" anchor="t">
+            <a:spAutoFit/>
+          </a:bodyPr>
+          <a:lstStyle/>
+          <a:p>
+            <a:pPr algn="l"/>
+            <a:r>
+              <a:rPr sz="2300" b="1">
+                <a:solidFill>
+                  <a:srgbClr val="143057"/>
+                </a:solidFill>
+                <a:latin typeface="Aptos Display"/>
+              </a:rPr>
+              <a:t>PROJECTS COMPLETED</a:t>
+            </a:r>
+          </a:p>
+        </p:txBody>
+      </p:sp>
+      <p:sp>
+        <p:nvSpPr>
+          <p:cNvPr id="3" name="Rectangle 2"/>
           <p:cNvSpPr/>
           <p:nvPr/>
         </p:nvSpPr>
         <p:spPr>
           <a:xfrm>
-            <a:off x="0" y="0"/>
-            <a:ext cx="12191695" cy="128016"/>
+            <a:off x="685800" y="1024128"/>
+            <a:ext cx="685800" cy="50292"/>
+          </a:xfrm>
+          <a:prstGeom prst="rect">
+            <a:avLst/>
+          </a:prstGeom>
+          <a:solidFill>
+            <a:srgbClr val="A6232D"/>
+          </a:solidFill>
+          <a:ln>
+            <a:solidFill>
+              <a:srgbClr val="A6232D"/>
+            </a:solidFill>
+          </a:ln>
+        </p:spPr>
+        <p:style>
+          <a:lnRef idx="1">
+            <a:schemeClr val="accent1"/>
+          </a:lnRef>
+          <a:fillRef idx="3">
+            <a:schemeClr val="accent1"/>
+          </a:fillRef>
+          <a:effectRef idx="2">
+            <a:schemeClr val="accent1"/>
+          </a:effectRef>
+          <a:fontRef idx="minor">
+            <a:schemeClr val="lt1"/>
+          </a:fontRef>
+        </p:style>
+        <p:txBody>
+          <a:bodyPr rtlCol="0" anchor="ctr"/>
+          <a:lstStyle/>
+          <a:p>
+            <a:pPr algn="ctr"/>
+            <a:endParaRPr/>
+          </a:p>
+        </p:txBody>
+      </p:sp>
+      <p:sp>
+        <p:nvSpPr>
+          <p:cNvPr id="5" name="Rectangle 4"/>
+          <p:cNvSpPr/>
+          <p:nvPr/>
+        </p:nvSpPr>
+        <p:spPr>
+          <a:xfrm>
+            <a:off x="0" y="6601968"/>
+            <a:ext cx="12191695" cy="256032"/>
           </a:xfrm>
           <a:prstGeom prst="rect">
             <a:avLst/>
@@ -9840,24 +10040,61 @@
       </p:sp>
       <p:sp>
         <p:nvSpPr>
-          <p:cNvPr id="3" name="Rectangle 2"/>
+          <p:cNvPr id="6" name="TextBox 5"/>
+          <p:cNvSpPr txBox="1"/>
+          <p:nvPr/>
+        </p:nvSpPr>
+        <p:spPr>
+          <a:xfrm>
+            <a:off x="914400" y="1417320"/>
+            <a:ext cx="502920" cy="384048"/>
+          </a:xfrm>
+          <a:prstGeom prst="rect">
+            <a:avLst/>
+          </a:prstGeom>
+          <a:noFill/>
+        </p:spPr>
+        <p:txBody>
+          <a:bodyPr wrap="none" anchor="t">
+            <a:spAutoFit/>
+          </a:bodyPr>
+          <a:lstStyle/>
+          <a:p>
+            <a:pPr algn="ctr"/>
+            <a:r>
+              <a:rPr sz="1300" b="1">
+                <a:solidFill>
+                  <a:srgbClr val="A6232D"/>
+                </a:solidFill>
+                <a:latin typeface="Aptos"/>
+              </a:rPr>
+              <a:t>01</a:t>
+            </a:r>
+          </a:p>
+        </p:txBody>
+      </p:sp>
+      <p:sp>
+        <p:nvSpPr>
+          <p:cNvPr id="7" name="Rounded Rectangle 6"/>
           <p:cNvSpPr/>
           <p:nvPr/>
         </p:nvSpPr>
         <p:spPr>
           <a:xfrm>
-            <a:off x="0" y="128016"/>
-            <a:ext cx="12191695" cy="41148"/>
-          </a:xfrm>
-          <a:prstGeom prst="rect">
-            <a:avLst/>
+            <a:off x="1554480" y="1435608"/>
+            <a:ext cx="9144000" cy="685800"/>
+          </a:xfrm>
+          <a:prstGeom prst="roundRect">
+            <a:avLst>
+              <a:gd name="adj" fmla="val 8000"/>
+            </a:avLst>
           </a:prstGeom>
           <a:solidFill>
-            <a:srgbClr val="A6232D"/>
+            <a:srgbClr val="FFFFFF"/>
           </a:solidFill>
           <a:ln>
             <a:solidFill>
-              <a:srgbClr val="A6232D"/>
+              <a:srgbClr val="D7DDE4"/>
             </a:solidFill>
           </a:ln>
         </p:spPr>
@@ -9886,14 +10123,14 @@
       </p:sp>
       <p:sp>
         <p:nvSpPr>
-          <p:cNvPr id="4" name="TextBox 3"/>
+          <p:cNvPr id="8" name="TextBox 7"/>
           <p:cNvSpPr txBox="1"/>
           <p:nvPr/>
         </p:nvSpPr>
         <p:spPr>
           <a:xfrm>
-            <a:off x="1828800" y="1965960"/>
-            <a:ext cx="8531352" cy="640080"/>
+            <a:off x="1874519" y="1591056"/>
+            <a:ext cx="8138160" cy="292608"/>
           </a:xfrm>
           <a:prstGeom prst="rect">
             <a:avLst/>
@@ -9906,39 +10143,76 @@
           </a:bodyPr>
           <a:lstStyle/>
           <a:p>
+            <a:pPr algn="l"/>
+            <a:r>
+              <a:rPr sz="1700" b="1">
+                <a:solidFill>
+                  <a:srgbClr val="143057"/>
+                </a:solidFill>
+                <a:latin typeface="Aptos"/>
+              </a:rPr>
+              <a:t>Responsive Landing Page</a:t>
+            </a:r>
+          </a:p>
+        </p:txBody>
+      </p:sp>
+      <p:sp>
+        <p:nvSpPr>
+          <p:cNvPr id="9" name="TextBox 8"/>
+          <p:cNvSpPr txBox="1"/>
+          <p:nvPr/>
+        </p:nvSpPr>
+        <p:spPr>
+          <a:xfrm>
+            <a:off x="914400" y="2331720"/>
+            <a:ext cx="502920" cy="384048"/>
+          </a:xfrm>
+          <a:prstGeom prst="rect">
+            <a:avLst/>
+          </a:prstGeom>
+          <a:noFill/>
+        </p:spPr>
+        <p:txBody>
+          <a:bodyPr wrap="none" anchor="t">
+            <a:spAutoFit/>
+          </a:bodyPr>
+          <a:lstStyle/>
+          <a:p>
             <a:pPr algn="ctr"/>
             <a:r>
-              <a:rPr sz="3200" b="1">
-                <a:solidFill>
-                  <a:srgbClr val="143057"/>
-                </a:solidFill>
-                <a:latin typeface="Aptos Display"/>
+              <a:rPr sz="1300" b="1">
+                <a:solidFill>
+                  <a:srgbClr val="A6232D"/>
+                </a:solidFill>
+                <a:latin typeface="Aptos"/>
               </a:rPr>
-              <a:t>THANK YOU</a:t>
-            </a:r>
-          </a:p>
-        </p:txBody>
-      </p:sp>
-      <p:sp>
-        <p:nvSpPr>
-          <p:cNvPr id="5" name="Rectangle 4"/>
+              <a:t>02</a:t>
+            </a:r>
+          </a:p>
+        </p:txBody>
+      </p:sp>
+      <p:sp>
+        <p:nvSpPr>
+          <p:cNvPr id="10" name="Rounded Rectangle 9"/>
           <p:cNvSpPr/>
           <p:nvPr/>
         </p:nvSpPr>
         <p:spPr>
           <a:xfrm>
-            <a:off x="4983480" y="2788920"/>
-            <a:ext cx="2240280" cy="50292"/>
-          </a:xfrm>
-          <a:prstGeom prst="rect">
-            <a:avLst/>
+            <a:off x="1554480" y="2350008"/>
+            <a:ext cx="9144000" cy="685800"/>
+          </a:xfrm>
+          <a:prstGeom prst="roundRect">
+            <a:avLst>
+              <a:gd name="adj" fmla="val 8000"/>
+            </a:avLst>
           </a:prstGeom>
           <a:solidFill>
-            <a:srgbClr val="A6232D"/>
+            <a:srgbClr val="FFFFFF"/>
           </a:solidFill>
           <a:ln>
             <a:solidFill>
-              <a:srgbClr val="A6232D"/>
+              <a:srgbClr val="D7DDE4"/>
             </a:solidFill>
           </a:ln>
         </p:spPr>
@@ -9967,14 +10241,14 @@
       </p:sp>
       <p:sp>
         <p:nvSpPr>
-          <p:cNvPr id="6" name="TextBox 5"/>
+          <p:cNvPr id="11" name="TextBox 10"/>
           <p:cNvSpPr txBox="1"/>
           <p:nvPr/>
         </p:nvSpPr>
         <p:spPr>
           <a:xfrm>
-            <a:off x="5585425" y="3154680"/>
-            <a:ext cx="1018099" cy="369332"/>
+            <a:off x="1874519" y="2505456"/>
+            <a:ext cx="8138160" cy="292608"/>
           </a:xfrm>
           <a:prstGeom prst="rect">
             <a:avLst/>
@@ -9987,35 +10261,29 @@
           </a:bodyPr>
           <a:lstStyle/>
           <a:p>
-            <a:pPr algn="ctr"/>
-            <a:r>
-              <a:rPr lang="en-US" b="1" dirty="0">
-                <a:solidFill>
-                  <a:srgbClr val="2D2D2D"/>
+            <a:pPr algn="l"/>
+            <a:r>
+              <a:rPr sz="1700" b="1">
+                <a:solidFill>
+                  <a:srgbClr val="143057"/>
                 </a:solidFill>
                 <a:latin typeface="Aptos"/>
               </a:rPr>
-              <a:t>Ravi Raj</a:t>
-            </a:r>
-            <a:endParaRPr sz="1800" b="1" dirty="0">
-              <a:solidFill>
-                <a:srgbClr val="2D2D2D"/>
-              </a:solidFill>
-              <a:latin typeface="Aptos"/>
-            </a:endParaRPr>
-          </a:p>
-        </p:txBody>
-      </p:sp>
-      <p:sp>
-        <p:nvSpPr>
-          <p:cNvPr id="7" name="TextBox 6"/>
+              <a:t>Stopwatch Web Application</a:t>
+            </a:r>
+          </a:p>
+        </p:txBody>
+      </p:sp>
+      <p:sp>
+        <p:nvSpPr>
+          <p:cNvPr id="12" name="TextBox 11"/>
           <p:cNvSpPr txBox="1"/>
           <p:nvPr/>
         </p:nvSpPr>
         <p:spPr>
           <a:xfrm>
-            <a:off x="4717912" y="3657600"/>
-            <a:ext cx="2753126" cy="307777"/>
+            <a:off x="914400" y="3246120"/>
+            <a:ext cx="502920" cy="384048"/>
           </a:xfrm>
           <a:prstGeom prst="rect">
             <a:avLst/>
@@ -10030,60 +10298,75 @@
           <a:p>
             <a:pPr algn="ctr"/>
             <a:r>
-              <a:rPr sz="1400" b="0" dirty="0" err="1">
-                <a:solidFill>
-                  <a:srgbClr val="5F6973"/>
+              <a:rPr sz="1300" b="1">
+                <a:solidFill>
+                  <a:srgbClr val="A6232D"/>
                 </a:solidFill>
                 <a:latin typeface="Aptos"/>
               </a:rPr>
-              <a:t>B.Tech</a:t>
-            </a:r>
-            <a:r>
-              <a:rPr sz="1400" b="0" dirty="0">
-                <a:solidFill>
-                  <a:srgbClr val="5F6973"/>
-                </a:solidFill>
-                <a:latin typeface="Aptos"/>
-              </a:rPr>
-              <a:t> CSE | </a:t>
-            </a:r>
-            <a:r>
-              <a:rPr lang="en-US" sz="1400" dirty="0">
-                <a:solidFill>
-                  <a:srgbClr val="5F6973"/>
-                </a:solidFill>
-                <a:latin typeface="Aptos"/>
-              </a:rPr>
-              <a:t>AI/ML </a:t>
-            </a:r>
-            <a:r>
-              <a:rPr sz="1400" b="0" dirty="0" err="1">
-                <a:solidFill>
-                  <a:srgbClr val="5F6973"/>
-                </a:solidFill>
-                <a:latin typeface="Aptos"/>
-              </a:rPr>
-              <a:t>Specialisation</a:t>
-            </a:r>
-            <a:endParaRPr sz="1400" b="0" dirty="0">
-              <a:solidFill>
-                <a:srgbClr val="5F6973"/>
-              </a:solidFill>
-              <a:latin typeface="Aptos"/>
-            </a:endParaRPr>
-          </a:p>
-        </p:txBody>
-      </p:sp>
-      <p:sp>
-        <p:nvSpPr>
-          <p:cNvPr id="8" name="TextBox 7"/>
+              <a:t>03</a:t>
+            </a:r>
+          </a:p>
+        </p:txBody>
+      </p:sp>
+      <p:sp>
+        <p:nvSpPr>
+          <p:cNvPr id="13" name="Rounded Rectangle 12"/>
+          <p:cNvSpPr/>
+          <p:nvPr/>
+        </p:nvSpPr>
+        <p:spPr>
+          <a:xfrm>
+            <a:off x="1554480" y="3264408"/>
+            <a:ext cx="9144000" cy="685800"/>
+          </a:xfrm>
+          <a:prstGeom prst="roundRect">
+            <a:avLst>
+              <a:gd name="adj" fmla="val 8000"/>
+            </a:avLst>
+          </a:prstGeom>
+          <a:solidFill>
+            <a:srgbClr val="FFFFFF"/>
+          </a:solidFill>
+          <a:ln>
+            <a:solidFill>
+              <a:srgbClr val="D7DDE4"/>
+            </a:solidFill>
+          </a:ln>
+        </p:spPr>
+        <p:style>
+          <a:lnRef idx="1">
+            <a:schemeClr val="accent1"/>
+          </a:lnRef>
+          <a:fillRef idx="3">
+            <a:schemeClr val="accent1"/>
+          </a:fillRef>
+          <a:effectRef idx="2">
+            <a:schemeClr val="accent1"/>
+          </a:effectRef>
+          <a:fontRef idx="minor">
+            <a:schemeClr val="lt1"/>
+          </a:fontRef>
+        </p:style>
+        <p:txBody>
+          <a:bodyPr rtlCol="0" anchor="ctr"/>
+          <a:lstStyle/>
+          <a:p>
+            <a:pPr algn="ctr"/>
+            <a:endParaRPr/>
+          </a:p>
+        </p:txBody>
+      </p:sp>
+      <p:sp>
+        <p:nvSpPr>
+          <p:cNvPr id="14" name="TextBox 13"/>
           <p:cNvSpPr txBox="1"/>
           <p:nvPr/>
         </p:nvSpPr>
         <p:spPr>
           <a:xfrm>
-            <a:off x="1828800" y="4096512"/>
-            <a:ext cx="8531352" cy="320040"/>
+            <a:off x="1874519" y="3419856"/>
+            <a:ext cx="8138160" cy="292608"/>
           </a:xfrm>
           <a:prstGeom prst="rect">
             <a:avLst/>
@@ -10096,29 +10379,29 @@
           </a:bodyPr>
           <a:lstStyle/>
           <a:p>
-            <a:pPr algn="ctr"/>
-            <a:r>
-              <a:rPr sz="1300" b="0">
-                <a:solidFill>
-                  <a:srgbClr val="5F6973"/>
+            <a:pPr algn="l"/>
+            <a:r>
+              <a:rPr sz="1700" b="1">
+                <a:solidFill>
+                  <a:srgbClr val="143057"/>
                 </a:solidFill>
                 <a:latin typeface="Aptos"/>
               </a:rPr>
-              <a:t>Web Development Internship | Prodigy InfoTech</a:t>
-            </a:r>
-          </a:p>
-        </p:txBody>
-      </p:sp>
-      <p:sp>
-        <p:nvSpPr>
-          <p:cNvPr id="9" name="TextBox 8"/>
+              <a:t>Tic-Tac-Toe Web Application</a:t>
+            </a:r>
+          </a:p>
+        </p:txBody>
+      </p:sp>
+      <p:sp>
+        <p:nvSpPr>
+          <p:cNvPr id="15" name="TextBox 14"/>
           <p:cNvSpPr txBox="1"/>
           <p:nvPr/>
         </p:nvSpPr>
         <p:spPr>
           <a:xfrm>
-            <a:off x="1828800" y="4800600"/>
-            <a:ext cx="8531352" cy="320040"/>
+            <a:off x="914400" y="4160520"/>
+            <a:ext cx="502920" cy="384048"/>
           </a:xfrm>
           <a:prstGeom prst="rect">
             <a:avLst/>
@@ -10135,136 +10418,252 @@
             <a:r>
               <a:rPr sz="1300" b="1">
                 <a:solidFill>
-                  <a:srgbClr val="264E79"/>
+                  <a:srgbClr val="A6232D"/>
                 </a:solidFill>
                 <a:latin typeface="Aptos"/>
               </a:rPr>
-              <a:t>IILM University</a:t>
+              <a:t>04</a:t>
+            </a:r>
+          </a:p>
+        </p:txBody>
+      </p:sp>
+      <p:sp>
+        <p:nvSpPr>
+          <p:cNvPr id="16" name="Rounded Rectangle 15"/>
+          <p:cNvSpPr/>
+          <p:nvPr/>
+        </p:nvSpPr>
+        <p:spPr>
+          <a:xfrm>
+            <a:off x="1554480" y="4178807"/>
+            <a:ext cx="9144000" cy="685800"/>
+          </a:xfrm>
+          <a:prstGeom prst="roundRect">
+            <a:avLst>
+              <a:gd name="adj" fmla="val 8000"/>
+            </a:avLst>
+          </a:prstGeom>
+          <a:solidFill>
+            <a:srgbClr val="FFFFFF"/>
+          </a:solidFill>
+          <a:ln>
+            <a:solidFill>
+              <a:srgbClr val="D7DDE4"/>
+            </a:solidFill>
+          </a:ln>
+        </p:spPr>
+        <p:style>
+          <a:lnRef idx="1">
+            <a:schemeClr val="accent1"/>
+          </a:lnRef>
+          <a:fillRef idx="3">
+            <a:schemeClr val="accent1"/>
+          </a:fillRef>
+          <a:effectRef idx="2">
+            <a:schemeClr val="accent1"/>
+          </a:effectRef>
+          <a:fontRef idx="minor">
+            <a:schemeClr val="lt1"/>
+          </a:fontRef>
+        </p:style>
+        <p:txBody>
+          <a:bodyPr rtlCol="0" anchor="ctr"/>
+          <a:lstStyle/>
+          <a:p>
+            <a:pPr algn="ctr"/>
+            <a:endParaRPr/>
+          </a:p>
+        </p:txBody>
+      </p:sp>
+      <p:sp>
+        <p:nvSpPr>
+          <p:cNvPr id="17" name="TextBox 16"/>
+          <p:cNvSpPr txBox="1"/>
+          <p:nvPr/>
+        </p:nvSpPr>
+        <p:spPr>
+          <a:xfrm>
+            <a:off x="1874519" y="4334256"/>
+            <a:ext cx="8138160" cy="292608"/>
+          </a:xfrm>
+          <a:prstGeom prst="rect">
+            <a:avLst/>
+          </a:prstGeom>
+          <a:noFill/>
+        </p:spPr>
+        <p:txBody>
+          <a:bodyPr wrap="none" anchor="t">
+            <a:spAutoFit/>
+          </a:bodyPr>
+          <a:lstStyle/>
+          <a:p>
+            <a:pPr algn="l"/>
+            <a:r>
+              <a:rPr sz="1700" b="1">
+                <a:solidFill>
+                  <a:srgbClr val="143057"/>
+                </a:solidFill>
+                <a:latin typeface="Aptos"/>
+              </a:rPr>
+              <a:t>Personal Portfolio Website</a:t>
+            </a:r>
+          </a:p>
+        </p:txBody>
+      </p:sp>
+      <p:sp>
+        <p:nvSpPr>
+          <p:cNvPr id="18" name="TextBox 17"/>
+          <p:cNvSpPr txBox="1"/>
+          <p:nvPr/>
+        </p:nvSpPr>
+        <p:spPr>
+          <a:xfrm>
+            <a:off x="914400" y="5074920"/>
+            <a:ext cx="502920" cy="384048"/>
+          </a:xfrm>
+          <a:prstGeom prst="rect">
+            <a:avLst/>
+          </a:prstGeom>
+          <a:noFill/>
+        </p:spPr>
+        <p:txBody>
+          <a:bodyPr wrap="none" anchor="t">
+            <a:spAutoFit/>
+          </a:bodyPr>
+          <a:lstStyle/>
+          <a:p>
+            <a:pPr algn="ctr"/>
+            <a:r>
+              <a:rPr sz="1300" b="1">
+                <a:solidFill>
+                  <a:srgbClr val="A6232D"/>
+                </a:solidFill>
+                <a:latin typeface="Aptos"/>
+              </a:rPr>
+              <a:t>05</a:t>
+            </a:r>
+          </a:p>
+        </p:txBody>
+      </p:sp>
+      <p:sp>
+        <p:nvSpPr>
+          <p:cNvPr id="19" name="Rounded Rectangle 18"/>
+          <p:cNvSpPr/>
+          <p:nvPr/>
+        </p:nvSpPr>
+        <p:spPr>
+          <a:xfrm>
+            <a:off x="1554480" y="5093207"/>
+            <a:ext cx="9144000" cy="685800"/>
+          </a:xfrm>
+          <a:prstGeom prst="roundRect">
+            <a:avLst>
+              <a:gd name="adj" fmla="val 8000"/>
+            </a:avLst>
+          </a:prstGeom>
+          <a:solidFill>
+            <a:srgbClr val="FFFFFF"/>
+          </a:solidFill>
+          <a:ln>
+            <a:solidFill>
+              <a:srgbClr val="D7DDE4"/>
+            </a:solidFill>
+          </a:ln>
+        </p:spPr>
+        <p:style>
+          <a:lnRef idx="1">
+            <a:schemeClr val="accent1"/>
+          </a:lnRef>
+          <a:fillRef idx="3">
+            <a:schemeClr val="accent1"/>
+          </a:fillRef>
+          <a:effectRef idx="2">
+            <a:schemeClr val="accent1"/>
+          </a:effectRef>
+          <a:fontRef idx="minor">
+            <a:schemeClr val="lt1"/>
+          </a:fontRef>
+        </p:style>
+        <p:txBody>
+          <a:bodyPr rtlCol="0" anchor="ctr"/>
+          <a:lstStyle/>
+          <a:p>
+            <a:pPr algn="ctr"/>
+            <a:endParaRPr/>
+          </a:p>
+        </p:txBody>
+      </p:sp>
+      <p:sp>
+        <p:nvSpPr>
+          <p:cNvPr id="20" name="TextBox 19"/>
+          <p:cNvSpPr txBox="1"/>
+          <p:nvPr/>
+        </p:nvSpPr>
+        <p:spPr>
+          <a:xfrm>
+            <a:off x="1874519" y="5248656"/>
+            <a:ext cx="8138160" cy="292608"/>
+          </a:xfrm>
+          <a:prstGeom prst="rect">
+            <a:avLst/>
+          </a:prstGeom>
+          <a:noFill/>
+        </p:spPr>
+        <p:txBody>
+          <a:bodyPr wrap="none" anchor="t">
+            <a:spAutoFit/>
+          </a:bodyPr>
+          <a:lstStyle/>
+          <a:p>
+            <a:pPr algn="l"/>
+            <a:r>
+              <a:rPr sz="1700" b="1">
+                <a:solidFill>
+                  <a:srgbClr val="143057"/>
+                </a:solidFill>
+                <a:latin typeface="Aptos"/>
+              </a:rPr>
+              <a:t>Weather Application</a:t>
+            </a:r>
+          </a:p>
+        </p:txBody>
+      </p:sp>
+      <p:sp>
+        <p:nvSpPr>
+          <p:cNvPr id="22" name="TextBox 21"/>
+          <p:cNvSpPr txBox="1"/>
+          <p:nvPr/>
+        </p:nvSpPr>
+        <p:spPr>
+          <a:xfrm>
+            <a:off x="11064240" y="6620256"/>
+            <a:ext cx="411480" cy="164592"/>
+          </a:xfrm>
+          <a:prstGeom prst="rect">
+            <a:avLst/>
+          </a:prstGeom>
+          <a:noFill/>
+        </p:spPr>
+        <p:txBody>
+          <a:bodyPr wrap="none" anchor="t">
+            <a:spAutoFit/>
+          </a:bodyPr>
+          <a:lstStyle/>
+          <a:p>
+            <a:pPr algn="r"/>
+            <a:r>
+              <a:rPr sz="850" b="1">
+                <a:solidFill>
+                  <a:srgbClr val="FFFFFF"/>
+                </a:solidFill>
+                <a:latin typeface="Aptos"/>
+              </a:rPr>
+              <a:t>6</a:t>
             </a:r>
           </a:p>
         </p:txBody>
       </p:sp>
     </p:spTree>
-  </p:cSld>
-  <p:clrMapOvr>
-    <a:masterClrMapping/>
-  </p:clrMapOvr>
-</p:sld>
-</file>
-
-<file path=ppt/slides/slide3.xml><?xml version="1.0" encoding="utf-8"?>
-<p:sld xmlns:a="http://schemas.openxmlformats.org/drawingml/2006/main" xmlns:r="http://schemas.openxmlformats.org/officeDocument/2006/relationships" xmlns:p="http://schemas.openxmlformats.org/presentationml/2006/main">
-  <p:cSld>
-    <p:spTree>
-      <p:nvGrpSpPr>
-        <p:cNvPr id="1" name=""/>
-        <p:cNvGrpSpPr/>
-        <p:nvPr/>
-      </p:nvGrpSpPr>
-      <p:grpSpPr>
-        <a:xfrm>
-          <a:off x="0" y="0"/>
-          <a:ext cx="0" cy="0"/>
-          <a:chOff x="0" y="0"/>
-          <a:chExt cx="0" cy="0"/>
-        </a:xfrm>
-      </p:grpSpPr>
-    </p:spTree>
-    <p:extLst>
-      <p:ext uri="{BB962C8B-B14F-4D97-AF65-F5344CB8AC3E}">
-        <p14:creationId xmlns:p14="http://schemas.microsoft.com/office/powerpoint/2010/main" val="2491532082"/>
-      </p:ext>
-    </p:extLst>
-  </p:cSld>
-  <p:clrMapOvr>
-    <a:masterClrMapping/>
-  </p:clrMapOvr>
-</p:sld>
-</file>
-
-<file path=ppt/slides/slide4.xml><?xml version="1.0" encoding="utf-8"?>
-<p:sld xmlns:a="http://schemas.openxmlformats.org/drawingml/2006/main" xmlns:r="http://schemas.openxmlformats.org/officeDocument/2006/relationships" xmlns:p="http://schemas.openxmlformats.org/presentationml/2006/main">
-  <p:cSld>
-    <p:spTree>
-      <p:nvGrpSpPr>
-        <p:cNvPr id="1" name=""/>
-        <p:cNvGrpSpPr/>
-        <p:nvPr/>
-      </p:nvGrpSpPr>
-      <p:grpSpPr>
-        <a:xfrm>
-          <a:off x="0" y="0"/>
-          <a:ext cx="0" cy="0"/>
-          <a:chOff x="0" y="0"/>
-          <a:chExt cx="0" cy="0"/>
-        </a:xfrm>
-      </p:grpSpPr>
-    </p:spTree>
-    <p:extLst>
-      <p:ext uri="{BB962C8B-B14F-4D97-AF65-F5344CB8AC3E}">
-        <p14:creationId xmlns:p14="http://schemas.microsoft.com/office/powerpoint/2010/main" val="2287241847"/>
-      </p:ext>
-    </p:extLst>
-  </p:cSld>
-  <p:clrMapOvr>
-    <a:masterClrMapping/>
-  </p:clrMapOvr>
-</p:sld>
-</file>
-
-<file path=ppt/slides/slide5.xml><?xml version="1.0" encoding="utf-8"?>
-<p:sld xmlns:a="http://schemas.openxmlformats.org/drawingml/2006/main" xmlns:r="http://schemas.openxmlformats.org/officeDocument/2006/relationships" xmlns:p="http://schemas.openxmlformats.org/presentationml/2006/main">
-  <p:cSld>
-    <p:spTree>
-      <p:nvGrpSpPr>
-        <p:cNvPr id="1" name=""/>
-        <p:cNvGrpSpPr/>
-        <p:nvPr/>
-      </p:nvGrpSpPr>
-      <p:grpSpPr>
-        <a:xfrm>
-          <a:off x="0" y="0"/>
-          <a:ext cx="0" cy="0"/>
-          <a:chOff x="0" y="0"/>
-          <a:chExt cx="0" cy="0"/>
-        </a:xfrm>
-      </p:grpSpPr>
-    </p:spTree>
-    <p:extLst>
-      <p:ext uri="{BB962C8B-B14F-4D97-AF65-F5344CB8AC3E}">
-        <p14:creationId xmlns:p14="http://schemas.microsoft.com/office/powerpoint/2010/main" val="4253651116"/>
-      </p:ext>
-    </p:extLst>
-  </p:cSld>
-  <p:clrMapOvr>
-    <a:masterClrMapping/>
-  </p:clrMapOvr>
-</p:sld>
-</file>
-
-<file path=ppt/slides/slide6.xml><?xml version="1.0" encoding="utf-8"?>
-<p:sld xmlns:a="http://schemas.openxmlformats.org/drawingml/2006/main" xmlns:r="http://schemas.openxmlformats.org/officeDocument/2006/relationships" xmlns:p="http://schemas.openxmlformats.org/presentationml/2006/main">
-  <p:cSld>
-    <p:spTree>
-      <p:nvGrpSpPr>
-        <p:cNvPr id="1" name=""/>
-        <p:cNvGrpSpPr/>
-        <p:nvPr/>
-      </p:nvGrpSpPr>
-      <p:grpSpPr>
-        <a:xfrm>
-          <a:off x="0" y="0"/>
-          <a:ext cx="0" cy="0"/>
-          <a:chOff x="0" y="0"/>
-          <a:chExt cx="0" cy="0"/>
-        </a:xfrm>
-      </p:grpSpPr>
-    </p:spTree>
-    <p:extLst>
-      <p:ext uri="{BB962C8B-B14F-4D97-AF65-F5344CB8AC3E}">
-        <p14:creationId xmlns:p14="http://schemas.microsoft.com/office/powerpoint/2010/main" val="1365754676"/>
-      </p:ext>
-    </p:extLst>
   </p:cSld>
   <p:clrMapOvr>
     <a:masterClrMapping/>
@@ -10327,7 +10726,7 @@
                 </a:solidFill>
                 <a:latin typeface="Aptos Display"/>
               </a:rPr>
-              <a:t>WEB DEVELOPMENT INTERNSHIP</a:t>
+              <a:t>RESPONSIVE LANDING PAGE</a:t>
             </a:r>
           </a:p>
         </p:txBody>
@@ -10426,49 +10825,14 @@
       </p:sp>
       <p:sp>
         <p:nvSpPr>
-          <p:cNvPr id="6" name="TextBox 5"/>
-          <p:cNvSpPr txBox="1"/>
-          <p:nvPr/>
-        </p:nvSpPr>
-        <p:spPr>
-          <a:xfrm>
-            <a:off x="777240" y="1508760"/>
-            <a:ext cx="10698480" cy="502920"/>
-          </a:xfrm>
-          <a:prstGeom prst="rect">
-            <a:avLst/>
-          </a:prstGeom>
-          <a:noFill/>
-        </p:spPr>
-        <p:txBody>
-          <a:bodyPr wrap="none" anchor="t">
-            <a:spAutoFit/>
-          </a:bodyPr>
-          <a:lstStyle/>
-          <a:p>
-            <a:pPr algn="ctr"/>
-            <a:r>
-              <a:rPr sz="2800" b="1">
-                <a:solidFill>
-                  <a:srgbClr val="143057"/>
-                </a:solidFill>
-                <a:latin typeface="Aptos Display"/>
-              </a:rPr>
-              <a:t>INTERNSHIP PRESENTATION</a:t>
-            </a:r>
-          </a:p>
-        </p:txBody>
-      </p:sp>
-      <p:sp>
-        <p:nvSpPr>
-          <p:cNvPr id="7" name="Rectangle 6"/>
+          <p:cNvPr id="6" name="Rectangle 5"/>
           <p:cNvSpPr/>
           <p:nvPr/>
         </p:nvSpPr>
         <p:spPr>
           <a:xfrm>
-            <a:off x="4892040" y="2148840"/>
-            <a:ext cx="2423160" cy="50292"/>
+            <a:off x="822960" y="1417320"/>
+            <a:ext cx="1965960" cy="411480"/>
           </a:xfrm>
           <a:prstGeom prst="rect">
             <a:avLst/>
@@ -10507,14 +10871,14 @@
       </p:sp>
       <p:sp>
         <p:nvSpPr>
-          <p:cNvPr id="8" name="TextBox 7"/>
+          <p:cNvPr id="7" name="TextBox 6"/>
           <p:cNvSpPr txBox="1"/>
           <p:nvPr/>
         </p:nvSpPr>
         <p:spPr>
           <a:xfrm>
-            <a:off x="4206240" y="2788920"/>
-            <a:ext cx="3749039" cy="274320"/>
+            <a:off x="822960" y="1490472"/>
+            <a:ext cx="1965960" cy="201168"/>
           </a:xfrm>
           <a:prstGeom prst="rect">
             <a:avLst/>
@@ -10529,14 +10893,62 @@
           <a:p>
             <a:pPr algn="ctr"/>
             <a:r>
-              <a:rPr sz="1300" b="1">
-                <a:solidFill>
-                  <a:srgbClr val="5F6973"/>
+              <a:rPr sz="1000" b="1">
+                <a:solidFill>
+                  <a:srgbClr val="FFFFFF"/>
                 </a:solidFill>
                 <a:latin typeface="Aptos"/>
               </a:rPr>
-              <a:t>Organization</a:t>
-            </a:r>
+              <a:t>PROJECT 01</a:t>
+            </a:r>
+          </a:p>
+        </p:txBody>
+      </p:sp>
+      <p:sp>
+        <p:nvSpPr>
+          <p:cNvPr id="8" name="Rounded Rectangle 7"/>
+          <p:cNvSpPr/>
+          <p:nvPr/>
+        </p:nvSpPr>
+        <p:spPr>
+          <a:xfrm>
+            <a:off x="822960" y="2057400"/>
+            <a:ext cx="10561320" cy="3246120"/>
+          </a:xfrm>
+          <a:prstGeom prst="roundRect">
+            <a:avLst>
+              <a:gd name="adj" fmla="val 8000"/>
+            </a:avLst>
+          </a:prstGeom>
+          <a:solidFill>
+            <a:srgbClr val="F2F5F8"/>
+          </a:solidFill>
+          <a:ln>
+            <a:solidFill>
+              <a:srgbClr val="D7DDE4"/>
+            </a:solidFill>
+          </a:ln>
+        </p:spPr>
+        <p:style>
+          <a:lnRef idx="1">
+            <a:schemeClr val="accent1"/>
+          </a:lnRef>
+          <a:fillRef idx="3">
+            <a:schemeClr val="accent1"/>
+          </a:fillRef>
+          <a:effectRef idx="2">
+            <a:schemeClr val="accent1"/>
+          </a:effectRef>
+          <a:fontRef idx="minor">
+            <a:schemeClr val="lt1"/>
+          </a:fontRef>
+        </p:style>
+        <p:txBody>
+          <a:bodyPr rtlCol="0" anchor="ctr"/>
+          <a:lstStyle/>
+          <a:p>
+            <a:pPr algn="ctr"/>
+            <a:endParaRPr/>
           </a:p>
         </p:txBody>
       </p:sp>
@@ -10548,8 +10960,95 @@
         </p:nvSpPr>
         <p:spPr>
           <a:xfrm>
-            <a:off x="2926080" y="3154680"/>
-            <a:ext cx="6309360" cy="475488"/>
+            <a:off x="1234440" y="2514600"/>
+            <a:ext cx="9784080" cy="2468880"/>
+          </a:xfrm>
+          <a:prstGeom prst="rect">
+            <a:avLst/>
+          </a:prstGeom>
+          <a:noFill/>
+        </p:spPr>
+        <p:txBody>
+          <a:bodyPr wrap="square">
+            <a:spAutoFit/>
+          </a:bodyPr>
+          <a:lstStyle/>
+          <a:p>
+            <a:pPr>
+              <a:spcAft>
+                <a:spcPts val="1500"/>
+              </a:spcAft>
+              <a:defRPr sz="1700">
+                <a:solidFill>
+                  <a:srgbClr val="2D2D2D"/>
+                </a:solidFill>
+                <a:latin typeface="Aptos"/>
+              </a:defRPr>
+            </a:pPr>
+            <a:r>
+              <a:t>• Designed a responsive landing page using HTML, CSS and JavaScript.</a:t>
+            </a:r>
+          </a:p>
+          <a:p>
+            <a:pPr>
+              <a:spcAft>
+                <a:spcPts val="1500"/>
+              </a:spcAft>
+              <a:defRPr sz="1700">
+                <a:solidFill>
+                  <a:srgbClr val="2D2D2D"/>
+                </a:solidFill>
+                <a:latin typeface="Aptos"/>
+              </a:defRPr>
+            </a:pPr>
+            <a:r>
+              <a:t>• Included navigation and multiple content sections.</a:t>
+            </a:r>
+          </a:p>
+          <a:p>
+            <a:pPr>
+              <a:spcAft>
+                <a:spcPts val="1500"/>
+              </a:spcAft>
+              <a:defRPr sz="1700">
+                <a:solidFill>
+                  <a:srgbClr val="2D2D2D"/>
+                </a:solidFill>
+                <a:latin typeface="Aptos"/>
+              </a:defRPr>
+            </a:pPr>
+            <a:r>
+              <a:t>• Focused on a clean, user-friendly layout.</a:t>
+            </a:r>
+          </a:p>
+          <a:p>
+            <a:pPr>
+              <a:spcAft>
+                <a:spcPts val="1500"/>
+              </a:spcAft>
+              <a:defRPr sz="1700">
+                <a:solidFill>
+                  <a:srgbClr val="2D2D2D"/>
+                </a:solidFill>
+                <a:latin typeface="Aptos"/>
+              </a:defRPr>
+            </a:pPr>
+            <a:r>
+              <a:t>• Made the page adaptable to different screen sizes.</a:t>
+            </a:r>
+          </a:p>
+        </p:txBody>
+      </p:sp>
+      <p:sp>
+        <p:nvSpPr>
+          <p:cNvPr id="11" name="TextBox 10"/>
+          <p:cNvSpPr txBox="1"/>
+          <p:nvPr/>
+        </p:nvSpPr>
+        <p:spPr>
+          <a:xfrm>
+            <a:off x="11064240" y="6620256"/>
+            <a:ext cx="411480" cy="164592"/>
           </a:xfrm>
           <a:prstGeom prst="rect">
             <a:avLst/>
@@ -10562,120 +11061,15 @@
           </a:bodyPr>
           <a:lstStyle/>
           <a:p>
-            <a:pPr algn="ctr"/>
-            <a:r>
-              <a:rPr sz="2500" b="1">
-                <a:solidFill>
-                  <a:srgbClr val="2D2D2D"/>
+            <a:pPr algn="r"/>
+            <a:r>
+              <a:rPr sz="850" b="1">
+                <a:solidFill>
+                  <a:srgbClr val="FFFFFF"/>
                 </a:solidFill>
                 <a:latin typeface="Aptos"/>
               </a:rPr>
-              <a:t>Prodigy InfoTech</a:t>
-            </a:r>
-          </a:p>
-        </p:txBody>
-      </p:sp>
-      <p:sp>
-        <p:nvSpPr>
-          <p:cNvPr id="10" name="TextBox 9"/>
-          <p:cNvSpPr txBox="1"/>
-          <p:nvPr/>
-        </p:nvSpPr>
-        <p:spPr>
-          <a:xfrm>
-            <a:off x="2926080" y="3840480"/>
-            <a:ext cx="6309360" cy="320040"/>
-          </a:xfrm>
-          <a:prstGeom prst="rect">
-            <a:avLst/>
-          </a:prstGeom>
-          <a:noFill/>
-        </p:spPr>
-        <p:txBody>
-          <a:bodyPr wrap="none" anchor="t">
-            <a:spAutoFit/>
-          </a:bodyPr>
-          <a:lstStyle/>
-          <a:p>
-            <a:pPr algn="ctr"/>
-            <a:r>
-              <a:rPr sz="1500" b="0">
-                <a:solidFill>
-                  <a:srgbClr val="264E79"/>
-                </a:solidFill>
-                <a:latin typeface="Aptos"/>
-              </a:rPr>
-              <a:t>Role: Web Development Intern</a:t>
-            </a:r>
-          </a:p>
-        </p:txBody>
-      </p:sp>
-      <p:sp>
-        <p:nvSpPr>
-          <p:cNvPr id="11" name="TextBox 10"/>
-          <p:cNvSpPr txBox="1"/>
-          <p:nvPr/>
-        </p:nvSpPr>
-        <p:spPr>
-          <a:xfrm>
-            <a:off x="2926080" y="4315968"/>
-            <a:ext cx="6309360" cy="292608"/>
-          </a:xfrm>
-          <a:prstGeom prst="rect">
-            <a:avLst/>
-          </a:prstGeom>
-          <a:noFill/>
-        </p:spPr>
-        <p:txBody>
-          <a:bodyPr wrap="none" anchor="t">
-            <a:spAutoFit/>
-          </a:bodyPr>
-          <a:lstStyle/>
-          <a:p>
-            <a:pPr algn="ctr"/>
-            <a:r>
-              <a:rPr sz="1400" b="0">
-                <a:solidFill>
-                  <a:srgbClr val="5F6973"/>
-                </a:solidFill>
-                <a:latin typeface="Aptos"/>
-              </a:rPr>
-              <a:t>15 July 2026 – 15 August 2026</a:t>
-            </a:r>
-          </a:p>
-        </p:txBody>
-      </p:sp>
-      <p:sp>
-        <p:nvSpPr>
-          <p:cNvPr id="13" name="TextBox 12"/>
-          <p:cNvSpPr txBox="1"/>
-          <p:nvPr/>
-        </p:nvSpPr>
-        <p:spPr>
-          <a:xfrm>
-            <a:off x="11064240" y="6620256"/>
-            <a:ext cx="411480" cy="164592"/>
-          </a:xfrm>
-          <a:prstGeom prst="rect">
-            <a:avLst/>
-          </a:prstGeom>
-          <a:noFill/>
-        </p:spPr>
-        <p:txBody>
-          <a:bodyPr wrap="none" anchor="t">
-            <a:spAutoFit/>
-          </a:bodyPr>
-          <a:lstStyle/>
-          <a:p>
-            <a:pPr algn="r"/>
-            <a:r>
-              <a:rPr sz="850" b="1" dirty="0">
-                <a:solidFill>
-                  <a:srgbClr val="FFFFFF"/>
-                </a:solidFill>
-                <a:latin typeface="Aptos"/>
-              </a:rPr>
-              <a:t>2</a:t>
+              <a:t>7</a:t>
             </a:r>
           </a:p>
         </p:txBody>
@@ -10743,7 +11137,7 @@
                 </a:solidFill>
                 <a:latin typeface="Aptos Display"/>
               </a:rPr>
-              <a:t>INTERNSHIP OVERVIEW</a:t>
+              <a:t>STOPWATCH WEB APPLICATION</a:t>
             </a:r>
           </a:p>
         </p:txBody>
@@ -10842,62 +11236,14 @@
       </p:sp>
       <p:sp>
         <p:nvSpPr>
-          <p:cNvPr id="6" name="Rounded Rectangle 5"/>
+          <p:cNvPr id="6" name="Rectangle 5"/>
           <p:cNvSpPr/>
           <p:nvPr/>
         </p:nvSpPr>
         <p:spPr>
           <a:xfrm>
-            <a:off x="731520" y="1417320"/>
-            <a:ext cx="5074920" cy="1051560"/>
-          </a:xfrm>
-          <a:prstGeom prst="roundRect">
-            <a:avLst>
-              <a:gd name="adj" fmla="val 8000"/>
-            </a:avLst>
-          </a:prstGeom>
-          <a:solidFill>
-            <a:srgbClr val="FFFFFF"/>
-          </a:solidFill>
-          <a:ln>
-            <a:solidFill>
-              <a:srgbClr val="D7DDE4"/>
-            </a:solidFill>
-          </a:ln>
-        </p:spPr>
-        <p:style>
-          <a:lnRef idx="1">
-            <a:schemeClr val="accent1"/>
-          </a:lnRef>
-          <a:fillRef idx="3">
-            <a:schemeClr val="accent1"/>
-          </a:fillRef>
-          <a:effectRef idx="2">
-            <a:schemeClr val="accent1"/>
-          </a:effectRef>
-          <a:fontRef idx="minor">
-            <a:schemeClr val="lt1"/>
-          </a:fontRef>
-        </p:style>
-        <p:txBody>
-          <a:bodyPr rtlCol="0" anchor="ctr"/>
-          <a:lstStyle/>
-          <a:p>
-            <a:pPr algn="ctr"/>
-            <a:endParaRPr/>
-          </a:p>
-        </p:txBody>
-      </p:sp>
-      <p:sp>
-        <p:nvSpPr>
-          <p:cNvPr id="7" name="Rectangle 6"/>
-          <p:cNvSpPr/>
-          <p:nvPr/>
-        </p:nvSpPr>
-        <p:spPr>
-          <a:xfrm>
-            <a:off x="731520" y="1417320"/>
-            <a:ext cx="54864" cy="1051560"/>
+            <a:off x="822960" y="1417320"/>
+            <a:ext cx="1965960" cy="411480"/>
           </a:xfrm>
           <a:prstGeom prst="rect">
             <a:avLst/>
@@ -10936,14 +11282,14 @@
       </p:sp>
       <p:sp>
         <p:nvSpPr>
-          <p:cNvPr id="8" name="TextBox 7"/>
+          <p:cNvPr id="7" name="TextBox 6"/>
           <p:cNvSpPr txBox="1"/>
           <p:nvPr/>
         </p:nvSpPr>
         <p:spPr>
           <a:xfrm>
-            <a:off x="960120" y="1618488"/>
-            <a:ext cx="4663440" cy="292608"/>
+            <a:off x="822960" y="1490472"/>
+            <a:ext cx="1965960" cy="201168"/>
           </a:xfrm>
           <a:prstGeom prst="rect">
             <a:avLst/>
@@ -10956,64 +11302,29 @@
           </a:bodyPr>
           <a:lstStyle/>
           <a:p>
-            <a:pPr algn="l"/>
-            <a:r>
-              <a:rPr sz="1500" b="1">
-                <a:solidFill>
-                  <a:srgbClr val="143057"/>
+            <a:pPr algn="ctr"/>
+            <a:r>
+              <a:rPr sz="1000" b="1">
+                <a:solidFill>
+                  <a:srgbClr val="FFFFFF"/>
                 </a:solidFill>
                 <a:latin typeface="Aptos"/>
               </a:rPr>
-              <a:t>Organization</a:t>
-            </a:r>
-          </a:p>
-        </p:txBody>
-      </p:sp>
-      <p:sp>
-        <p:nvSpPr>
-          <p:cNvPr id="9" name="TextBox 8"/>
-          <p:cNvSpPr txBox="1"/>
-          <p:nvPr/>
-        </p:nvSpPr>
-        <p:spPr>
-          <a:xfrm>
-            <a:off x="960120" y="2011680"/>
-            <a:ext cx="4663440" cy="274319"/>
-          </a:xfrm>
-          <a:prstGeom prst="rect">
-            <a:avLst/>
-          </a:prstGeom>
-          <a:noFill/>
-        </p:spPr>
-        <p:txBody>
-          <a:bodyPr wrap="none" anchor="t">
-            <a:spAutoFit/>
-          </a:bodyPr>
-          <a:lstStyle/>
-          <a:p>
-            <a:pPr algn="l"/>
-            <a:r>
-              <a:rPr sz="1300" b="0">
-                <a:solidFill>
-                  <a:srgbClr val="2D2D2D"/>
-                </a:solidFill>
-                <a:latin typeface="Aptos"/>
-              </a:rPr>
-              <a:t>Prodigy InfoTech</a:t>
-            </a:r>
-          </a:p>
-        </p:txBody>
-      </p:sp>
-      <p:sp>
-        <p:nvSpPr>
-          <p:cNvPr id="10" name="Rounded Rectangle 9"/>
+              <a:t>PROJECT 02</a:t>
+            </a:r>
+          </a:p>
+        </p:txBody>
+      </p:sp>
+      <p:sp>
+        <p:nvSpPr>
+          <p:cNvPr id="8" name="Rounded Rectangle 7"/>
           <p:cNvSpPr/>
           <p:nvPr/>
         </p:nvSpPr>
         <p:spPr>
           <a:xfrm>
-            <a:off x="6309360" y="1417320"/>
-            <a:ext cx="5074920" cy="1051560"/>
+            <a:off x="822960" y="2057400"/>
+            <a:ext cx="10561320" cy="3246120"/>
           </a:xfrm>
           <a:prstGeom prst="roundRect">
             <a:avLst>
@@ -11021,7 +11332,7 @@
             </a:avLst>
           </a:prstGeom>
           <a:solidFill>
-            <a:srgbClr val="FFFFFF"/>
+            <a:srgbClr val="F2F5F8"/>
           </a:solidFill>
           <a:ln>
             <a:solidFill>
@@ -11054,60 +11365,113 @@
       </p:sp>
       <p:sp>
         <p:nvSpPr>
-          <p:cNvPr id="11" name="Rectangle 10"/>
-          <p:cNvSpPr/>
-          <p:nvPr/>
-        </p:nvSpPr>
-        <p:spPr>
-          <a:xfrm>
-            <a:off x="6309360" y="1417320"/>
-            <a:ext cx="54864" cy="1051560"/>
-          </a:xfrm>
-          <a:prstGeom prst="rect">
-            <a:avLst/>
-          </a:prstGeom>
-          <a:solidFill>
-            <a:srgbClr val="A6232D"/>
-          </a:solidFill>
-          <a:ln>
-            <a:solidFill>
-              <a:srgbClr val="A6232D"/>
-            </a:solidFill>
-          </a:ln>
-        </p:spPr>
-        <p:style>
-          <a:lnRef idx="1">
-            <a:schemeClr val="accent1"/>
-          </a:lnRef>
-          <a:fillRef idx="3">
-            <a:schemeClr val="accent1"/>
-          </a:fillRef>
-          <a:effectRef idx="2">
-            <a:schemeClr val="accent1"/>
-          </a:effectRef>
-          <a:fontRef idx="minor">
-            <a:schemeClr val="lt1"/>
-          </a:fontRef>
-        </p:style>
-        <p:txBody>
-          <a:bodyPr rtlCol="0" anchor="ctr"/>
-          <a:lstStyle/>
-          <a:p>
-            <a:pPr algn="ctr"/>
-            <a:endParaRPr/>
-          </a:p>
-        </p:txBody>
-      </p:sp>
-      <p:sp>
-        <p:nvSpPr>
-          <p:cNvPr id="12" name="TextBox 11"/>
+          <p:cNvPr id="9" name="TextBox 8"/>
           <p:cNvSpPr txBox="1"/>
           <p:nvPr/>
         </p:nvSpPr>
         <p:spPr>
           <a:xfrm>
-            <a:off x="6537960" y="1618488"/>
-            <a:ext cx="4663440" cy="292608"/>
+            <a:off x="1234440" y="2514600"/>
+            <a:ext cx="9784080" cy="1715854"/>
+          </a:xfrm>
+          <a:prstGeom prst="rect">
+            <a:avLst/>
+          </a:prstGeom>
+          <a:noFill/>
+        </p:spPr>
+        <p:txBody>
+          <a:bodyPr wrap="square">
+            <a:spAutoFit/>
+          </a:bodyPr>
+          <a:lstStyle/>
+          <a:p>
+            <a:pPr>
+              <a:spcAft>
+                <a:spcPts val="1500"/>
+              </a:spcAft>
+              <a:defRPr sz="1700">
+                <a:solidFill>
+                  <a:srgbClr val="2D2D2D"/>
+                </a:solidFill>
+                <a:latin typeface="Aptos"/>
+              </a:defRPr>
+            </a:pPr>
+            <a:r>
+              <a:rPr dirty="0"/>
+              <a:t>• Developed an interactive stopwatch using JavaScript.</a:t>
+            </a:r>
+          </a:p>
+          <a:p>
+            <a:pPr>
+              <a:spcAft>
+                <a:spcPts val="1500"/>
+              </a:spcAft>
+              <a:defRPr sz="1700">
+                <a:solidFill>
+                  <a:srgbClr val="2D2D2D"/>
+                </a:solidFill>
+                <a:latin typeface="Aptos"/>
+              </a:defRPr>
+            </a:pPr>
+            <a:r>
+              <a:rPr dirty="0"/>
+              <a:t>• Implemented Start, Stop, Reset</a:t>
+            </a:r>
+            <a:r>
+              <a:rPr lang="en-US" dirty="0"/>
+              <a:t>, Pause</a:t>
+            </a:r>
+            <a:r>
+              <a:rPr dirty="0"/>
+              <a:t> and Lap functionality.</a:t>
+            </a:r>
+          </a:p>
+          <a:p>
+            <a:pPr>
+              <a:spcAft>
+                <a:spcPts val="1500"/>
+              </a:spcAft>
+              <a:defRPr sz="1700">
+                <a:solidFill>
+                  <a:srgbClr val="2D2D2D"/>
+                </a:solidFill>
+                <a:latin typeface="Aptos"/>
+              </a:defRPr>
+            </a:pPr>
+            <a:r>
+              <a:rPr dirty="0"/>
+              <a:t>• Used JavaScript timing and event handling.</a:t>
+            </a:r>
+          </a:p>
+          <a:p>
+            <a:pPr>
+              <a:spcAft>
+                <a:spcPts val="1500"/>
+              </a:spcAft>
+              <a:defRPr sz="1700">
+                <a:solidFill>
+                  <a:srgbClr val="2D2D2D"/>
+                </a:solidFill>
+                <a:latin typeface="Aptos"/>
+              </a:defRPr>
+            </a:pPr>
+            <a:r>
+              <a:rPr dirty="0"/>
+              <a:t>• Improved understanding of interactive web application logic.</a:t>
+            </a:r>
+          </a:p>
+        </p:txBody>
+      </p:sp>
+      <p:sp>
+        <p:nvSpPr>
+          <p:cNvPr id="11" name="TextBox 10"/>
+          <p:cNvSpPr txBox="1"/>
+          <p:nvPr/>
+        </p:nvSpPr>
+        <p:spPr>
+          <a:xfrm>
+            <a:off x="11064240" y="6620256"/>
+            <a:ext cx="411480" cy="164592"/>
           </a:xfrm>
           <a:prstGeom prst="rect">
             <a:avLst/>
@@ -11120,595 +11484,15 @@
           </a:bodyPr>
           <a:lstStyle/>
           <a:p>
-            <a:pPr algn="l"/>
-            <a:r>
-              <a:rPr sz="1500" b="1">
-                <a:solidFill>
-                  <a:srgbClr val="143057"/>
+            <a:pPr algn="r"/>
+            <a:r>
+              <a:rPr sz="850" b="1">
+                <a:solidFill>
+                  <a:srgbClr val="FFFFFF"/>
                 </a:solidFill>
                 <a:latin typeface="Aptos"/>
               </a:rPr>
-              <a:t>Role</a:t>
-            </a:r>
-          </a:p>
-        </p:txBody>
-      </p:sp>
-      <p:sp>
-        <p:nvSpPr>
-          <p:cNvPr id="13" name="TextBox 12"/>
-          <p:cNvSpPr txBox="1"/>
-          <p:nvPr/>
-        </p:nvSpPr>
-        <p:spPr>
-          <a:xfrm>
-            <a:off x="6537960" y="2011680"/>
-            <a:ext cx="4663440" cy="274319"/>
-          </a:xfrm>
-          <a:prstGeom prst="rect">
-            <a:avLst/>
-          </a:prstGeom>
-          <a:noFill/>
-        </p:spPr>
-        <p:txBody>
-          <a:bodyPr wrap="none" anchor="t">
-            <a:spAutoFit/>
-          </a:bodyPr>
-          <a:lstStyle/>
-          <a:p>
-            <a:pPr algn="l"/>
-            <a:r>
-              <a:rPr sz="1300" b="0">
-                <a:solidFill>
-                  <a:srgbClr val="2D2D2D"/>
-                </a:solidFill>
-                <a:latin typeface="Aptos"/>
-              </a:rPr>
-              <a:t>Web Development Intern</a:t>
-            </a:r>
-          </a:p>
-        </p:txBody>
-      </p:sp>
-      <p:sp>
-        <p:nvSpPr>
-          <p:cNvPr id="14" name="Rounded Rectangle 13"/>
-          <p:cNvSpPr/>
-          <p:nvPr/>
-        </p:nvSpPr>
-        <p:spPr>
-          <a:xfrm>
-            <a:off x="731520" y="2788920"/>
-            <a:ext cx="5074920" cy="1051560"/>
-          </a:xfrm>
-          <a:prstGeom prst="roundRect">
-            <a:avLst>
-              <a:gd name="adj" fmla="val 8000"/>
-            </a:avLst>
-          </a:prstGeom>
-          <a:solidFill>
-            <a:srgbClr val="FFFFFF"/>
-          </a:solidFill>
-          <a:ln>
-            <a:solidFill>
-              <a:srgbClr val="D7DDE4"/>
-            </a:solidFill>
-          </a:ln>
-        </p:spPr>
-        <p:style>
-          <a:lnRef idx="1">
-            <a:schemeClr val="accent1"/>
-          </a:lnRef>
-          <a:fillRef idx="3">
-            <a:schemeClr val="accent1"/>
-          </a:fillRef>
-          <a:effectRef idx="2">
-            <a:schemeClr val="accent1"/>
-          </a:effectRef>
-          <a:fontRef idx="minor">
-            <a:schemeClr val="lt1"/>
-          </a:fontRef>
-        </p:style>
-        <p:txBody>
-          <a:bodyPr rtlCol="0" anchor="ctr"/>
-          <a:lstStyle/>
-          <a:p>
-            <a:pPr algn="ctr"/>
-            <a:endParaRPr/>
-          </a:p>
-        </p:txBody>
-      </p:sp>
-      <p:sp>
-        <p:nvSpPr>
-          <p:cNvPr id="15" name="Rectangle 14"/>
-          <p:cNvSpPr/>
-          <p:nvPr/>
-        </p:nvSpPr>
-        <p:spPr>
-          <a:xfrm>
-            <a:off x="731520" y="2788920"/>
-            <a:ext cx="54864" cy="1051560"/>
-          </a:xfrm>
-          <a:prstGeom prst="rect">
-            <a:avLst/>
-          </a:prstGeom>
-          <a:solidFill>
-            <a:srgbClr val="A6232D"/>
-          </a:solidFill>
-          <a:ln>
-            <a:solidFill>
-              <a:srgbClr val="A6232D"/>
-            </a:solidFill>
-          </a:ln>
-        </p:spPr>
-        <p:style>
-          <a:lnRef idx="1">
-            <a:schemeClr val="accent1"/>
-          </a:lnRef>
-          <a:fillRef idx="3">
-            <a:schemeClr val="accent1"/>
-          </a:fillRef>
-          <a:effectRef idx="2">
-            <a:schemeClr val="accent1"/>
-          </a:effectRef>
-          <a:fontRef idx="minor">
-            <a:schemeClr val="lt1"/>
-          </a:fontRef>
-        </p:style>
-        <p:txBody>
-          <a:bodyPr rtlCol="0" anchor="ctr"/>
-          <a:lstStyle/>
-          <a:p>
-            <a:pPr algn="ctr"/>
-            <a:endParaRPr/>
-          </a:p>
-        </p:txBody>
-      </p:sp>
-      <p:sp>
-        <p:nvSpPr>
-          <p:cNvPr id="16" name="TextBox 15"/>
-          <p:cNvSpPr txBox="1"/>
-          <p:nvPr/>
-        </p:nvSpPr>
-        <p:spPr>
-          <a:xfrm>
-            <a:off x="960120" y="2990088"/>
-            <a:ext cx="4663440" cy="292608"/>
-          </a:xfrm>
-          <a:prstGeom prst="rect">
-            <a:avLst/>
-          </a:prstGeom>
-          <a:noFill/>
-        </p:spPr>
-        <p:txBody>
-          <a:bodyPr wrap="none" anchor="t">
-            <a:spAutoFit/>
-          </a:bodyPr>
-          <a:lstStyle/>
-          <a:p>
-            <a:pPr algn="l"/>
-            <a:r>
-              <a:rPr sz="1500" b="1">
-                <a:solidFill>
-                  <a:srgbClr val="143057"/>
-                </a:solidFill>
-                <a:latin typeface="Aptos"/>
-              </a:rPr>
-              <a:t>Duration</a:t>
-            </a:r>
-          </a:p>
-        </p:txBody>
-      </p:sp>
-      <p:sp>
-        <p:nvSpPr>
-          <p:cNvPr id="17" name="TextBox 16"/>
-          <p:cNvSpPr txBox="1"/>
-          <p:nvPr/>
-        </p:nvSpPr>
-        <p:spPr>
-          <a:xfrm>
-            <a:off x="960120" y="3383279"/>
-            <a:ext cx="4663440" cy="274319"/>
-          </a:xfrm>
-          <a:prstGeom prst="rect">
-            <a:avLst/>
-          </a:prstGeom>
-          <a:noFill/>
-        </p:spPr>
-        <p:txBody>
-          <a:bodyPr wrap="none" anchor="t">
-            <a:spAutoFit/>
-          </a:bodyPr>
-          <a:lstStyle/>
-          <a:p>
-            <a:pPr algn="l"/>
-            <a:r>
-              <a:rPr sz="1300" b="0">
-                <a:solidFill>
-                  <a:srgbClr val="2D2D2D"/>
-                </a:solidFill>
-                <a:latin typeface="Aptos"/>
-              </a:rPr>
-              <a:t>15 July 2026 – 15 August 2026</a:t>
-            </a:r>
-          </a:p>
-        </p:txBody>
-      </p:sp>
-      <p:sp>
-        <p:nvSpPr>
-          <p:cNvPr id="18" name="Rounded Rectangle 17"/>
-          <p:cNvSpPr/>
-          <p:nvPr/>
-        </p:nvSpPr>
-        <p:spPr>
-          <a:xfrm>
-            <a:off x="6309360" y="2788920"/>
-            <a:ext cx="5074920" cy="1051560"/>
-          </a:xfrm>
-          <a:prstGeom prst="roundRect">
-            <a:avLst>
-              <a:gd name="adj" fmla="val 8000"/>
-            </a:avLst>
-          </a:prstGeom>
-          <a:solidFill>
-            <a:srgbClr val="FFFFFF"/>
-          </a:solidFill>
-          <a:ln>
-            <a:solidFill>
-              <a:srgbClr val="D7DDE4"/>
-            </a:solidFill>
-          </a:ln>
-        </p:spPr>
-        <p:style>
-          <a:lnRef idx="1">
-            <a:schemeClr val="accent1"/>
-          </a:lnRef>
-          <a:fillRef idx="3">
-            <a:schemeClr val="accent1"/>
-          </a:fillRef>
-          <a:effectRef idx="2">
-            <a:schemeClr val="accent1"/>
-          </a:effectRef>
-          <a:fontRef idx="minor">
-            <a:schemeClr val="lt1"/>
-          </a:fontRef>
-        </p:style>
-        <p:txBody>
-          <a:bodyPr rtlCol="0" anchor="ctr"/>
-          <a:lstStyle/>
-          <a:p>
-            <a:pPr algn="ctr"/>
-            <a:endParaRPr/>
-          </a:p>
-        </p:txBody>
-      </p:sp>
-      <p:sp>
-        <p:nvSpPr>
-          <p:cNvPr id="19" name="Rectangle 18"/>
-          <p:cNvSpPr/>
-          <p:nvPr/>
-        </p:nvSpPr>
-        <p:spPr>
-          <a:xfrm>
-            <a:off x="6309360" y="2788920"/>
-            <a:ext cx="54864" cy="1051560"/>
-          </a:xfrm>
-          <a:prstGeom prst="rect">
-            <a:avLst/>
-          </a:prstGeom>
-          <a:solidFill>
-            <a:srgbClr val="A6232D"/>
-          </a:solidFill>
-          <a:ln>
-            <a:solidFill>
-              <a:srgbClr val="A6232D"/>
-            </a:solidFill>
-          </a:ln>
-        </p:spPr>
-        <p:style>
-          <a:lnRef idx="1">
-            <a:schemeClr val="accent1"/>
-          </a:lnRef>
-          <a:fillRef idx="3">
-            <a:schemeClr val="accent1"/>
-          </a:fillRef>
-          <a:effectRef idx="2">
-            <a:schemeClr val="accent1"/>
-          </a:effectRef>
-          <a:fontRef idx="minor">
-            <a:schemeClr val="lt1"/>
-          </a:fontRef>
-        </p:style>
-        <p:txBody>
-          <a:bodyPr rtlCol="0" anchor="ctr"/>
-          <a:lstStyle/>
-          <a:p>
-            <a:pPr algn="ctr"/>
-            <a:endParaRPr/>
-          </a:p>
-        </p:txBody>
-      </p:sp>
-      <p:sp>
-        <p:nvSpPr>
-          <p:cNvPr id="20" name="TextBox 19"/>
-          <p:cNvSpPr txBox="1"/>
-          <p:nvPr/>
-        </p:nvSpPr>
-        <p:spPr>
-          <a:xfrm>
-            <a:off x="6537960" y="2990088"/>
-            <a:ext cx="4663440" cy="292608"/>
-          </a:xfrm>
-          <a:prstGeom prst="rect">
-            <a:avLst/>
-          </a:prstGeom>
-          <a:noFill/>
-        </p:spPr>
-        <p:txBody>
-          <a:bodyPr wrap="none" anchor="t">
-            <a:spAutoFit/>
-          </a:bodyPr>
-          <a:lstStyle/>
-          <a:p>
-            <a:pPr algn="l"/>
-            <a:r>
-              <a:rPr sz="1500" b="1">
-                <a:solidFill>
-                  <a:srgbClr val="143057"/>
-                </a:solidFill>
-                <a:latin typeface="Aptos"/>
-              </a:rPr>
-              <a:t>Domain</a:t>
-            </a:r>
-          </a:p>
-        </p:txBody>
-      </p:sp>
-      <p:sp>
-        <p:nvSpPr>
-          <p:cNvPr id="21" name="TextBox 20"/>
-          <p:cNvSpPr txBox="1"/>
-          <p:nvPr/>
-        </p:nvSpPr>
-        <p:spPr>
-          <a:xfrm>
-            <a:off x="6537960" y="3383279"/>
-            <a:ext cx="4847994" cy="492443"/>
-          </a:xfrm>
-          <a:prstGeom prst="rect">
-            <a:avLst/>
-          </a:prstGeom>
-          <a:noFill/>
-        </p:spPr>
-        <p:txBody>
-          <a:bodyPr wrap="none" anchor="t">
-            <a:spAutoFit/>
-          </a:bodyPr>
-          <a:lstStyle/>
-          <a:p>
-            <a:pPr algn="l"/>
-            <a:r>
-              <a:rPr sz="1300" b="0" dirty="0">
-                <a:solidFill>
-                  <a:srgbClr val="2D2D2D"/>
-                </a:solidFill>
-                <a:latin typeface="Aptos"/>
-              </a:rPr>
-              <a:t>Practical web development using HTML, CSS and JavaScript, with</a:t>
-            </a:r>
-            <a:endParaRPr lang="en-US" sz="1300" b="0" dirty="0">
-              <a:solidFill>
-                <a:srgbClr val="2D2D2D"/>
-              </a:solidFill>
-              <a:latin typeface="Aptos"/>
-            </a:endParaRPr>
-          </a:p>
-          <a:p>
-            <a:pPr algn="l"/>
-            <a:r>
-              <a:rPr sz="1300" b="0" dirty="0">
-                <a:solidFill>
-                  <a:srgbClr val="2D2D2D"/>
-                </a:solidFill>
-                <a:latin typeface="Aptos"/>
-              </a:rPr>
-              <a:t> emphasis on responsive and interactive applications.</a:t>
-            </a:r>
-          </a:p>
-        </p:txBody>
-      </p:sp>
-      <p:sp>
-        <p:nvSpPr>
-          <p:cNvPr id="22" name="Rounded Rectangle 21"/>
-          <p:cNvSpPr/>
-          <p:nvPr/>
-        </p:nvSpPr>
-        <p:spPr>
-          <a:xfrm>
-            <a:off x="731520" y="4160520"/>
-            <a:ext cx="10652760" cy="1234440"/>
-          </a:xfrm>
-          <a:prstGeom prst="roundRect">
-            <a:avLst>
-              <a:gd name="adj" fmla="val 8000"/>
-            </a:avLst>
-          </a:prstGeom>
-          <a:solidFill>
-            <a:srgbClr val="FFFFFF"/>
-          </a:solidFill>
-          <a:ln>
-            <a:solidFill>
-              <a:srgbClr val="D7DDE4"/>
-            </a:solidFill>
-          </a:ln>
-        </p:spPr>
-        <p:style>
-          <a:lnRef idx="1">
-            <a:schemeClr val="accent1"/>
-          </a:lnRef>
-          <a:fillRef idx="3">
-            <a:schemeClr val="accent1"/>
-          </a:fillRef>
-          <a:effectRef idx="2">
-            <a:schemeClr val="accent1"/>
-          </a:effectRef>
-          <a:fontRef idx="minor">
-            <a:schemeClr val="lt1"/>
-          </a:fontRef>
-        </p:style>
-        <p:txBody>
-          <a:bodyPr rtlCol="0" anchor="ctr"/>
-          <a:lstStyle/>
-          <a:p>
-            <a:pPr algn="ctr"/>
-            <a:endParaRPr/>
-          </a:p>
-        </p:txBody>
-      </p:sp>
-      <p:sp>
-        <p:nvSpPr>
-          <p:cNvPr id="23" name="Rectangle 22"/>
-          <p:cNvSpPr/>
-          <p:nvPr/>
-        </p:nvSpPr>
-        <p:spPr>
-          <a:xfrm>
-            <a:off x="731520" y="4160520"/>
-            <a:ext cx="54864" cy="1234440"/>
-          </a:xfrm>
-          <a:prstGeom prst="rect">
-            <a:avLst/>
-          </a:prstGeom>
-          <a:solidFill>
-            <a:srgbClr val="A6232D"/>
-          </a:solidFill>
-          <a:ln>
-            <a:solidFill>
-              <a:srgbClr val="A6232D"/>
-            </a:solidFill>
-          </a:ln>
-        </p:spPr>
-        <p:style>
-          <a:lnRef idx="1">
-            <a:schemeClr val="accent1"/>
-          </a:lnRef>
-          <a:fillRef idx="3">
-            <a:schemeClr val="accent1"/>
-          </a:fillRef>
-          <a:effectRef idx="2">
-            <a:schemeClr val="accent1"/>
-          </a:effectRef>
-          <a:fontRef idx="minor">
-            <a:schemeClr val="lt1"/>
-          </a:fontRef>
-        </p:style>
-        <p:txBody>
-          <a:bodyPr rtlCol="0" anchor="ctr"/>
-          <a:lstStyle/>
-          <a:p>
-            <a:pPr algn="ctr"/>
-            <a:endParaRPr/>
-          </a:p>
-        </p:txBody>
-      </p:sp>
-      <p:sp>
-        <p:nvSpPr>
-          <p:cNvPr id="24" name="TextBox 23"/>
-          <p:cNvSpPr txBox="1"/>
-          <p:nvPr/>
-        </p:nvSpPr>
-        <p:spPr>
-          <a:xfrm>
-            <a:off x="960120" y="4361688"/>
-            <a:ext cx="10241280" cy="292608"/>
-          </a:xfrm>
-          <a:prstGeom prst="rect">
-            <a:avLst/>
-          </a:prstGeom>
-          <a:noFill/>
-        </p:spPr>
-        <p:txBody>
-          <a:bodyPr wrap="none" anchor="t">
-            <a:spAutoFit/>
-          </a:bodyPr>
-          <a:lstStyle/>
-          <a:p>
-            <a:pPr algn="l"/>
-            <a:r>
-              <a:rPr sz="1500" b="1">
-                <a:solidFill>
-                  <a:srgbClr val="143057"/>
-                </a:solidFill>
-                <a:latin typeface="Aptos"/>
-              </a:rPr>
-              <a:t>Work Completed</a:t>
-            </a:r>
-          </a:p>
-        </p:txBody>
-      </p:sp>
-      <p:sp>
-        <p:nvSpPr>
-          <p:cNvPr id="25" name="TextBox 24"/>
-          <p:cNvSpPr txBox="1"/>
-          <p:nvPr/>
-        </p:nvSpPr>
-        <p:spPr>
-          <a:xfrm>
-            <a:off x="960120" y="4754880"/>
-            <a:ext cx="10241280" cy="457200"/>
-          </a:xfrm>
-          <a:prstGeom prst="rect">
-            <a:avLst/>
-          </a:prstGeom>
-          <a:noFill/>
-        </p:spPr>
-        <p:txBody>
-          <a:bodyPr wrap="none" anchor="t">
-            <a:spAutoFit/>
-          </a:bodyPr>
-          <a:lstStyle/>
-          <a:p>
-            <a:pPr algn="l"/>
-            <a:r>
-              <a:rPr sz="1300" b="0">
-                <a:solidFill>
-                  <a:srgbClr val="2D2D2D"/>
-                </a:solidFill>
-                <a:latin typeface="Aptos"/>
-              </a:rPr>
-              <a:t>Five web projects covering responsive design, JavaScript applications, games, portfolio development and weather data integration.</a:t>
-            </a:r>
-          </a:p>
-        </p:txBody>
-      </p:sp>
-      <p:sp>
-        <p:nvSpPr>
-          <p:cNvPr id="27" name="TextBox 26"/>
-          <p:cNvSpPr txBox="1"/>
-          <p:nvPr/>
-        </p:nvSpPr>
-        <p:spPr>
-          <a:xfrm>
-            <a:off x="11064240" y="6620256"/>
-            <a:ext cx="411480" cy="164592"/>
-          </a:xfrm>
-          <a:prstGeom prst="rect">
-            <a:avLst/>
-          </a:prstGeom>
-          <a:noFill/>
-        </p:spPr>
-        <p:txBody>
-          <a:bodyPr wrap="none" anchor="t">
-            <a:spAutoFit/>
-          </a:bodyPr>
-          <a:lstStyle/>
-          <a:p>
-            <a:pPr algn="r"/>
-            <a:r>
-              <a:rPr sz="850" b="1">
-                <a:solidFill>
-                  <a:srgbClr val="FFFFFF"/>
-                </a:solidFill>
-                <a:latin typeface="Aptos"/>
-              </a:rPr>
-              <a:t>3</a:t>
+              <a:t>8</a:t>
             </a:r>
           </a:p>
         </p:txBody>
@@ -11776,7 +11560,7 @@
                 </a:solidFill>
                 <a:latin typeface="Aptos Display"/>
               </a:rPr>
-              <a:t>OBJECTIVES</a:t>
+              <a:t>TIC-TAC-TOE WEB APPLICATION</a:t>
             </a:r>
           </a:p>
         </p:txBody>
@@ -11875,14 +11659,95 @@
       </p:sp>
       <p:sp>
         <p:nvSpPr>
-          <p:cNvPr id="6" name="Rounded Rectangle 5"/>
+          <p:cNvPr id="6" name="Rectangle 5"/>
           <p:cNvSpPr/>
           <p:nvPr/>
         </p:nvSpPr>
         <p:spPr>
           <a:xfrm>
-            <a:off x="914400" y="1417320"/>
-            <a:ext cx="10332720" cy="4526280"/>
+            <a:off x="822960" y="1417320"/>
+            <a:ext cx="1965960" cy="411480"/>
+          </a:xfrm>
+          <a:prstGeom prst="rect">
+            <a:avLst/>
+          </a:prstGeom>
+          <a:solidFill>
+            <a:srgbClr val="A6232D"/>
+          </a:solidFill>
+          <a:ln>
+            <a:solidFill>
+              <a:srgbClr val="A6232D"/>
+            </a:solidFill>
+          </a:ln>
+        </p:spPr>
+        <p:style>
+          <a:lnRef idx="1">
+            <a:schemeClr val="accent1"/>
+          </a:lnRef>
+          <a:fillRef idx="3">
+            <a:schemeClr val="accent1"/>
+          </a:fillRef>
+          <a:effectRef idx="2">
+            <a:schemeClr val="accent1"/>
+          </a:effectRef>
+          <a:fontRef idx="minor">
+            <a:schemeClr val="lt1"/>
+          </a:fontRef>
+        </p:style>
+        <p:txBody>
+          <a:bodyPr rtlCol="0" anchor="ctr"/>
+          <a:lstStyle/>
+          <a:p>
+            <a:pPr algn="ctr"/>
+            <a:endParaRPr/>
+          </a:p>
+        </p:txBody>
+      </p:sp>
+      <p:sp>
+        <p:nvSpPr>
+          <p:cNvPr id="7" name="TextBox 6"/>
+          <p:cNvSpPr txBox="1"/>
+          <p:nvPr/>
+        </p:nvSpPr>
+        <p:spPr>
+          <a:xfrm>
+            <a:off x="822960" y="1490472"/>
+            <a:ext cx="1965960" cy="201168"/>
+          </a:xfrm>
+          <a:prstGeom prst="rect">
+            <a:avLst/>
+          </a:prstGeom>
+          <a:noFill/>
+        </p:spPr>
+        <p:txBody>
+          <a:bodyPr wrap="none" anchor="t">
+            <a:spAutoFit/>
+          </a:bodyPr>
+          <a:lstStyle/>
+          <a:p>
+            <a:pPr algn="ctr"/>
+            <a:r>
+              <a:rPr sz="1000" b="1">
+                <a:solidFill>
+                  <a:srgbClr val="FFFFFF"/>
+                </a:solidFill>
+                <a:latin typeface="Aptos"/>
+              </a:rPr>
+              <a:t>PROJECT 03</a:t>
+            </a:r>
+          </a:p>
+        </p:txBody>
+      </p:sp>
+      <p:sp>
+        <p:nvSpPr>
+          <p:cNvPr id="8" name="Rounded Rectangle 7"/>
+          <p:cNvSpPr/>
+          <p:nvPr/>
+        </p:nvSpPr>
+        <p:spPr>
+          <a:xfrm>
+            <a:off x="822960" y="2057400"/>
+            <a:ext cx="10561320" cy="3246120"/>
           </a:xfrm>
           <a:prstGeom prst="roundRect">
             <a:avLst>
@@ -11923,14 +11788,14 @@
       </p:sp>
       <p:sp>
         <p:nvSpPr>
-          <p:cNvPr id="7" name="TextBox 6"/>
+          <p:cNvPr id="9" name="TextBox 8"/>
           <p:cNvSpPr txBox="1"/>
           <p:nvPr/>
         </p:nvSpPr>
         <p:spPr>
           <a:xfrm>
-            <a:off x="1325880" y="1783080"/>
-            <a:ext cx="9509760" cy="3749039"/>
+            <a:off x="1234440" y="2514600"/>
+            <a:ext cx="9784080" cy="1715854"/>
           </a:xfrm>
           <a:prstGeom prst="rect">
             <a:avLst/>
@@ -11945,9 +11810,9 @@
           <a:p>
             <a:pPr>
               <a:spcAft>
-                <a:spcPts val="1600"/>
+                <a:spcPts val="1500"/>
               </a:spcAft>
-              <a:defRPr sz="1800">
+              <a:defRPr sz="1700">
                 <a:solidFill>
                   <a:srgbClr val="2D2D2D"/>
                 </a:solidFill>
@@ -11955,15 +11820,16 @@
               </a:defRPr>
             </a:pPr>
             <a:r>
-              <a:t>• Gain practical experience in front-end web development.</a:t>
+              <a:rPr dirty="0"/>
+              <a:t>• Created an interactive Tic-Tac-Toe game using HTML, CSS and JavaScript.</a:t>
             </a:r>
           </a:p>
           <a:p>
             <a:pPr>
               <a:spcAft>
-                <a:spcPts val="1600"/>
+                <a:spcPts val="1500"/>
               </a:spcAft>
-              <a:defRPr sz="1800">
+              <a:defRPr sz="1700">
                 <a:solidFill>
                   <a:srgbClr val="2D2D2D"/>
                 </a:solidFill>
@@ -11971,15 +11837,24 @@
               </a:defRPr>
             </a:pPr>
             <a:r>
-              <a:t>• Strengthen understanding of HTML, CSS and JavaScript.</a:t>
+              <a:rPr dirty="0"/>
+              <a:t>• Implemented turn-based game logic</a:t>
+            </a:r>
+            <a:r>
+              <a:rPr lang="en-US" dirty="0"/>
+              <a:t> and also add for single user, player vs AI</a:t>
+            </a:r>
+            <a:r>
+              <a:rPr dirty="0"/>
+              <a:t>.</a:t>
             </a:r>
           </a:p>
           <a:p>
             <a:pPr>
               <a:spcAft>
-                <a:spcPts val="1600"/>
+                <a:spcPts val="1500"/>
               </a:spcAft>
-              <a:defRPr sz="1800">
+              <a:defRPr sz="1700">
                 <a:solidFill>
                   <a:srgbClr val="2D2D2D"/>
                 </a:solidFill>
@@ -11987,15 +11862,16 @@
               </a:defRPr>
             </a:pPr>
             <a:r>
-              <a:t>• Build responsive and user-friendly web pages.</a:t>
+              <a:rPr dirty="0"/>
+              <a:t>• Added winner checking and game reset functionality.</a:t>
             </a:r>
           </a:p>
           <a:p>
             <a:pPr>
               <a:spcAft>
-                <a:spcPts val="1600"/>
+                <a:spcPts val="1500"/>
               </a:spcAft>
-              <a:defRPr sz="1800">
+              <a:defRPr sz="1700">
                 <a:solidFill>
                   <a:srgbClr val="2D2D2D"/>
                 </a:solidFill>
@@ -12003,46 +11879,15 @@
               </a:defRPr>
             </a:pPr>
             <a:r>
-              <a:t>• Implement interactive functionality using JavaScript.</a:t>
-            </a:r>
-          </a:p>
-          <a:p>
-            <a:pPr>
-              <a:spcAft>
-                <a:spcPts val="1600"/>
-              </a:spcAft>
-              <a:defRPr sz="1800">
-                <a:solidFill>
-                  <a:srgbClr val="2D2D2D"/>
-                </a:solidFill>
-                <a:latin typeface="Aptos"/>
-              </a:defRPr>
-            </a:pPr>
-            <a:r>
-              <a:t>• Understand basic API integration through a weather application.</a:t>
-            </a:r>
-          </a:p>
-          <a:p>
-            <a:pPr>
-              <a:spcAft>
-                <a:spcPts val="1600"/>
-              </a:spcAft>
-              <a:defRPr sz="1800">
-                <a:solidFill>
-                  <a:srgbClr val="2D2D2D"/>
-                </a:solidFill>
-                <a:latin typeface="Aptos"/>
-              </a:defRPr>
-            </a:pPr>
-            <a:r>
-              <a:t>• Improve problem-solving, debugging and project-building skills.</a:t>
-            </a:r>
-          </a:p>
-        </p:txBody>
-      </p:sp>
-      <p:sp>
-        <p:nvSpPr>
-          <p:cNvPr id="9" name="TextBox 8"/>
+              <a:rPr dirty="0"/>
+              <a:t>• Focused on simple and engaging user interaction.</a:t>
+            </a:r>
+          </a:p>
+        </p:txBody>
+      </p:sp>
+      <p:sp>
+        <p:nvSpPr>
+          <p:cNvPr id="11" name="TextBox 10"/>
           <p:cNvSpPr txBox="1"/>
           <p:nvPr/>
         </p:nvSpPr>
@@ -12070,7 +11915,7 @@
                 </a:solidFill>
                 <a:latin typeface="Aptos"/>
               </a:rPr>
-              <a:t>4</a:t>
+              <a:t>9</a:t>
             </a:r>
           </a:p>
         </p:txBody>
